--- a/assets/结构图/时间轴与发展历程-001/example.pptx
+++ b/assets/结构图/时间轴与发展历程-001/example.pptx
@@ -2,13 +2,16 @@
 <file path=ppt/presentation.xml><?xml version="1.0" encoding="utf-8"?>
 <p:presentation xmlns:p="http://schemas.openxmlformats.org/presentationml/2006/main">
   <p:sldMasterIdLst>
-    <p:sldMasterId xmlns:r="http://schemas.openxmlformats.org/officeDocument/2006/relationships" id="2147483648" r:id="Ref43332d885d436b"/>
+    <p:sldMasterId xmlns:r="http://schemas.openxmlformats.org/officeDocument/2006/relationships" id="2147483648" r:id="Ra91c4dae9a7e4afa"/>
   </p:sldMasterIdLst>
   <p:notesMasterIdLst>
-    <p:notesMasterId xmlns:r="http://schemas.openxmlformats.org/officeDocument/2006/relationships" r:id="R6ea82d019d574a43"/>
+    <p:notesMasterId xmlns:r="http://schemas.openxmlformats.org/officeDocument/2006/relationships" r:id="Ra363b489e9c94fae"/>
   </p:notesMasterIdLst>
   <p:sldIdLst>
-    <p:sldId xmlns:r="http://schemas.openxmlformats.org/officeDocument/2006/relationships" id="256" r:id="Rde85ea62b0ca4612"/>
+    <p:sldId xmlns:r="http://schemas.openxmlformats.org/officeDocument/2006/relationships" id="256" r:id="R7bca85cab1a54283"/>
+    <p:sldId xmlns:r="http://schemas.openxmlformats.org/officeDocument/2006/relationships" id="257" r:id="R66d1c3b4ab8a4caf"/>
+    <p:sldId xmlns:r="http://schemas.openxmlformats.org/officeDocument/2006/relationships" id="258" r:id="R92248cca2ffc41f2"/>
+    <p:sldId xmlns:r="http://schemas.openxmlformats.org/officeDocument/2006/relationships" id="259" r:id="R68676e74a6004a1c"/>
   </p:sldIdLst>
   <p:sldSz cx="12192000" cy="6858000"/>
   <p:notesSz cx="6858000" cy="9144000"/>
@@ -468,6 +471,204 @@
 </p:notes>
 </file>
 
+<file path=ppt/notesSlides/notesSlide2.xml><?xml version="1.0" encoding="utf-8"?>
+<p:notes xmlns:p="http://schemas.openxmlformats.org/presentationml/2006/main">
+  <p:cSld>
+    <p:spTree>
+      <p:nvGrpSpPr>
+        <p:cNvPr id="1" name=""/>
+        <p:cNvGrpSpPr/>
+        <p:nvPr/>
+      </p:nvGrpSpPr>
+      <p:grpSpPr>
+        <a:xfrm xmlns:a="http://schemas.openxmlformats.org/drawingml/2006/main"/>
+      </p:grpSpPr>
+      <p:sp>
+        <p:nvSpPr>
+          <p:cNvPr id="2" name="Slide Image Placeholder 1"/>
+          <p:cNvSpPr>
+            <a:spLocks xmlns:a="http://schemas.openxmlformats.org/drawingml/2006/main" noGrp="1"/>
+          </p:cNvSpPr>
+          <p:nvPr>
+            <p:ph type="sldImg" idx="0"/>
+          </p:nvPr>
+        </p:nvSpPr>
+        <p:spPr/>
+      </p:sp>
+      <p:sp>
+        <p:nvSpPr>
+          <p:cNvPr id="3" name="Notes Placeholder 2"/>
+          <p:cNvSpPr>
+            <a:spLocks xmlns:a="http://schemas.openxmlformats.org/drawingml/2006/main" noGrp="1"/>
+          </p:cNvSpPr>
+          <p:nvPr>
+            <p:ph type="body" idx="1"/>
+          </p:nvPr>
+        </p:nvSpPr>
+        <p:spPr/>
+        <p:txBody>
+          <a:bodyPr xmlns:a="http://schemas.openxmlformats.org/drawingml/2006/main"/>
+          <a:lstStyle xmlns:a="http://schemas.openxmlformats.org/drawingml/2006/main"/>
+          <a:p xmlns:a="http://schemas.openxmlformats.org/drawingml/2006/main"/>
+        </p:txBody>
+      </p:sp>
+      <p:sp>
+        <p:nvSpPr>
+          <p:cNvPr id="4" name="Slide Number Placeholder 3"/>
+          <p:cNvSpPr>
+            <a:spLocks xmlns:a="http://schemas.openxmlformats.org/drawingml/2006/main" noGrp="1"/>
+          </p:cNvSpPr>
+          <p:nvPr>
+            <p:ph type="sldNum" idx="5"/>
+          </p:nvPr>
+        </p:nvSpPr>
+        <p:spPr/>
+        <p:txBody>
+          <a:bodyPr xmlns:a="http://schemas.openxmlformats.org/drawingml/2006/main"/>
+          <a:lstStyle xmlns:a="http://schemas.openxmlformats.org/drawingml/2006/main"/>
+          <a:p xmlns:a="http://schemas.openxmlformats.org/drawingml/2006/main"/>
+        </p:txBody>
+      </p:sp>
+    </p:spTree>
+  </p:cSld>
+  <p:clrMapOvr>
+    <a:masterClrMapping xmlns:a="http://schemas.openxmlformats.org/drawingml/2006/main"/>
+  </p:clrMapOvr>
+</p:notes>
+</file>
+
+<file path=ppt/notesSlides/notesSlide3.xml><?xml version="1.0" encoding="utf-8"?>
+<p:notes xmlns:p="http://schemas.openxmlformats.org/presentationml/2006/main">
+  <p:cSld>
+    <p:spTree>
+      <p:nvGrpSpPr>
+        <p:cNvPr id="1" name=""/>
+        <p:cNvGrpSpPr/>
+        <p:nvPr/>
+      </p:nvGrpSpPr>
+      <p:grpSpPr>
+        <a:xfrm xmlns:a="http://schemas.openxmlformats.org/drawingml/2006/main"/>
+      </p:grpSpPr>
+      <p:sp>
+        <p:nvSpPr>
+          <p:cNvPr id="2" name="Slide Image Placeholder 1"/>
+          <p:cNvSpPr>
+            <a:spLocks xmlns:a="http://schemas.openxmlformats.org/drawingml/2006/main" noGrp="1"/>
+          </p:cNvSpPr>
+          <p:nvPr>
+            <p:ph type="sldImg" idx="0"/>
+          </p:nvPr>
+        </p:nvSpPr>
+        <p:spPr/>
+      </p:sp>
+      <p:sp>
+        <p:nvSpPr>
+          <p:cNvPr id="3" name="Notes Placeholder 2"/>
+          <p:cNvSpPr>
+            <a:spLocks xmlns:a="http://schemas.openxmlformats.org/drawingml/2006/main" noGrp="1"/>
+          </p:cNvSpPr>
+          <p:nvPr>
+            <p:ph type="body" idx="1"/>
+          </p:nvPr>
+        </p:nvSpPr>
+        <p:spPr/>
+        <p:txBody>
+          <a:bodyPr xmlns:a="http://schemas.openxmlformats.org/drawingml/2006/main"/>
+          <a:lstStyle xmlns:a="http://schemas.openxmlformats.org/drawingml/2006/main"/>
+          <a:p xmlns:a="http://schemas.openxmlformats.org/drawingml/2006/main"/>
+        </p:txBody>
+      </p:sp>
+      <p:sp>
+        <p:nvSpPr>
+          <p:cNvPr id="4" name="Slide Number Placeholder 3"/>
+          <p:cNvSpPr>
+            <a:spLocks xmlns:a="http://schemas.openxmlformats.org/drawingml/2006/main" noGrp="1"/>
+          </p:cNvSpPr>
+          <p:nvPr>
+            <p:ph type="sldNum" idx="5"/>
+          </p:nvPr>
+        </p:nvSpPr>
+        <p:spPr/>
+        <p:txBody>
+          <a:bodyPr xmlns:a="http://schemas.openxmlformats.org/drawingml/2006/main"/>
+          <a:lstStyle xmlns:a="http://schemas.openxmlformats.org/drawingml/2006/main"/>
+          <a:p xmlns:a="http://schemas.openxmlformats.org/drawingml/2006/main"/>
+        </p:txBody>
+      </p:sp>
+    </p:spTree>
+  </p:cSld>
+  <p:clrMapOvr>
+    <a:masterClrMapping xmlns:a="http://schemas.openxmlformats.org/drawingml/2006/main"/>
+  </p:clrMapOvr>
+</p:notes>
+</file>
+
+<file path=ppt/notesSlides/notesSlide4.xml><?xml version="1.0" encoding="utf-8"?>
+<p:notes xmlns:p="http://schemas.openxmlformats.org/presentationml/2006/main">
+  <p:cSld>
+    <p:spTree>
+      <p:nvGrpSpPr>
+        <p:cNvPr id="1" name=""/>
+        <p:cNvGrpSpPr/>
+        <p:nvPr/>
+      </p:nvGrpSpPr>
+      <p:grpSpPr>
+        <a:xfrm xmlns:a="http://schemas.openxmlformats.org/drawingml/2006/main"/>
+      </p:grpSpPr>
+      <p:sp>
+        <p:nvSpPr>
+          <p:cNvPr id="2" name="Slide Image Placeholder 1"/>
+          <p:cNvSpPr>
+            <a:spLocks xmlns:a="http://schemas.openxmlformats.org/drawingml/2006/main" noGrp="1"/>
+          </p:cNvSpPr>
+          <p:nvPr>
+            <p:ph type="sldImg" idx="0"/>
+          </p:nvPr>
+        </p:nvSpPr>
+        <p:spPr/>
+      </p:sp>
+      <p:sp>
+        <p:nvSpPr>
+          <p:cNvPr id="3" name="Notes Placeholder 2"/>
+          <p:cNvSpPr>
+            <a:spLocks xmlns:a="http://schemas.openxmlformats.org/drawingml/2006/main" noGrp="1"/>
+          </p:cNvSpPr>
+          <p:nvPr>
+            <p:ph type="body" idx="1"/>
+          </p:nvPr>
+        </p:nvSpPr>
+        <p:spPr/>
+        <p:txBody>
+          <a:bodyPr xmlns:a="http://schemas.openxmlformats.org/drawingml/2006/main"/>
+          <a:lstStyle xmlns:a="http://schemas.openxmlformats.org/drawingml/2006/main"/>
+          <a:p xmlns:a="http://schemas.openxmlformats.org/drawingml/2006/main"/>
+        </p:txBody>
+      </p:sp>
+      <p:sp>
+        <p:nvSpPr>
+          <p:cNvPr id="4" name="Slide Number Placeholder 3"/>
+          <p:cNvSpPr>
+            <a:spLocks xmlns:a="http://schemas.openxmlformats.org/drawingml/2006/main" noGrp="1"/>
+          </p:cNvSpPr>
+          <p:nvPr>
+            <p:ph type="sldNum" idx="5"/>
+          </p:nvPr>
+        </p:nvSpPr>
+        <p:spPr/>
+        <p:txBody>
+          <a:bodyPr xmlns:a="http://schemas.openxmlformats.org/drawingml/2006/main"/>
+          <a:lstStyle xmlns:a="http://schemas.openxmlformats.org/drawingml/2006/main"/>
+          <a:p xmlns:a="http://schemas.openxmlformats.org/drawingml/2006/main"/>
+        </p:txBody>
+      </p:sp>
+    </p:spTree>
+  </p:cSld>
+  <p:clrMapOvr>
+    <a:masterClrMapping xmlns:a="http://schemas.openxmlformats.org/drawingml/2006/main"/>
+  </p:clrMapOvr>
+</p:notes>
+</file>
+
 <file path=ppt/slideLayouts/slideLayout1.xml><?xml version="1.0" encoding="utf-8"?>
 <p:sldLayout xmlns:p="http://schemas.openxmlformats.org/presentationml/2006/main" type="title">
   <p:cSld name="Title Slide">
@@ -506,7 +707,7 @@
   </p:cSld>
   <p:clrMap bg1="lt1" tx1="dk1" bg2="lt2" tx2="dk2" accent1="accent1" accent2="accent2" accent3="accent3" accent4="accent4" accent5="accent5" accent6="accent6" hlink="hlink" folHlink="folHlink"/>
   <p:sldLayoutIdLst>
-    <p:sldLayoutId xmlns:r="http://schemas.openxmlformats.org/officeDocument/2006/relationships" id="2147483649" r:id="Rb281635a73874d5e"/>
+    <p:sldLayoutId xmlns:r="http://schemas.openxmlformats.org/officeDocument/2006/relationships" id="2147483649" r:id="R954599f0ab224752"/>
   </p:sldLayoutIdLst>
   <p:txStyles>
     <p:titleStyle>
@@ -1054,10 +1255,10 @@
       </p:grpSpPr>
       <p:sp>
         <p:nvSpPr>
-          <p:cNvPr id="30" name="">
-            <a:extLst xmlns:a="http://schemas.openxmlformats.org/drawingml/2006/main">
-              <a:ext uri="{FF2B5EF4-FFF2-40B4-BE49-F238E27FC236}">
-                <a16:creationId xmlns:a16="http://schemas.microsoft.com/office/drawing/2014/main" id="{3436DECB-D7F7-48F1-A3B1-95C500A45C03}"/>
+          <p:cNvPr id="24" name="">
+            <a:extLst xmlns:a="http://schemas.openxmlformats.org/drawingml/2006/main">
+              <a:ext uri="{FF2B5EF4-FFF2-40B4-BE49-F238E27FC236}">
+                <a16:creationId xmlns:a16="http://schemas.microsoft.com/office/drawing/2014/main" id="{3BE5C3E4-0005-4096-9295-6B6610FA891A}"/>
               </a:ext>
             </a:extLst>
           </p:cNvPr>
@@ -1105,7 +1306,7 @@
                 <a:ea typeface="Microsoft YaHei"/>
                 <a:cs typeface="Microsoft YaHei"/>
               </a:rPr>
-              <a:t>时间轴与发展历程</a:t>
+              <a:t>发展历程</a:t>
             </a:r>
           </a:p>
         </p:txBody>
@@ -1115,7 +1316,7 @@
           <p:cNvPr id="2" name="">
             <a:extLst xmlns:a="http://schemas.openxmlformats.org/drawingml/2006/main">
               <a:ext uri="{FF2B5EF4-FFF2-40B4-BE49-F238E27FC236}">
-                <a16:creationId xmlns:a16="http://schemas.microsoft.com/office/drawing/2014/main" id="{351D27F4-B54D-40E6-BCA5-9ACC5DEAECB6}"/>
+                <a16:creationId xmlns:a16="http://schemas.microsoft.com/office/drawing/2014/main" id="{76830EF1-DE50-48D7-A009-F55FF9868E93}"/>
               </a:ext>
             </a:extLst>
           </p:cNvPr>
@@ -1173,7 +1374,7 @@
           <p:cNvPr id="3" name="">
             <a:extLst xmlns:a="http://schemas.openxmlformats.org/drawingml/2006/main">
               <a:ext uri="{FF2B5EF4-FFF2-40B4-BE49-F238E27FC236}">
-                <a16:creationId xmlns:a16="http://schemas.microsoft.com/office/drawing/2014/main" id="{57133829-69BF-4720-9B86-3C6A94AC11D7}"/>
+                <a16:creationId xmlns:a16="http://schemas.microsoft.com/office/drawing/2014/main" id="{1232FB3B-21E7-464E-B423-2B5CC7D1A1BA}"/>
               </a:ext>
             </a:extLst>
           </p:cNvPr>
@@ -1185,11 +1386,11 @@
         <p:spPr>
           <a:xfrm xmlns:a="http://schemas.openxmlformats.org/drawingml/2006/main">
             <a:off x="638175" y="1476375"/>
-            <a:ext cx="2686050" cy="4495800"/>
+            <a:ext cx="3600450" cy="4495800"/>
           </a:xfrm>
           <a:prstGeom xmlns:a="http://schemas.openxmlformats.org/drawingml/2006/main" prst="roundRect">
             <a:avLst>
-              <a:gd name="adj" fmla="val 709"/>
+              <a:gd name="adj" fmla="val 529"/>
             </a:avLst>
           </a:prstGeom>
           <a:solidFill xmlns:a="http://schemas.openxmlformats.org/drawingml/2006/main">
@@ -1206,23 +1407,23 @@
           <p:cNvPr id="4" name="">
             <a:extLst xmlns:a="http://schemas.openxmlformats.org/drawingml/2006/main">
               <a:ext uri="{FF2B5EF4-FFF2-40B4-BE49-F238E27FC236}">
-                <a16:creationId xmlns:a16="http://schemas.microsoft.com/office/drawing/2014/main" id="{7393420A-1120-4F00-BB5F-94A2E4047A27}"/>
-              </a:ext>
-            </a:extLst>
-          </p:cNvPr>
-          <p:cNvSpPr>
-            <a:spLocks xmlns:a="http://schemas.openxmlformats.org/drawingml/2006/main" noGrp="1"/>
-          </p:cNvSpPr>
-          <p:nvPr/>
-        </p:nvSpPr>
-        <p:spPr>
-          <a:xfrm xmlns:a="http://schemas.openxmlformats.org/drawingml/2006/main">
-            <a:off x="6124575" y="1476375"/>
-            <a:ext cx="2686050" cy="4495800"/>
+                <a16:creationId xmlns:a16="http://schemas.microsoft.com/office/drawing/2014/main" id="{C2CC5890-C0B4-414B-B227-12ABDBF777EE}"/>
+              </a:ext>
+            </a:extLst>
+          </p:cNvPr>
+          <p:cNvSpPr>
+            <a:spLocks xmlns:a="http://schemas.openxmlformats.org/drawingml/2006/main" noGrp="1"/>
+          </p:cNvSpPr>
+          <p:nvPr/>
+        </p:nvSpPr>
+        <p:spPr>
+          <a:xfrm xmlns:a="http://schemas.openxmlformats.org/drawingml/2006/main">
+            <a:off x="7953375" y="1476375"/>
+            <a:ext cx="3600450" cy="4495800"/>
           </a:xfrm>
           <a:prstGeom xmlns:a="http://schemas.openxmlformats.org/drawingml/2006/main" prst="roundRect">
             <a:avLst>
-              <a:gd name="adj" fmla="val 709"/>
+              <a:gd name="adj" fmla="val 529"/>
             </a:avLst>
           </a:prstGeom>
           <a:solidFill xmlns:a="http://schemas.openxmlformats.org/drawingml/2006/main">
@@ -1239,7 +1440,7 @@
           <p:cNvPr id="5" name="PPAGENT_QA|parent=timeline-axis|domains=timeline-connection">
             <a:extLst xmlns:a="http://schemas.openxmlformats.org/drawingml/2006/main">
               <a:ext uri="{FF2B5EF4-FFF2-40B4-BE49-F238E27FC236}">
-                <a16:creationId xmlns:a16="http://schemas.microsoft.com/office/drawing/2014/main" id="{9B198F47-97CD-455F-B087-A4D8CFFB955D}"/>
+                <a16:creationId xmlns:a16="http://schemas.microsoft.com/office/drawing/2014/main" id="{6C844F86-76FC-4D6E-90D3-823938BAAC88}"/>
               </a:ext>
             </a:extLst>
           </p:cNvPr>
@@ -1270,7 +1471,7 @@
           <p:cNvPr id="6" name="PPAGENT_QA|parent=timeline-period-0|domains=timeline-content">
             <a:extLst xmlns:a="http://schemas.openxmlformats.org/drawingml/2006/main">
               <a:ext uri="{FF2B5EF4-FFF2-40B4-BE49-F238E27FC236}">
-                <a16:creationId xmlns:a16="http://schemas.microsoft.com/office/drawing/2014/main" id="{6DBE360C-0D13-4E4F-BDEE-B431987C5B4C}"/>
+                <a16:creationId xmlns:a16="http://schemas.microsoft.com/office/drawing/2014/main" id="{742BA81B-F58D-4518-B863-23E5C6D61FAC}"/>
               </a:ext>
             </a:extLst>
           </p:cNvPr>
@@ -1282,7 +1483,7 @@
         <p:spPr>
           <a:xfrm xmlns:a="http://schemas.openxmlformats.org/drawingml/2006/main">
             <a:off x="723900" y="1619250"/>
-            <a:ext cx="2514600" cy="1000125"/>
+            <a:ext cx="3429000" cy="1000125"/>
           </a:xfrm>
           <a:prstGeom xmlns:a="http://schemas.openxmlformats.org/drawingml/2006/main" prst="rect">
             <a:avLst/>
@@ -1318,7 +1519,7 @@
                 <a:ea typeface="Microsoft YaHei"/>
                 <a:cs typeface="Microsoft YaHei"/>
               </a:rPr>
-              <a:t>2025</a:t>
+              <a:t>2024</a:t>
             </a:r>
           </a:p>
         </p:txBody>
@@ -1328,7 +1529,7 @@
           <p:cNvPr id="7" name="">
             <a:extLst xmlns:a="http://schemas.openxmlformats.org/drawingml/2006/main">
               <a:ext uri="{FF2B5EF4-FFF2-40B4-BE49-F238E27FC236}">
-                <a16:creationId xmlns:a16="http://schemas.microsoft.com/office/drawing/2014/main" id="{632191EE-BC1E-43CA-B063-318CAA43F726}"/>
+                <a16:creationId xmlns:a16="http://schemas.microsoft.com/office/drawing/2014/main" id="{A9F8FD77-9EA1-4E8B-B9C8-E15686BCD18F}"/>
               </a:ext>
             </a:extLst>
           </p:cNvPr>
@@ -1340,7 +1541,7 @@
         <p:spPr>
           <a:xfrm xmlns:a="http://schemas.openxmlformats.org/drawingml/2006/main">
             <a:off x="723900" y="2724150"/>
-            <a:ext cx="2514600" cy="247650"/>
+            <a:ext cx="3429000" cy="247650"/>
           </a:xfrm>
           <a:prstGeom xmlns:a="http://schemas.openxmlformats.org/drawingml/2006/main" prst="rect">
             <a:avLst/>
@@ -1386,18 +1587,18 @@
           <p:cNvPr id="8" name="PPAGENT_QA|parent=timeline-node-0|domains=timeline-connection">
             <a:extLst xmlns:a="http://schemas.openxmlformats.org/drawingml/2006/main">
               <a:ext uri="{FF2B5EF4-FFF2-40B4-BE49-F238E27FC236}">
-                <a16:creationId xmlns:a16="http://schemas.microsoft.com/office/drawing/2014/main" id="{5DB9841F-351F-4046-9259-BE446E67F8C6}"/>
-              </a:ext>
-            </a:extLst>
-          </p:cNvPr>
-          <p:cNvSpPr>
-            <a:spLocks xmlns:a="http://schemas.openxmlformats.org/drawingml/2006/main" noGrp="1"/>
-          </p:cNvSpPr>
-          <p:nvPr/>
-        </p:nvSpPr>
-        <p:spPr>
-          <a:xfrm xmlns:a="http://schemas.openxmlformats.org/drawingml/2006/main">
-            <a:off x="1857375" y="3086100"/>
+                <a16:creationId xmlns:a16="http://schemas.microsoft.com/office/drawing/2014/main" id="{FB37686A-7CC1-4DC0-BC2F-DC44FC2389BF}"/>
+              </a:ext>
+            </a:extLst>
+          </p:cNvPr>
+          <p:cNvSpPr>
+            <a:spLocks xmlns:a="http://schemas.openxmlformats.org/drawingml/2006/main" noGrp="1"/>
+          </p:cNvSpPr>
+          <p:nvPr/>
+        </p:nvSpPr>
+        <p:spPr>
+          <a:xfrm xmlns:a="http://schemas.openxmlformats.org/drawingml/2006/main">
+            <a:off x="2314575" y="3086100"/>
             <a:ext cx="247650" cy="247650"/>
           </a:xfrm>
           <a:prstGeom xmlns:a="http://schemas.openxmlformats.org/drawingml/2006/main" prst="ellipse">
@@ -1425,7 +1626,7 @@
           <p:cNvPr id="9" name="PPAGENT_QA|parent=timeline-title-0|domains=timeline-content">
             <a:extLst xmlns:a="http://schemas.openxmlformats.org/drawingml/2006/main">
               <a:ext uri="{FF2B5EF4-FFF2-40B4-BE49-F238E27FC236}">
-                <a16:creationId xmlns:a16="http://schemas.microsoft.com/office/drawing/2014/main" id="{05C541B6-B0C4-4EDD-BFF2-2B6F03DDC201}"/>
+                <a16:creationId xmlns:a16="http://schemas.microsoft.com/office/drawing/2014/main" id="{33EA94AB-6AB7-4DE0-BA2C-AF64F9362C4C}"/>
               </a:ext>
             </a:extLst>
           </p:cNvPr>
@@ -1437,7 +1638,7 @@
         <p:spPr>
           <a:xfrm xmlns:a="http://schemas.openxmlformats.org/drawingml/2006/main">
             <a:off x="723900" y="3581400"/>
-            <a:ext cx="2514600" cy="552450"/>
+            <a:ext cx="3429000" cy="552450"/>
           </a:xfrm>
           <a:prstGeom xmlns:a="http://schemas.openxmlformats.org/drawingml/2006/main" prst="rect">
             <a:avLst/>
@@ -1473,7 +1674,7 @@
                 <a:ea typeface="Microsoft YaHei"/>
                 <a:cs typeface="Microsoft YaHei"/>
               </a:rPr>
-              <a:t>验证方向</a:t>
+              <a:t>识别问题</a:t>
             </a:r>
           </a:p>
         </p:txBody>
@@ -1483,7 +1684,7 @@
           <p:cNvPr id="10" name="PPAGENT_QA|parent=timeline-body-0|domains=timeline-content">
             <a:extLst xmlns:a="http://schemas.openxmlformats.org/drawingml/2006/main">
               <a:ext uri="{FF2B5EF4-FFF2-40B4-BE49-F238E27FC236}">
-                <a16:creationId xmlns:a16="http://schemas.microsoft.com/office/drawing/2014/main" id="{03A3F85A-BB17-4C7E-AF3A-363E5B6F4BA5}"/>
+                <a16:creationId xmlns:a16="http://schemas.microsoft.com/office/drawing/2014/main" id="{E4894DC6-006E-49DF-AB2F-E0E09B576EC3}"/>
               </a:ext>
             </a:extLst>
           </p:cNvPr>
@@ -1495,7 +1696,7 @@
         <p:spPr>
           <a:xfrm xmlns:a="http://schemas.openxmlformats.org/drawingml/2006/main">
             <a:off x="762000" y="4210050"/>
-            <a:ext cx="2438400" cy="990600"/>
+            <a:ext cx="3352800" cy="990600"/>
           </a:xfrm>
           <a:prstGeom xmlns:a="http://schemas.openxmlformats.org/drawingml/2006/main" prst="rect">
             <a:avLst/>
@@ -1531,30 +1732,7 @@
                 <a:ea typeface="Microsoft YaHei"/>
                 <a:cs typeface="Microsoft YaHei"/>
               </a:rPr>
-              <a:t>用一个真实场景确认</a:t>
-            </a:r>
-          </a:p>
-          <a:p xmlns:a="http://schemas.openxmlformats.org/drawingml/2006/main">
-            <a:pPr algn="ctr">
-              <a:defRPr sz="1500" b="0">
-                <a:solidFill>
-                  <a:srgbClr val="475569"/>
-                </a:solidFill>
-                <a:latin typeface="Microsoft YaHei"/>
-                <a:ea typeface="Microsoft YaHei"/>
-                <a:cs typeface="Microsoft YaHei"/>
-              </a:defRPr>
-            </a:pPr>
-            <a:r>
-              <a:rPr sz="1500" b="0">
-                <a:solidFill>
-                  <a:srgbClr val="475569"/>
-                </a:solidFill>
-                <a:latin typeface="Microsoft YaHei"/>
-                <a:ea typeface="Microsoft YaHei"/>
-                <a:cs typeface="Microsoft YaHei"/>
-              </a:rPr>
-              <a:t>需求、边界与最小闭环</a:t>
+              <a:t>明确场景与主要约束</a:t>
             </a:r>
           </a:p>
         </p:txBody>
@@ -1564,18 +1742,18 @@
           <p:cNvPr id="11" name="PPAGENT_QA|parent=timeline-bar-0|domains=timeline-shape">
             <a:extLst xmlns:a="http://schemas.openxmlformats.org/drawingml/2006/main">
               <a:ext uri="{FF2B5EF4-FFF2-40B4-BE49-F238E27FC236}">
-                <a16:creationId xmlns:a16="http://schemas.microsoft.com/office/drawing/2014/main" id="{2379086B-C4C1-40DB-BD80-CC3F246C950D}"/>
-              </a:ext>
-            </a:extLst>
-          </p:cNvPr>
-          <p:cNvSpPr>
-            <a:spLocks xmlns:a="http://schemas.openxmlformats.org/drawingml/2006/main" noGrp="1"/>
-          </p:cNvSpPr>
-          <p:nvPr/>
-        </p:nvSpPr>
-        <p:spPr>
-          <a:xfrm xmlns:a="http://schemas.openxmlformats.org/drawingml/2006/main">
-            <a:off x="1752600" y="5391150"/>
+                <a16:creationId xmlns:a16="http://schemas.microsoft.com/office/drawing/2014/main" id="{C48F9994-26D1-4FF8-9F2F-6EA74379B856}"/>
+              </a:ext>
+            </a:extLst>
+          </p:cNvPr>
+          <p:cNvSpPr>
+            <a:spLocks xmlns:a="http://schemas.openxmlformats.org/drawingml/2006/main" noGrp="1"/>
+          </p:cNvSpPr>
+          <p:nvPr/>
+        </p:nvSpPr>
+        <p:spPr>
+          <a:xfrm xmlns:a="http://schemas.openxmlformats.org/drawingml/2006/main">
+            <a:off x="2209800" y="5391150"/>
             <a:ext cx="457200" cy="47625"/>
           </a:xfrm>
           <a:prstGeom xmlns:a="http://schemas.openxmlformats.org/drawingml/2006/main" prst="roundRect">
@@ -1597,19 +1775,19 @@
           <p:cNvPr id="12" name="PPAGENT_QA|parent=timeline-period-1|domains=timeline-content">
             <a:extLst xmlns:a="http://schemas.openxmlformats.org/drawingml/2006/main">
               <a:ext uri="{FF2B5EF4-FFF2-40B4-BE49-F238E27FC236}">
-                <a16:creationId xmlns:a16="http://schemas.microsoft.com/office/drawing/2014/main" id="{7836FCD2-DBB1-42F3-9318-385F78A10A41}"/>
-              </a:ext>
-            </a:extLst>
-          </p:cNvPr>
-          <p:cNvSpPr>
-            <a:spLocks xmlns:a="http://schemas.openxmlformats.org/drawingml/2006/main" noGrp="1"/>
-          </p:cNvSpPr>
-          <p:nvPr/>
-        </p:nvSpPr>
-        <p:spPr>
-          <a:xfrm xmlns:a="http://schemas.openxmlformats.org/drawingml/2006/main">
-            <a:off x="3467100" y="1619250"/>
-            <a:ext cx="2514600" cy="1000125"/>
+                <a16:creationId xmlns:a16="http://schemas.microsoft.com/office/drawing/2014/main" id="{1810D9D0-14F5-4331-9FF9-2C27CC31E3EC}"/>
+              </a:ext>
+            </a:extLst>
+          </p:cNvPr>
+          <p:cNvSpPr>
+            <a:spLocks xmlns:a="http://schemas.openxmlformats.org/drawingml/2006/main" noGrp="1"/>
+          </p:cNvSpPr>
+          <p:nvPr/>
+        </p:nvSpPr>
+        <p:spPr>
+          <a:xfrm xmlns:a="http://schemas.openxmlformats.org/drawingml/2006/main">
+            <a:off x="4381500" y="1619250"/>
+            <a:ext cx="3429000" cy="1000125"/>
           </a:xfrm>
           <a:prstGeom xmlns:a="http://schemas.openxmlformats.org/drawingml/2006/main" prst="rect">
             <a:avLst/>
@@ -1645,7 +1823,7 @@
                 <a:ea typeface="Microsoft YaHei"/>
                 <a:cs typeface="Microsoft YaHei"/>
               </a:rPr>
-              <a:t>2026</a:t>
+              <a:t>2025</a:t>
             </a:r>
           </a:p>
         </p:txBody>
@@ -1655,19 +1833,19 @@
           <p:cNvPr id="13" name="">
             <a:extLst xmlns:a="http://schemas.openxmlformats.org/drawingml/2006/main">
               <a:ext uri="{FF2B5EF4-FFF2-40B4-BE49-F238E27FC236}">
-                <a16:creationId xmlns:a16="http://schemas.microsoft.com/office/drawing/2014/main" id="{441796B6-A78F-4D66-8AA1-E4741277E3B6}"/>
-              </a:ext>
-            </a:extLst>
-          </p:cNvPr>
-          <p:cNvSpPr>
-            <a:spLocks xmlns:a="http://schemas.openxmlformats.org/drawingml/2006/main" noGrp="1"/>
-          </p:cNvSpPr>
-          <p:nvPr/>
-        </p:nvSpPr>
-        <p:spPr>
-          <a:xfrm xmlns:a="http://schemas.openxmlformats.org/drawingml/2006/main">
-            <a:off x="3467100" y="2724150"/>
-            <a:ext cx="2514600" cy="247650"/>
+                <a16:creationId xmlns:a16="http://schemas.microsoft.com/office/drawing/2014/main" id="{81EE2FF2-812B-4222-B0D8-C65E8880C2CD}"/>
+              </a:ext>
+            </a:extLst>
+          </p:cNvPr>
+          <p:cNvSpPr>
+            <a:spLocks xmlns:a="http://schemas.openxmlformats.org/drawingml/2006/main" noGrp="1"/>
+          </p:cNvSpPr>
+          <p:nvPr/>
+        </p:nvSpPr>
+        <p:spPr>
+          <a:xfrm xmlns:a="http://schemas.openxmlformats.org/drawingml/2006/main">
+            <a:off x="4381500" y="2724150"/>
+            <a:ext cx="3429000" cy="247650"/>
           </a:xfrm>
           <a:prstGeom xmlns:a="http://schemas.openxmlformats.org/drawingml/2006/main" prst="rect">
             <a:avLst/>
@@ -1713,18 +1891,18 @@
           <p:cNvPr id="14" name="PPAGENT_QA|parent=timeline-node-1|domains=timeline-connection">
             <a:extLst xmlns:a="http://schemas.openxmlformats.org/drawingml/2006/main">
               <a:ext uri="{FF2B5EF4-FFF2-40B4-BE49-F238E27FC236}">
-                <a16:creationId xmlns:a16="http://schemas.microsoft.com/office/drawing/2014/main" id="{CF78FDBA-E048-423F-A8DE-7428E775D8E7}"/>
-              </a:ext>
-            </a:extLst>
-          </p:cNvPr>
-          <p:cNvSpPr>
-            <a:spLocks xmlns:a="http://schemas.openxmlformats.org/drawingml/2006/main" noGrp="1"/>
-          </p:cNvSpPr>
-          <p:nvPr/>
-        </p:nvSpPr>
-        <p:spPr>
-          <a:xfrm xmlns:a="http://schemas.openxmlformats.org/drawingml/2006/main">
-            <a:off x="4600575" y="3086100"/>
+                <a16:creationId xmlns:a16="http://schemas.microsoft.com/office/drawing/2014/main" id="{752B55BF-46CE-400D-99BC-843F3526CC06}"/>
+              </a:ext>
+            </a:extLst>
+          </p:cNvPr>
+          <p:cNvSpPr>
+            <a:spLocks xmlns:a="http://schemas.openxmlformats.org/drawingml/2006/main" noGrp="1"/>
+          </p:cNvSpPr>
+          <p:nvPr/>
+        </p:nvSpPr>
+        <p:spPr>
+          <a:xfrm xmlns:a="http://schemas.openxmlformats.org/drawingml/2006/main">
+            <a:off x="5972175" y="3086100"/>
             <a:ext cx="247650" cy="247650"/>
           </a:xfrm>
           <a:prstGeom xmlns:a="http://schemas.openxmlformats.org/drawingml/2006/main" prst="ellipse">
@@ -1752,19 +1930,19 @@
           <p:cNvPr id="15" name="PPAGENT_QA|parent=timeline-title-1|domains=timeline-content">
             <a:extLst xmlns:a="http://schemas.openxmlformats.org/drawingml/2006/main">
               <a:ext uri="{FF2B5EF4-FFF2-40B4-BE49-F238E27FC236}">
-                <a16:creationId xmlns:a16="http://schemas.microsoft.com/office/drawing/2014/main" id="{D07BC23A-E832-4474-B2D9-A69BC2677984}"/>
-              </a:ext>
-            </a:extLst>
-          </p:cNvPr>
-          <p:cNvSpPr>
-            <a:spLocks xmlns:a="http://schemas.openxmlformats.org/drawingml/2006/main" noGrp="1"/>
-          </p:cNvSpPr>
-          <p:nvPr/>
-        </p:nvSpPr>
-        <p:spPr>
-          <a:xfrm xmlns:a="http://schemas.openxmlformats.org/drawingml/2006/main">
-            <a:off x="3467100" y="3581400"/>
-            <a:ext cx="2514600" cy="552450"/>
+                <a16:creationId xmlns:a16="http://schemas.microsoft.com/office/drawing/2014/main" id="{F11D7AC2-5F7F-4429-B1F1-850AE47115F1}"/>
+              </a:ext>
+            </a:extLst>
+          </p:cNvPr>
+          <p:cNvSpPr>
+            <a:spLocks xmlns:a="http://schemas.openxmlformats.org/drawingml/2006/main" noGrp="1"/>
+          </p:cNvSpPr>
+          <p:nvPr/>
+        </p:nvSpPr>
+        <p:spPr>
+          <a:xfrm xmlns:a="http://schemas.openxmlformats.org/drawingml/2006/main">
+            <a:off x="4381500" y="3581400"/>
+            <a:ext cx="3429000" cy="552450"/>
           </a:xfrm>
           <a:prstGeom xmlns:a="http://schemas.openxmlformats.org/drawingml/2006/main" prst="rect">
             <a:avLst/>
@@ -1800,7 +1978,7 @@
                 <a:ea typeface="Microsoft YaHei"/>
                 <a:cs typeface="Microsoft YaHei"/>
               </a:rPr>
-              <a:t>沉淀能力</a:t>
+              <a:t>验证方向</a:t>
             </a:r>
           </a:p>
         </p:txBody>
@@ -1810,19 +1988,19 @@
           <p:cNvPr id="16" name="PPAGENT_QA|parent=timeline-body-1|domains=timeline-content">
             <a:extLst xmlns:a="http://schemas.openxmlformats.org/drawingml/2006/main">
               <a:ext uri="{FF2B5EF4-FFF2-40B4-BE49-F238E27FC236}">
-                <a16:creationId xmlns:a16="http://schemas.microsoft.com/office/drawing/2014/main" id="{55C7D7E9-0377-48E9-BA69-56515EEE4A19}"/>
-              </a:ext>
-            </a:extLst>
-          </p:cNvPr>
-          <p:cNvSpPr>
-            <a:spLocks xmlns:a="http://schemas.openxmlformats.org/drawingml/2006/main" noGrp="1"/>
-          </p:cNvSpPr>
-          <p:nvPr/>
-        </p:nvSpPr>
-        <p:spPr>
-          <a:xfrm xmlns:a="http://schemas.openxmlformats.org/drawingml/2006/main">
-            <a:off x="3505200" y="4210050"/>
-            <a:ext cx="2438400" cy="990600"/>
+                <a16:creationId xmlns:a16="http://schemas.microsoft.com/office/drawing/2014/main" id="{ACDF5C42-DFFF-4478-AA97-59923A426B3E}"/>
+              </a:ext>
+            </a:extLst>
+          </p:cNvPr>
+          <p:cNvSpPr>
+            <a:spLocks xmlns:a="http://schemas.openxmlformats.org/drawingml/2006/main" noGrp="1"/>
+          </p:cNvSpPr>
+          <p:nvPr/>
+        </p:nvSpPr>
+        <p:spPr>
+          <a:xfrm xmlns:a="http://schemas.openxmlformats.org/drawingml/2006/main">
+            <a:off x="4419600" y="4210050"/>
+            <a:ext cx="3352800" cy="990600"/>
           </a:xfrm>
           <a:prstGeom xmlns:a="http://schemas.openxmlformats.org/drawingml/2006/main" prst="rect">
             <a:avLst/>
@@ -1858,30 +2036,7 @@
                 <a:ea typeface="Microsoft YaHei"/>
                 <a:cs typeface="Microsoft YaHei"/>
               </a:rPr>
-              <a:t>把稳定经验整理为</a:t>
-            </a:r>
-          </a:p>
-          <a:p xmlns:a="http://schemas.openxmlformats.org/drawingml/2006/main">
-            <a:pPr algn="ctr">
-              <a:defRPr sz="1500" b="0">
-                <a:solidFill>
-                  <a:srgbClr val="475569"/>
-                </a:solidFill>
-                <a:latin typeface="Microsoft YaHei"/>
-                <a:ea typeface="Microsoft YaHei"/>
-                <a:cs typeface="Microsoft YaHei"/>
-              </a:defRPr>
-            </a:pPr>
-            <a:r>
-              <a:rPr sz="1500" b="0">
-                <a:solidFill>
-                  <a:srgbClr val="475569"/>
-                </a:solidFill>
-                <a:latin typeface="Microsoft YaHei"/>
-                <a:ea typeface="Microsoft YaHei"/>
-                <a:cs typeface="Microsoft YaHei"/>
-              </a:rPr>
-              <a:t>规则、资产和可调用代码</a:t>
+              <a:t>用真实任务确认最小闭环</a:t>
             </a:r>
           </a:p>
         </p:txBody>
@@ -1891,18 +2046,18 @@
           <p:cNvPr id="17" name="PPAGENT_QA|parent=timeline-bar-1|domains=timeline-shape">
             <a:extLst xmlns:a="http://schemas.openxmlformats.org/drawingml/2006/main">
               <a:ext uri="{FF2B5EF4-FFF2-40B4-BE49-F238E27FC236}">
-                <a16:creationId xmlns:a16="http://schemas.microsoft.com/office/drawing/2014/main" id="{258BB2A4-3EE5-4410-8CB2-057AD12DECE3}"/>
-              </a:ext>
-            </a:extLst>
-          </p:cNvPr>
-          <p:cNvSpPr>
-            <a:spLocks xmlns:a="http://schemas.openxmlformats.org/drawingml/2006/main" noGrp="1"/>
-          </p:cNvSpPr>
-          <p:nvPr/>
-        </p:nvSpPr>
-        <p:spPr>
-          <a:xfrm xmlns:a="http://schemas.openxmlformats.org/drawingml/2006/main">
-            <a:off x="4495800" y="5391150"/>
+                <a16:creationId xmlns:a16="http://schemas.microsoft.com/office/drawing/2014/main" id="{BED14E8C-B6F1-49DD-A454-6C64FB30840D}"/>
+              </a:ext>
+            </a:extLst>
+          </p:cNvPr>
+          <p:cNvSpPr>
+            <a:spLocks xmlns:a="http://schemas.openxmlformats.org/drawingml/2006/main" noGrp="1"/>
+          </p:cNvSpPr>
+          <p:nvPr/>
+        </p:nvSpPr>
+        <p:spPr>
+          <a:xfrm xmlns:a="http://schemas.openxmlformats.org/drawingml/2006/main">
+            <a:off x="5867400" y="5391150"/>
             <a:ext cx="457200" cy="47625"/>
           </a:xfrm>
           <a:prstGeom xmlns:a="http://schemas.openxmlformats.org/drawingml/2006/main" prst="roundRect">
@@ -1924,19 +2079,19 @@
           <p:cNvPr id="18" name="PPAGENT_QA|parent=timeline-period-2|domains=timeline-content">
             <a:extLst xmlns:a="http://schemas.openxmlformats.org/drawingml/2006/main">
               <a:ext uri="{FF2B5EF4-FFF2-40B4-BE49-F238E27FC236}">
-                <a16:creationId xmlns:a16="http://schemas.microsoft.com/office/drawing/2014/main" id="{89BB03F3-5293-421A-9272-CE2A47FBBADB}"/>
-              </a:ext>
-            </a:extLst>
-          </p:cNvPr>
-          <p:cNvSpPr>
-            <a:spLocks xmlns:a="http://schemas.openxmlformats.org/drawingml/2006/main" noGrp="1"/>
-          </p:cNvSpPr>
-          <p:nvPr/>
-        </p:nvSpPr>
-        <p:spPr>
-          <a:xfrm xmlns:a="http://schemas.openxmlformats.org/drawingml/2006/main">
-            <a:off x="6210300" y="1619250"/>
-            <a:ext cx="2514600" cy="1000125"/>
+                <a16:creationId xmlns:a16="http://schemas.microsoft.com/office/drawing/2014/main" id="{4A9689E2-AC79-46E4-9C30-FF51A7A2EEF9}"/>
+              </a:ext>
+            </a:extLst>
+          </p:cNvPr>
+          <p:cNvSpPr>
+            <a:spLocks xmlns:a="http://schemas.openxmlformats.org/drawingml/2006/main" noGrp="1"/>
+          </p:cNvSpPr>
+          <p:nvPr/>
+        </p:nvSpPr>
+        <p:spPr>
+          <a:xfrm xmlns:a="http://schemas.openxmlformats.org/drawingml/2006/main">
+            <a:off x="8039100" y="1619250"/>
+            <a:ext cx="3429000" cy="1000125"/>
           </a:xfrm>
           <a:prstGeom xmlns:a="http://schemas.openxmlformats.org/drawingml/2006/main" prst="rect">
             <a:avLst/>
@@ -1956,7 +2111,7 @@
             <a:pPr algn="ctr">
               <a:defRPr sz="4350" b="1">
                 <a:solidFill>
-                  <a:srgbClr val="AFC4D8"/>
+                  <a:srgbClr val="1677C8"/>
                 </a:solidFill>
                 <a:latin typeface="Microsoft YaHei"/>
                 <a:ea typeface="Microsoft YaHei"/>
@@ -1966,13 +2121,13 @@
             <a:r>
               <a:rPr sz="4350" b="1">
                 <a:solidFill>
-                  <a:srgbClr val="AFC4D8"/>
-                </a:solidFill>
-                <a:latin typeface="Microsoft YaHei"/>
-                <a:ea typeface="Microsoft YaHei"/>
-                <a:cs typeface="Microsoft YaHei"/>
-              </a:rPr>
-              <a:t>2027</a:t>
+                  <a:srgbClr val="1677C8"/>
+                </a:solidFill>
+                <a:latin typeface="Microsoft YaHei"/>
+                <a:ea typeface="Microsoft YaHei"/>
+                <a:cs typeface="Microsoft YaHei"/>
+              </a:rPr>
+              <a:t>2026</a:t>
             </a:r>
           </a:p>
         </p:txBody>
@@ -1982,19 +2137,19 @@
           <p:cNvPr id="19" name="">
             <a:extLst xmlns:a="http://schemas.openxmlformats.org/drawingml/2006/main">
               <a:ext uri="{FF2B5EF4-FFF2-40B4-BE49-F238E27FC236}">
-                <a16:creationId xmlns:a16="http://schemas.microsoft.com/office/drawing/2014/main" id="{303E0B3B-0C13-450F-93D0-DE1E766511E2}"/>
-              </a:ext>
-            </a:extLst>
-          </p:cNvPr>
-          <p:cNvSpPr>
-            <a:spLocks xmlns:a="http://schemas.openxmlformats.org/drawingml/2006/main" noGrp="1"/>
-          </p:cNvSpPr>
-          <p:nvPr/>
-        </p:nvSpPr>
-        <p:spPr>
-          <a:xfrm xmlns:a="http://schemas.openxmlformats.org/drawingml/2006/main">
-            <a:off x="6210300" y="2724150"/>
-            <a:ext cx="2514600" cy="247650"/>
+                <a16:creationId xmlns:a16="http://schemas.microsoft.com/office/drawing/2014/main" id="{7D9DFE81-A1DD-4B21-BCA5-500CC5B6D96F}"/>
+              </a:ext>
+            </a:extLst>
+          </p:cNvPr>
+          <p:cNvSpPr>
+            <a:spLocks xmlns:a="http://schemas.openxmlformats.org/drawingml/2006/main" noGrp="1"/>
+          </p:cNvSpPr>
+          <p:nvPr/>
+        </p:nvSpPr>
+        <p:spPr>
+          <a:xfrm xmlns:a="http://schemas.openxmlformats.org/drawingml/2006/main">
+            <a:off x="8039100" y="2724150"/>
+            <a:ext cx="3429000" cy="247650"/>
           </a:xfrm>
           <a:prstGeom xmlns:a="http://schemas.openxmlformats.org/drawingml/2006/main" prst="rect">
             <a:avLst/>
@@ -2014,6 +2169,339 @@
             <a:pPr algn="ctr">
               <a:defRPr sz="1350" b="1">
                 <a:solidFill>
+                  <a:srgbClr val="00A8D8"/>
+                </a:solidFill>
+                <a:latin typeface="Microsoft YaHei"/>
+                <a:ea typeface="Microsoft YaHei"/>
+                <a:cs typeface="Microsoft YaHei"/>
+              </a:defRPr>
+            </a:pPr>
+            <a:r>
+              <a:rPr sz="1350" b="1">
+                <a:solidFill>
+                  <a:srgbClr val="00A8D8"/>
+                </a:solidFill>
+                <a:latin typeface="Microsoft YaHei"/>
+                <a:ea typeface="Microsoft YaHei"/>
+                <a:cs typeface="Microsoft YaHei"/>
+              </a:rPr>
+              <a:t>阶段 03</a:t>
+            </a:r>
+          </a:p>
+        </p:txBody>
+      </p:sp>
+      <p:sp>
+        <p:nvSpPr>
+          <p:cNvPr id="20" name="PPAGENT_QA|parent=timeline-node-2|domains=timeline-connection">
+            <a:extLst xmlns:a="http://schemas.openxmlformats.org/drawingml/2006/main">
+              <a:ext uri="{FF2B5EF4-FFF2-40B4-BE49-F238E27FC236}">
+                <a16:creationId xmlns:a16="http://schemas.microsoft.com/office/drawing/2014/main" id="{9857437B-0D79-4C54-893A-5A81F8504672}"/>
+              </a:ext>
+            </a:extLst>
+          </p:cNvPr>
+          <p:cNvSpPr>
+            <a:spLocks xmlns:a="http://schemas.openxmlformats.org/drawingml/2006/main" noGrp="1"/>
+          </p:cNvSpPr>
+          <p:nvPr/>
+        </p:nvSpPr>
+        <p:spPr>
+          <a:xfrm xmlns:a="http://schemas.openxmlformats.org/drawingml/2006/main">
+            <a:off x="9629775" y="3086100"/>
+            <a:ext cx="247650" cy="247650"/>
+          </a:xfrm>
+          <a:prstGeom xmlns:a="http://schemas.openxmlformats.org/drawingml/2006/main" prst="ellipse">
+            <a:avLst/>
+          </a:prstGeom>
+          <a:solidFill xmlns:a="http://schemas.openxmlformats.org/drawingml/2006/main">
+            <a:srgbClr val="14CBD1"/>
+          </a:solidFill>
+          <a:ln xmlns:a="http://schemas.openxmlformats.org/drawingml/2006/main" w="28575">
+            <a:solidFill>
+              <a:srgbClr val="FFFFFF"/>
+            </a:solidFill>
+            <a:prstDash val="solid"/>
+          </a:ln>
+        </p:spPr>
+        <p:style>
+          <a:lnRef xmlns:a="http://schemas.openxmlformats.org/drawingml/2006/main" idx="0"/>
+          <a:fillRef xmlns:a="http://schemas.openxmlformats.org/drawingml/2006/main" idx="0"/>
+          <a:effectRef xmlns:a="http://schemas.openxmlformats.org/drawingml/2006/main" idx="4"/>
+          <a:fontRef xmlns:a="http://schemas.openxmlformats.org/drawingml/2006/main" idx="major"/>
+        </p:style>
+      </p:sp>
+      <p:sp>
+        <p:nvSpPr>
+          <p:cNvPr id="21" name="PPAGENT_QA|parent=timeline-title-2|domains=timeline-content">
+            <a:extLst xmlns:a="http://schemas.openxmlformats.org/drawingml/2006/main">
+              <a:ext uri="{FF2B5EF4-FFF2-40B4-BE49-F238E27FC236}">
+                <a16:creationId xmlns:a16="http://schemas.microsoft.com/office/drawing/2014/main" id="{1F73719B-4C71-4D0A-8A44-FA9C88207349}"/>
+              </a:ext>
+            </a:extLst>
+          </p:cNvPr>
+          <p:cNvSpPr>
+            <a:spLocks xmlns:a="http://schemas.openxmlformats.org/drawingml/2006/main" noGrp="1"/>
+          </p:cNvSpPr>
+          <p:nvPr/>
+        </p:nvSpPr>
+        <p:spPr>
+          <a:xfrm xmlns:a="http://schemas.openxmlformats.org/drawingml/2006/main">
+            <a:off x="8039100" y="3581400"/>
+            <a:ext cx="3429000" cy="552450"/>
+          </a:xfrm>
+          <a:prstGeom xmlns:a="http://schemas.openxmlformats.org/drawingml/2006/main" prst="rect">
+            <a:avLst/>
+          </a:prstGeom>
+          <a:noFill xmlns:a="http://schemas.openxmlformats.org/drawingml/2006/main"/>
+          <a:ln xmlns:a="http://schemas.openxmlformats.org/drawingml/2006/main" w="0">
+            <a:noFill/>
+            <a:prstDash val="solid"/>
+          </a:ln>
+        </p:spPr>
+        <p:txBody>
+          <a:bodyPr xmlns:a="http://schemas.openxmlformats.org/drawingml/2006/main" lIns="0" tIns="0" rIns="0" bIns="0" anchor="ctr">
+            <a:normAutofit fontScale="100000"/>
+          </a:bodyPr>
+          <a:lstStyle xmlns:a="http://schemas.openxmlformats.org/drawingml/2006/main"/>
+          <a:p xmlns:a="http://schemas.openxmlformats.org/drawingml/2006/main">
+            <a:pPr algn="ctr">
+              <a:defRPr sz="1650" b="1">
+                <a:solidFill>
+                  <a:srgbClr val="1677C8"/>
+                </a:solidFill>
+                <a:latin typeface="Microsoft YaHei"/>
+                <a:ea typeface="Microsoft YaHei"/>
+                <a:cs typeface="Microsoft YaHei"/>
+              </a:defRPr>
+            </a:pPr>
+            <a:r>
+              <a:rPr sz="1650" b="1">
+                <a:solidFill>
+                  <a:srgbClr val="1677C8"/>
+                </a:solidFill>
+                <a:latin typeface="Microsoft YaHei"/>
+                <a:ea typeface="Microsoft YaHei"/>
+                <a:cs typeface="Microsoft YaHei"/>
+              </a:rPr>
+              <a:t>沉淀能力</a:t>
+            </a:r>
+          </a:p>
+        </p:txBody>
+      </p:sp>
+      <p:sp>
+        <p:nvSpPr>
+          <p:cNvPr id="22" name="PPAGENT_QA|parent=timeline-body-2|domains=timeline-content">
+            <a:extLst xmlns:a="http://schemas.openxmlformats.org/drawingml/2006/main">
+              <a:ext uri="{FF2B5EF4-FFF2-40B4-BE49-F238E27FC236}">
+                <a16:creationId xmlns:a16="http://schemas.microsoft.com/office/drawing/2014/main" id="{67F76EE5-C29A-4447-89D7-BE4327D4CB83}"/>
+              </a:ext>
+            </a:extLst>
+          </p:cNvPr>
+          <p:cNvSpPr>
+            <a:spLocks xmlns:a="http://schemas.openxmlformats.org/drawingml/2006/main" noGrp="1"/>
+          </p:cNvSpPr>
+          <p:nvPr/>
+        </p:nvSpPr>
+        <p:spPr>
+          <a:xfrm xmlns:a="http://schemas.openxmlformats.org/drawingml/2006/main">
+            <a:off x="8077200" y="4210050"/>
+            <a:ext cx="3352800" cy="990600"/>
+          </a:xfrm>
+          <a:prstGeom xmlns:a="http://schemas.openxmlformats.org/drawingml/2006/main" prst="rect">
+            <a:avLst/>
+          </a:prstGeom>
+          <a:noFill xmlns:a="http://schemas.openxmlformats.org/drawingml/2006/main"/>
+          <a:ln xmlns:a="http://schemas.openxmlformats.org/drawingml/2006/main" w="0">
+            <a:noFill/>
+            <a:prstDash val="solid"/>
+          </a:ln>
+        </p:spPr>
+        <p:txBody>
+          <a:bodyPr xmlns:a="http://schemas.openxmlformats.org/drawingml/2006/main" lIns="0" tIns="0" rIns="0" bIns="0" anchor="t">
+            <a:normAutofit fontScale="100000"/>
+          </a:bodyPr>
+          <a:lstStyle xmlns:a="http://schemas.openxmlformats.org/drawingml/2006/main"/>
+          <a:p xmlns:a="http://schemas.openxmlformats.org/drawingml/2006/main">
+            <a:pPr algn="ctr">
+              <a:defRPr sz="1500" b="0">
+                <a:solidFill>
+                  <a:srgbClr val="475569"/>
+                </a:solidFill>
+                <a:latin typeface="Microsoft YaHei"/>
+                <a:ea typeface="Microsoft YaHei"/>
+                <a:cs typeface="Microsoft YaHei"/>
+              </a:defRPr>
+            </a:pPr>
+            <a:r>
+              <a:rPr sz="1500" b="0">
+                <a:solidFill>
+                  <a:srgbClr val="475569"/>
+                </a:solidFill>
+                <a:latin typeface="Microsoft YaHei"/>
+                <a:ea typeface="Microsoft YaHei"/>
+                <a:cs typeface="Microsoft YaHei"/>
+              </a:rPr>
+              <a:t>把经验整理为规则与资产</a:t>
+            </a:r>
+          </a:p>
+        </p:txBody>
+      </p:sp>
+      <p:sp>
+        <p:nvSpPr>
+          <p:cNvPr id="23" name="PPAGENT_QA|parent=timeline-bar-2|domains=timeline-shape">
+            <a:extLst xmlns:a="http://schemas.openxmlformats.org/drawingml/2006/main">
+              <a:ext uri="{FF2B5EF4-FFF2-40B4-BE49-F238E27FC236}">
+                <a16:creationId xmlns:a16="http://schemas.microsoft.com/office/drawing/2014/main" id="{F951EABD-7074-47B8-B0B5-6175ADDBCA08}"/>
+              </a:ext>
+            </a:extLst>
+          </p:cNvPr>
+          <p:cNvSpPr>
+            <a:spLocks xmlns:a="http://schemas.openxmlformats.org/drawingml/2006/main" noGrp="1"/>
+          </p:cNvSpPr>
+          <p:nvPr/>
+        </p:nvSpPr>
+        <p:spPr>
+          <a:xfrm xmlns:a="http://schemas.openxmlformats.org/drawingml/2006/main">
+            <a:off x="9525000" y="5391150"/>
+            <a:ext cx="457200" cy="47625"/>
+          </a:xfrm>
+          <a:prstGeom xmlns:a="http://schemas.openxmlformats.org/drawingml/2006/main" prst="roundRect">
+            <a:avLst>
+              <a:gd name="adj" fmla="val 50000"/>
+            </a:avLst>
+          </a:prstGeom>
+          <a:solidFill xmlns:a="http://schemas.openxmlformats.org/drawingml/2006/main">
+            <a:srgbClr val="14CBD1"/>
+          </a:solidFill>
+          <a:ln xmlns:a="http://schemas.openxmlformats.org/drawingml/2006/main" w="0">
+            <a:noFill/>
+            <a:prstDash val="solid"/>
+          </a:ln>
+        </p:spPr>
+      </p:sp>
+    </p:spTree>
+    <p:extLst>
+      <p:ext uri="{BB962C8B-B14F-4D97-AF65-F5344CB8AC3E}">
+        <p14:creationId xmlns:p14="http://schemas.microsoft.com/office/powerpoint/2010/main" val="1420929300"/>
+      </p:ext>
+    </p:extLst>
+  </p:cSld>
+</p:sld>
+</file>
+
+<file path=ppt/slides/slide2.xml><?xml version="1.0" encoding="utf-8"?>
+<p:sld xmlns:p="http://schemas.openxmlformats.org/presentationml/2006/main">
+  <p:cSld>
+    <p:bg>
+      <p:bgPr>
+        <a:solidFill xmlns:a="http://schemas.openxmlformats.org/drawingml/2006/main">
+          <a:srgbClr val="F7FAFC"/>
+        </a:solidFill>
+      </p:bgPr>
+    </p:bg>
+    <p:spTree>
+      <p:nvGrpSpPr>
+        <p:cNvPr id="1" name=""/>
+        <p:cNvGrpSpPr/>
+        <p:nvPr/>
+      </p:nvGrpSpPr>
+      <p:grpSpPr>
+        <a:xfrm xmlns:a="http://schemas.openxmlformats.org/drawingml/2006/main"/>
+      </p:grpSpPr>
+      <p:sp>
+        <p:nvSpPr>
+          <p:cNvPr id="30" name="">
+            <a:extLst xmlns:a="http://schemas.openxmlformats.org/drawingml/2006/main">
+              <a:ext uri="{FF2B5EF4-FFF2-40B4-BE49-F238E27FC236}">
+                <a16:creationId xmlns:a16="http://schemas.microsoft.com/office/drawing/2014/main" id="{E2E00F4D-732B-4494-B402-BA5CE36F1375}"/>
+              </a:ext>
+            </a:extLst>
+          </p:cNvPr>
+          <p:cNvSpPr>
+            <a:spLocks xmlns:a="http://schemas.openxmlformats.org/drawingml/2006/main" noGrp="1"/>
+          </p:cNvSpPr>
+          <p:nvPr/>
+        </p:nvSpPr>
+        <p:spPr>
+          <a:xfrm xmlns:a="http://schemas.openxmlformats.org/drawingml/2006/main">
+            <a:off x="685800" y="400050"/>
+            <a:ext cx="8382000" cy="457200"/>
+          </a:xfrm>
+          <a:prstGeom xmlns:a="http://schemas.openxmlformats.org/drawingml/2006/main" prst="rect">
+            <a:avLst/>
+          </a:prstGeom>
+          <a:noFill xmlns:a="http://schemas.openxmlformats.org/drawingml/2006/main"/>
+          <a:ln xmlns:a="http://schemas.openxmlformats.org/drawingml/2006/main" w="0">
+            <a:noFill/>
+            <a:prstDash val="solid"/>
+          </a:ln>
+        </p:spPr>
+        <p:txBody>
+          <a:bodyPr xmlns:a="http://schemas.openxmlformats.org/drawingml/2006/main" lIns="0" tIns="0" rIns="0" bIns="0" anchor="ctr">
+            <a:normAutofit fontScale="100000"/>
+          </a:bodyPr>
+          <a:lstStyle xmlns:a="http://schemas.openxmlformats.org/drawingml/2006/main"/>
+          <a:p xmlns:a="http://schemas.openxmlformats.org/drawingml/2006/main">
+            <a:pPr algn="l">
+              <a:defRPr sz="2700" b="1">
+                <a:solidFill>
+                  <a:srgbClr val="1677C8"/>
+                </a:solidFill>
+                <a:latin typeface="Microsoft YaHei"/>
+                <a:ea typeface="Microsoft YaHei"/>
+                <a:cs typeface="Microsoft YaHei"/>
+              </a:defRPr>
+            </a:pPr>
+            <a:r>
+              <a:rPr sz="2700" b="1">
+                <a:solidFill>
+                  <a:srgbClr val="1677C8"/>
+                </a:solidFill>
+                <a:latin typeface="Microsoft YaHei"/>
+                <a:ea typeface="Microsoft YaHei"/>
+                <a:cs typeface="Microsoft YaHei"/>
+              </a:rPr>
+              <a:t>发展历程</a:t>
+            </a:r>
+          </a:p>
+        </p:txBody>
+      </p:sp>
+      <p:sp>
+        <p:nvSpPr>
+          <p:cNvPr id="2" name="">
+            <a:extLst xmlns:a="http://schemas.openxmlformats.org/drawingml/2006/main">
+              <a:ext uri="{FF2B5EF4-FFF2-40B4-BE49-F238E27FC236}">
+                <a16:creationId xmlns:a16="http://schemas.microsoft.com/office/drawing/2014/main" id="{F05FEC36-AEBF-4F1F-9EBE-DC9F3A686003}"/>
+              </a:ext>
+            </a:extLst>
+          </p:cNvPr>
+          <p:cNvSpPr>
+            <a:spLocks xmlns:a="http://schemas.openxmlformats.org/drawingml/2006/main" noGrp="1"/>
+          </p:cNvSpPr>
+          <p:nvPr/>
+        </p:nvSpPr>
+        <p:spPr>
+          <a:xfrm xmlns:a="http://schemas.openxmlformats.org/drawingml/2006/main">
+            <a:off x="704850" y="876300"/>
+            <a:ext cx="4953000" cy="247650"/>
+          </a:xfrm>
+          <a:prstGeom xmlns:a="http://schemas.openxmlformats.org/drawingml/2006/main" prst="rect">
+            <a:avLst/>
+          </a:prstGeom>
+          <a:noFill xmlns:a="http://schemas.openxmlformats.org/drawingml/2006/main"/>
+          <a:ln xmlns:a="http://schemas.openxmlformats.org/drawingml/2006/main" w="0">
+            <a:noFill/>
+            <a:prstDash val="solid"/>
+          </a:ln>
+        </p:spPr>
+        <p:txBody>
+          <a:bodyPr xmlns:a="http://schemas.openxmlformats.org/drawingml/2006/main" lIns="0" tIns="0" rIns="0" bIns="0" anchor="ctr">
+            <a:normAutofit fontScale="100000"/>
+          </a:bodyPr>
+          <a:lstStyle xmlns:a="http://schemas.openxmlformats.org/drawingml/2006/main"/>
+          <a:p xmlns:a="http://schemas.openxmlformats.org/drawingml/2006/main">
+            <a:pPr algn="l">
+              <a:defRPr sz="1200" b="0">
+                <a:solidFill>
                   <a:srgbClr val="7C8A9A"/>
                 </a:solidFill>
                 <a:latin typeface="Microsoft YaHei"/>
@@ -2022,6 +2510,219 @@
               </a:defRPr>
             </a:pPr>
             <a:r>
+              <a:rPr sz="1200" b="0">
+                <a:solidFill>
+                  <a:srgbClr val="7C8A9A"/>
+                </a:solidFill>
+                <a:latin typeface="Microsoft YaHei"/>
+                <a:ea typeface="Microsoft YaHei"/>
+                <a:cs typeface="Microsoft YaHei"/>
+              </a:rPr>
+              <a:t>阶段节点 · 发展历程</a:t>
+            </a:r>
+          </a:p>
+        </p:txBody>
+      </p:sp>
+      <p:sp>
+        <p:nvSpPr>
+          <p:cNvPr id="3" name="">
+            <a:extLst xmlns:a="http://schemas.openxmlformats.org/drawingml/2006/main">
+              <a:ext uri="{FF2B5EF4-FFF2-40B4-BE49-F238E27FC236}">
+                <a16:creationId xmlns:a16="http://schemas.microsoft.com/office/drawing/2014/main" id="{9C065032-40C5-426D-9F81-90F2760D0697}"/>
+              </a:ext>
+            </a:extLst>
+          </p:cNvPr>
+          <p:cNvSpPr>
+            <a:spLocks xmlns:a="http://schemas.openxmlformats.org/drawingml/2006/main" noGrp="1"/>
+          </p:cNvSpPr>
+          <p:nvPr/>
+        </p:nvSpPr>
+        <p:spPr>
+          <a:xfrm xmlns:a="http://schemas.openxmlformats.org/drawingml/2006/main">
+            <a:off x="638175" y="1476375"/>
+            <a:ext cx="2686050" cy="4495800"/>
+          </a:xfrm>
+          <a:prstGeom xmlns:a="http://schemas.openxmlformats.org/drawingml/2006/main" prst="roundRect">
+            <a:avLst>
+              <a:gd name="adj" fmla="val 709"/>
+            </a:avLst>
+          </a:prstGeom>
+          <a:solidFill xmlns:a="http://schemas.openxmlformats.org/drawingml/2006/main">
+            <a:srgbClr val="F0F7FC"/>
+          </a:solidFill>
+          <a:ln xmlns:a="http://schemas.openxmlformats.org/drawingml/2006/main" w="0">
+            <a:noFill/>
+            <a:prstDash val="solid"/>
+          </a:ln>
+        </p:spPr>
+      </p:sp>
+      <p:sp>
+        <p:nvSpPr>
+          <p:cNvPr id="4" name="">
+            <a:extLst xmlns:a="http://schemas.openxmlformats.org/drawingml/2006/main">
+              <a:ext uri="{FF2B5EF4-FFF2-40B4-BE49-F238E27FC236}">
+                <a16:creationId xmlns:a16="http://schemas.microsoft.com/office/drawing/2014/main" id="{131EFB60-B1AD-4D7C-A5CF-33B50FD10448}"/>
+              </a:ext>
+            </a:extLst>
+          </p:cNvPr>
+          <p:cNvSpPr>
+            <a:spLocks xmlns:a="http://schemas.openxmlformats.org/drawingml/2006/main" noGrp="1"/>
+          </p:cNvSpPr>
+          <p:nvPr/>
+        </p:nvSpPr>
+        <p:spPr>
+          <a:xfrm xmlns:a="http://schemas.openxmlformats.org/drawingml/2006/main">
+            <a:off x="6124575" y="1476375"/>
+            <a:ext cx="2686050" cy="4495800"/>
+          </a:xfrm>
+          <a:prstGeom xmlns:a="http://schemas.openxmlformats.org/drawingml/2006/main" prst="roundRect">
+            <a:avLst>
+              <a:gd name="adj" fmla="val 709"/>
+            </a:avLst>
+          </a:prstGeom>
+          <a:solidFill xmlns:a="http://schemas.openxmlformats.org/drawingml/2006/main">
+            <a:srgbClr val="F0F7FC"/>
+          </a:solidFill>
+          <a:ln xmlns:a="http://schemas.openxmlformats.org/drawingml/2006/main" w="0">
+            <a:noFill/>
+            <a:prstDash val="solid"/>
+          </a:ln>
+        </p:spPr>
+      </p:sp>
+      <p:sp>
+        <p:nvSpPr>
+          <p:cNvPr id="5" name="PPAGENT_QA|parent=timeline-axis|domains=timeline-connection">
+            <a:extLst xmlns:a="http://schemas.openxmlformats.org/drawingml/2006/main">
+              <a:ext uri="{FF2B5EF4-FFF2-40B4-BE49-F238E27FC236}">
+                <a16:creationId xmlns:a16="http://schemas.microsoft.com/office/drawing/2014/main" id="{6493D0C2-764F-4145-85C9-20C2C50154C0}"/>
+              </a:ext>
+            </a:extLst>
+          </p:cNvPr>
+          <p:cNvSpPr>
+            <a:spLocks xmlns:a="http://schemas.openxmlformats.org/drawingml/2006/main" noGrp="1"/>
+          </p:cNvSpPr>
+          <p:nvPr/>
+        </p:nvSpPr>
+        <p:spPr>
+          <a:xfrm xmlns:a="http://schemas.openxmlformats.org/drawingml/2006/main">
+            <a:off x="609600" y="3209925"/>
+            <a:ext cx="10972800" cy="0"/>
+          </a:xfrm>
+          <a:prstGeom xmlns:a="http://schemas.openxmlformats.org/drawingml/2006/main" prst="line">
+            <a:avLst/>
+          </a:prstGeom>
+          <a:noFill xmlns:a="http://schemas.openxmlformats.org/drawingml/2006/main"/>
+          <a:ln xmlns:a="http://schemas.openxmlformats.org/drawingml/2006/main" w="28575">
+            <a:solidFill>
+              <a:srgbClr val="1677C8"/>
+            </a:solidFill>
+            <a:prstDash val="solid"/>
+          </a:ln>
+        </p:spPr>
+      </p:sp>
+      <p:sp>
+        <p:nvSpPr>
+          <p:cNvPr id="6" name="PPAGENT_QA|parent=timeline-period-0|domains=timeline-content">
+            <a:extLst xmlns:a="http://schemas.openxmlformats.org/drawingml/2006/main">
+              <a:ext uri="{FF2B5EF4-FFF2-40B4-BE49-F238E27FC236}">
+                <a16:creationId xmlns:a16="http://schemas.microsoft.com/office/drawing/2014/main" id="{D1D6ED04-1655-49DB-969E-A553BD9CC4B7}"/>
+              </a:ext>
+            </a:extLst>
+          </p:cNvPr>
+          <p:cNvSpPr>
+            <a:spLocks xmlns:a="http://schemas.openxmlformats.org/drawingml/2006/main" noGrp="1"/>
+          </p:cNvSpPr>
+          <p:nvPr/>
+        </p:nvSpPr>
+        <p:spPr>
+          <a:xfrm xmlns:a="http://schemas.openxmlformats.org/drawingml/2006/main">
+            <a:off x="723900" y="1619250"/>
+            <a:ext cx="2514600" cy="1000125"/>
+          </a:xfrm>
+          <a:prstGeom xmlns:a="http://schemas.openxmlformats.org/drawingml/2006/main" prst="rect">
+            <a:avLst/>
+          </a:prstGeom>
+          <a:noFill xmlns:a="http://schemas.openxmlformats.org/drawingml/2006/main"/>
+          <a:ln xmlns:a="http://schemas.openxmlformats.org/drawingml/2006/main" w="0">
+            <a:noFill/>
+            <a:prstDash val="solid"/>
+          </a:ln>
+        </p:spPr>
+        <p:txBody>
+          <a:bodyPr xmlns:a="http://schemas.openxmlformats.org/drawingml/2006/main" lIns="0" tIns="0" rIns="0" bIns="0" anchor="ctr">
+            <a:normAutofit fontScale="100000"/>
+          </a:bodyPr>
+          <a:lstStyle xmlns:a="http://schemas.openxmlformats.org/drawingml/2006/main"/>
+          <a:p xmlns:a="http://schemas.openxmlformats.org/drawingml/2006/main">
+            <a:pPr algn="ctr">
+              <a:defRPr sz="4350" b="1">
+                <a:solidFill>
+                  <a:srgbClr val="AFC4D8"/>
+                </a:solidFill>
+                <a:latin typeface="Microsoft YaHei"/>
+                <a:ea typeface="Microsoft YaHei"/>
+                <a:cs typeface="Microsoft YaHei"/>
+              </a:defRPr>
+            </a:pPr>
+            <a:r>
+              <a:rPr sz="4350" b="1">
+                <a:solidFill>
+                  <a:srgbClr val="AFC4D8"/>
+                </a:solidFill>
+                <a:latin typeface="Microsoft YaHei"/>
+                <a:ea typeface="Microsoft YaHei"/>
+                <a:cs typeface="Microsoft YaHei"/>
+              </a:rPr>
+              <a:t>2024</a:t>
+            </a:r>
+          </a:p>
+        </p:txBody>
+      </p:sp>
+      <p:sp>
+        <p:nvSpPr>
+          <p:cNvPr id="7" name="">
+            <a:extLst xmlns:a="http://schemas.openxmlformats.org/drawingml/2006/main">
+              <a:ext uri="{FF2B5EF4-FFF2-40B4-BE49-F238E27FC236}">
+                <a16:creationId xmlns:a16="http://schemas.microsoft.com/office/drawing/2014/main" id="{D8C20D82-DF71-4675-9A67-E037DD569B79}"/>
+              </a:ext>
+            </a:extLst>
+          </p:cNvPr>
+          <p:cNvSpPr>
+            <a:spLocks xmlns:a="http://schemas.openxmlformats.org/drawingml/2006/main" noGrp="1"/>
+          </p:cNvSpPr>
+          <p:nvPr/>
+        </p:nvSpPr>
+        <p:spPr>
+          <a:xfrm xmlns:a="http://schemas.openxmlformats.org/drawingml/2006/main">
+            <a:off x="723900" y="2724150"/>
+            <a:ext cx="2514600" cy="247650"/>
+          </a:xfrm>
+          <a:prstGeom xmlns:a="http://schemas.openxmlformats.org/drawingml/2006/main" prst="rect">
+            <a:avLst/>
+          </a:prstGeom>
+          <a:noFill xmlns:a="http://schemas.openxmlformats.org/drawingml/2006/main"/>
+          <a:ln xmlns:a="http://schemas.openxmlformats.org/drawingml/2006/main" w="0">
+            <a:noFill/>
+            <a:prstDash val="solid"/>
+          </a:ln>
+        </p:spPr>
+        <p:txBody>
+          <a:bodyPr xmlns:a="http://schemas.openxmlformats.org/drawingml/2006/main" lIns="0" tIns="0" rIns="0" bIns="0" anchor="ctr">
+            <a:normAutofit fontScale="100000"/>
+          </a:bodyPr>
+          <a:lstStyle xmlns:a="http://schemas.openxmlformats.org/drawingml/2006/main"/>
+          <a:p xmlns:a="http://schemas.openxmlformats.org/drawingml/2006/main">
+            <a:pPr algn="ctr">
+              <a:defRPr sz="1350" b="1">
+                <a:solidFill>
+                  <a:srgbClr val="7C8A9A"/>
+                </a:solidFill>
+                <a:latin typeface="Microsoft YaHei"/>
+                <a:ea typeface="Microsoft YaHei"/>
+                <a:cs typeface="Microsoft YaHei"/>
+              </a:defRPr>
+            </a:pPr>
+            <a:r>
               <a:rPr sz="1350" b="1">
                 <a:solidFill>
                   <a:srgbClr val="7C8A9A"/>
@@ -2030,28 +2731,28 @@
                 <a:ea typeface="Microsoft YaHei"/>
                 <a:cs typeface="Microsoft YaHei"/>
               </a:rPr>
-              <a:t>阶段 03</a:t>
-            </a:r>
-          </a:p>
-        </p:txBody>
-      </p:sp>
-      <p:sp>
-        <p:nvSpPr>
-          <p:cNvPr id="20" name="PPAGENT_QA|parent=timeline-node-2|domains=timeline-connection">
-            <a:extLst xmlns:a="http://schemas.openxmlformats.org/drawingml/2006/main">
-              <a:ext uri="{FF2B5EF4-FFF2-40B4-BE49-F238E27FC236}">
-                <a16:creationId xmlns:a16="http://schemas.microsoft.com/office/drawing/2014/main" id="{1723AE6E-1FF1-4A35-89C4-D547194F0E74}"/>
-              </a:ext>
-            </a:extLst>
-          </p:cNvPr>
-          <p:cNvSpPr>
-            <a:spLocks xmlns:a="http://schemas.openxmlformats.org/drawingml/2006/main" noGrp="1"/>
-          </p:cNvSpPr>
-          <p:nvPr/>
-        </p:nvSpPr>
-        <p:spPr>
-          <a:xfrm xmlns:a="http://schemas.openxmlformats.org/drawingml/2006/main">
-            <a:off x="7343775" y="3086100"/>
+              <a:t>阶段 01</a:t>
+            </a:r>
+          </a:p>
+        </p:txBody>
+      </p:sp>
+      <p:sp>
+        <p:nvSpPr>
+          <p:cNvPr id="8" name="PPAGENT_QA|parent=timeline-node-0|domains=timeline-connection">
+            <a:extLst xmlns:a="http://schemas.openxmlformats.org/drawingml/2006/main">
+              <a:ext uri="{FF2B5EF4-FFF2-40B4-BE49-F238E27FC236}">
+                <a16:creationId xmlns:a16="http://schemas.microsoft.com/office/drawing/2014/main" id="{C5C939C8-25B1-4181-BF56-3FDCA5C1AABA}"/>
+              </a:ext>
+            </a:extLst>
+          </p:cNvPr>
+          <p:cNvSpPr>
+            <a:spLocks xmlns:a="http://schemas.openxmlformats.org/drawingml/2006/main" noGrp="1"/>
+          </p:cNvSpPr>
+          <p:nvPr/>
+        </p:nvSpPr>
+        <p:spPr>
+          <a:xfrm xmlns:a="http://schemas.openxmlformats.org/drawingml/2006/main">
+            <a:off x="1857375" y="3086100"/>
             <a:ext cx="247650" cy="247650"/>
           </a:xfrm>
           <a:prstGeom xmlns:a="http://schemas.openxmlformats.org/drawingml/2006/main" prst="ellipse">
@@ -2076,21 +2777,21 @@
       </p:sp>
       <p:sp>
         <p:nvSpPr>
-          <p:cNvPr id="21" name="PPAGENT_QA|parent=timeline-title-2|domains=timeline-content">
-            <a:extLst xmlns:a="http://schemas.openxmlformats.org/drawingml/2006/main">
-              <a:ext uri="{FF2B5EF4-FFF2-40B4-BE49-F238E27FC236}">
-                <a16:creationId xmlns:a16="http://schemas.microsoft.com/office/drawing/2014/main" id="{B30976D3-4652-40B0-9960-1AD8F27BB182}"/>
-              </a:ext>
-            </a:extLst>
-          </p:cNvPr>
-          <p:cNvSpPr>
-            <a:spLocks xmlns:a="http://schemas.openxmlformats.org/drawingml/2006/main" noGrp="1"/>
-          </p:cNvSpPr>
-          <p:nvPr/>
-        </p:nvSpPr>
-        <p:spPr>
-          <a:xfrm xmlns:a="http://schemas.openxmlformats.org/drawingml/2006/main">
-            <a:off x="6210300" y="3581400"/>
+          <p:cNvPr id="9" name="PPAGENT_QA|parent=timeline-title-0|domains=timeline-content">
+            <a:extLst xmlns:a="http://schemas.openxmlformats.org/drawingml/2006/main">
+              <a:ext uri="{FF2B5EF4-FFF2-40B4-BE49-F238E27FC236}">
+                <a16:creationId xmlns:a16="http://schemas.microsoft.com/office/drawing/2014/main" id="{113C434C-E238-41E9-8049-8A0AE7813EBC}"/>
+              </a:ext>
+            </a:extLst>
+          </p:cNvPr>
+          <p:cNvSpPr>
+            <a:spLocks xmlns:a="http://schemas.openxmlformats.org/drawingml/2006/main" noGrp="1"/>
+          </p:cNvSpPr>
+          <p:nvPr/>
+        </p:nvSpPr>
+        <p:spPr>
+          <a:xfrm xmlns:a="http://schemas.openxmlformats.org/drawingml/2006/main">
+            <a:off x="723900" y="3581400"/>
             <a:ext cx="2514600" cy="552450"/>
           </a:xfrm>
           <a:prstGeom xmlns:a="http://schemas.openxmlformats.org/drawingml/2006/main" prst="rect">
@@ -2127,28 +2828,28 @@
                 <a:ea typeface="Microsoft YaHei"/>
                 <a:cs typeface="Microsoft YaHei"/>
               </a:rPr>
-              <a:t>扩展场景</a:t>
-            </a:r>
-          </a:p>
-        </p:txBody>
-      </p:sp>
-      <p:sp>
-        <p:nvSpPr>
-          <p:cNvPr id="22" name="PPAGENT_QA|parent=timeline-body-2|domains=timeline-content">
-            <a:extLst xmlns:a="http://schemas.openxmlformats.org/drawingml/2006/main">
-              <a:ext uri="{FF2B5EF4-FFF2-40B4-BE49-F238E27FC236}">
-                <a16:creationId xmlns:a16="http://schemas.microsoft.com/office/drawing/2014/main" id="{7B98F5F9-686D-46BD-85C9-12F14F5F1990}"/>
-              </a:ext>
-            </a:extLst>
-          </p:cNvPr>
-          <p:cNvSpPr>
-            <a:spLocks xmlns:a="http://schemas.openxmlformats.org/drawingml/2006/main" noGrp="1"/>
-          </p:cNvSpPr>
-          <p:nvPr/>
-        </p:nvSpPr>
-        <p:spPr>
-          <a:xfrm xmlns:a="http://schemas.openxmlformats.org/drawingml/2006/main">
-            <a:off x="6248400" y="4210050"/>
+              <a:t>识别问题</a:t>
+            </a:r>
+          </a:p>
+        </p:txBody>
+      </p:sp>
+      <p:sp>
+        <p:nvSpPr>
+          <p:cNvPr id="10" name="PPAGENT_QA|parent=timeline-body-0|domains=timeline-content">
+            <a:extLst xmlns:a="http://schemas.openxmlformats.org/drawingml/2006/main">
+              <a:ext uri="{FF2B5EF4-FFF2-40B4-BE49-F238E27FC236}">
+                <a16:creationId xmlns:a16="http://schemas.microsoft.com/office/drawing/2014/main" id="{7F9F5B42-1F48-4602-BEE7-D183E7994852}"/>
+              </a:ext>
+            </a:extLst>
+          </p:cNvPr>
+          <p:cNvSpPr>
+            <a:spLocks xmlns:a="http://schemas.openxmlformats.org/drawingml/2006/main" noGrp="1"/>
+          </p:cNvSpPr>
+          <p:nvPr/>
+        </p:nvSpPr>
+        <p:spPr>
+          <a:xfrm xmlns:a="http://schemas.openxmlformats.org/drawingml/2006/main">
+            <a:off x="762000" y="4210050"/>
             <a:ext cx="2438400" cy="990600"/>
           </a:xfrm>
           <a:prstGeom xmlns:a="http://schemas.openxmlformats.org/drawingml/2006/main" prst="rect">
@@ -2185,51 +2886,28 @@
                 <a:ea typeface="Microsoft YaHei"/>
                 <a:cs typeface="Microsoft YaHei"/>
               </a:rPr>
-              <a:t>在统一内核上逐步</a:t>
-            </a:r>
-          </a:p>
-          <a:p xmlns:a="http://schemas.openxmlformats.org/drawingml/2006/main">
-            <a:pPr algn="ctr">
-              <a:defRPr sz="1500" b="0">
-                <a:solidFill>
-                  <a:srgbClr val="475569"/>
-                </a:solidFill>
-                <a:latin typeface="Microsoft YaHei"/>
-                <a:ea typeface="Microsoft YaHei"/>
-                <a:cs typeface="Microsoft YaHei"/>
-              </a:defRPr>
-            </a:pPr>
-            <a:r>
-              <a:rPr sz="1500" b="0">
-                <a:solidFill>
-                  <a:srgbClr val="475569"/>
-                </a:solidFill>
-                <a:latin typeface="Microsoft YaHei"/>
-                <a:ea typeface="Microsoft YaHei"/>
-                <a:cs typeface="Microsoft YaHei"/>
-              </a:rPr>
-              <a:t>适配更多组织和用途</a:t>
-            </a:r>
-          </a:p>
-        </p:txBody>
-      </p:sp>
-      <p:sp>
-        <p:nvSpPr>
-          <p:cNvPr id="23" name="PPAGENT_QA|parent=timeline-bar-2|domains=timeline-shape">
-            <a:extLst xmlns:a="http://schemas.openxmlformats.org/drawingml/2006/main">
-              <a:ext uri="{FF2B5EF4-FFF2-40B4-BE49-F238E27FC236}">
-                <a16:creationId xmlns:a16="http://schemas.microsoft.com/office/drawing/2014/main" id="{D4D979FD-D31D-4628-9D55-C28242C2134C}"/>
-              </a:ext>
-            </a:extLst>
-          </p:cNvPr>
-          <p:cNvSpPr>
-            <a:spLocks xmlns:a="http://schemas.openxmlformats.org/drawingml/2006/main" noGrp="1"/>
-          </p:cNvSpPr>
-          <p:nvPr/>
-        </p:nvSpPr>
-        <p:spPr>
-          <a:xfrm xmlns:a="http://schemas.openxmlformats.org/drawingml/2006/main">
-            <a:off x="7239000" y="5391150"/>
+              <a:t>明确场景与主要约束</a:t>
+            </a:r>
+          </a:p>
+        </p:txBody>
+      </p:sp>
+      <p:sp>
+        <p:nvSpPr>
+          <p:cNvPr id="11" name="PPAGENT_QA|parent=timeline-bar-0|domains=timeline-shape">
+            <a:extLst xmlns:a="http://schemas.openxmlformats.org/drawingml/2006/main">
+              <a:ext uri="{FF2B5EF4-FFF2-40B4-BE49-F238E27FC236}">
+                <a16:creationId xmlns:a16="http://schemas.microsoft.com/office/drawing/2014/main" id="{FE99D752-9AD9-4150-97C4-442A0F0BC58C}"/>
+              </a:ext>
+            </a:extLst>
+          </p:cNvPr>
+          <p:cNvSpPr>
+            <a:spLocks xmlns:a="http://schemas.openxmlformats.org/drawingml/2006/main" noGrp="1"/>
+          </p:cNvSpPr>
+          <p:nvPr/>
+        </p:nvSpPr>
+        <p:spPr>
+          <a:xfrm xmlns:a="http://schemas.openxmlformats.org/drawingml/2006/main">
+            <a:off x="1752600" y="5391150"/>
             <a:ext cx="457200" cy="47625"/>
           </a:xfrm>
           <a:prstGeom xmlns:a="http://schemas.openxmlformats.org/drawingml/2006/main" prst="roundRect">
@@ -2248,21 +2926,21 @@
       </p:sp>
       <p:sp>
         <p:nvSpPr>
-          <p:cNvPr id="24" name="PPAGENT_QA|parent=timeline-period-3|domains=timeline-content">
-            <a:extLst xmlns:a="http://schemas.openxmlformats.org/drawingml/2006/main">
-              <a:ext uri="{FF2B5EF4-FFF2-40B4-BE49-F238E27FC236}">
-                <a16:creationId xmlns:a16="http://schemas.microsoft.com/office/drawing/2014/main" id="{E757ABF5-84C7-4099-B71A-88D79EB3A02A}"/>
-              </a:ext>
-            </a:extLst>
-          </p:cNvPr>
-          <p:cNvSpPr>
-            <a:spLocks xmlns:a="http://schemas.openxmlformats.org/drawingml/2006/main" noGrp="1"/>
-          </p:cNvSpPr>
-          <p:nvPr/>
-        </p:nvSpPr>
-        <p:spPr>
-          <a:xfrm xmlns:a="http://schemas.openxmlformats.org/drawingml/2006/main">
-            <a:off x="8953500" y="1619250"/>
+          <p:cNvPr id="12" name="PPAGENT_QA|parent=timeline-period-1|domains=timeline-content">
+            <a:extLst xmlns:a="http://schemas.openxmlformats.org/drawingml/2006/main">
+              <a:ext uri="{FF2B5EF4-FFF2-40B4-BE49-F238E27FC236}">
+                <a16:creationId xmlns:a16="http://schemas.microsoft.com/office/drawing/2014/main" id="{7FE38CDF-04D0-4D2D-BA5B-93ADA4B169BC}"/>
+              </a:ext>
+            </a:extLst>
+          </p:cNvPr>
+          <p:cNvSpPr>
+            <a:spLocks xmlns:a="http://schemas.openxmlformats.org/drawingml/2006/main" noGrp="1"/>
+          </p:cNvSpPr>
+          <p:nvPr/>
+        </p:nvSpPr>
+        <p:spPr>
+          <a:xfrm xmlns:a="http://schemas.openxmlformats.org/drawingml/2006/main">
+            <a:off x="3467100" y="1619250"/>
             <a:ext cx="2514600" cy="1000125"/>
           </a:xfrm>
           <a:prstGeom xmlns:a="http://schemas.openxmlformats.org/drawingml/2006/main" prst="rect">
@@ -2283,7 +2961,7 @@
             <a:pPr algn="ctr">
               <a:defRPr sz="4350" b="1">
                 <a:solidFill>
-                  <a:srgbClr val="1677C8"/>
+                  <a:srgbClr val="AFC4D8"/>
                 </a:solidFill>
                 <a:latin typeface="Microsoft YaHei"/>
                 <a:ea typeface="Microsoft YaHei"/>
@@ -2293,34 +2971,34 @@
             <a:r>
               <a:rPr sz="4350" b="1">
                 <a:solidFill>
-                  <a:srgbClr val="1677C8"/>
-                </a:solidFill>
-                <a:latin typeface="Microsoft YaHei"/>
-                <a:ea typeface="Microsoft YaHei"/>
-                <a:cs typeface="Microsoft YaHei"/>
-              </a:rPr>
-              <a:t>2028</a:t>
-            </a:r>
-          </a:p>
-        </p:txBody>
-      </p:sp>
-      <p:sp>
-        <p:nvSpPr>
-          <p:cNvPr id="25" name="">
-            <a:extLst xmlns:a="http://schemas.openxmlformats.org/drawingml/2006/main">
-              <a:ext uri="{FF2B5EF4-FFF2-40B4-BE49-F238E27FC236}">
-                <a16:creationId xmlns:a16="http://schemas.microsoft.com/office/drawing/2014/main" id="{74C9D6A4-F829-42FB-89AE-5BC4380F0D9C}"/>
-              </a:ext>
-            </a:extLst>
-          </p:cNvPr>
-          <p:cNvSpPr>
-            <a:spLocks xmlns:a="http://schemas.openxmlformats.org/drawingml/2006/main" noGrp="1"/>
-          </p:cNvSpPr>
-          <p:nvPr/>
-        </p:nvSpPr>
-        <p:spPr>
-          <a:xfrm xmlns:a="http://schemas.openxmlformats.org/drawingml/2006/main">
-            <a:off x="8953500" y="2724150"/>
+                  <a:srgbClr val="AFC4D8"/>
+                </a:solidFill>
+                <a:latin typeface="Microsoft YaHei"/>
+                <a:ea typeface="Microsoft YaHei"/>
+                <a:cs typeface="Microsoft YaHei"/>
+              </a:rPr>
+              <a:t>2025</a:t>
+            </a:r>
+          </a:p>
+        </p:txBody>
+      </p:sp>
+      <p:sp>
+        <p:nvSpPr>
+          <p:cNvPr id="13" name="">
+            <a:extLst xmlns:a="http://schemas.openxmlformats.org/drawingml/2006/main">
+              <a:ext uri="{FF2B5EF4-FFF2-40B4-BE49-F238E27FC236}">
+                <a16:creationId xmlns:a16="http://schemas.microsoft.com/office/drawing/2014/main" id="{36F261DE-25D7-48CE-9560-D485D276686D}"/>
+              </a:ext>
+            </a:extLst>
+          </p:cNvPr>
+          <p:cNvSpPr>
+            <a:spLocks xmlns:a="http://schemas.openxmlformats.org/drawingml/2006/main" noGrp="1"/>
+          </p:cNvSpPr>
+          <p:nvPr/>
+        </p:nvSpPr>
+        <p:spPr>
+          <a:xfrm xmlns:a="http://schemas.openxmlformats.org/drawingml/2006/main">
+            <a:off x="3467100" y="2724150"/>
             <a:ext cx="2514600" cy="247650"/>
           </a:xfrm>
           <a:prstGeom xmlns:a="http://schemas.openxmlformats.org/drawingml/2006/main" prst="rect">
@@ -2341,6 +3019,614 @@
             <a:pPr algn="ctr">
               <a:defRPr sz="1350" b="1">
                 <a:solidFill>
+                  <a:srgbClr val="7C8A9A"/>
+                </a:solidFill>
+                <a:latin typeface="Microsoft YaHei"/>
+                <a:ea typeface="Microsoft YaHei"/>
+                <a:cs typeface="Microsoft YaHei"/>
+              </a:defRPr>
+            </a:pPr>
+            <a:r>
+              <a:rPr sz="1350" b="1">
+                <a:solidFill>
+                  <a:srgbClr val="7C8A9A"/>
+                </a:solidFill>
+                <a:latin typeface="Microsoft YaHei"/>
+                <a:ea typeface="Microsoft YaHei"/>
+                <a:cs typeface="Microsoft YaHei"/>
+              </a:rPr>
+              <a:t>阶段 02</a:t>
+            </a:r>
+          </a:p>
+        </p:txBody>
+      </p:sp>
+      <p:sp>
+        <p:nvSpPr>
+          <p:cNvPr id="14" name="PPAGENT_QA|parent=timeline-node-1|domains=timeline-connection">
+            <a:extLst xmlns:a="http://schemas.openxmlformats.org/drawingml/2006/main">
+              <a:ext uri="{FF2B5EF4-FFF2-40B4-BE49-F238E27FC236}">
+                <a16:creationId xmlns:a16="http://schemas.microsoft.com/office/drawing/2014/main" id="{1F7375E9-43A1-4227-9280-74FD70A49624}"/>
+              </a:ext>
+            </a:extLst>
+          </p:cNvPr>
+          <p:cNvSpPr>
+            <a:spLocks xmlns:a="http://schemas.openxmlformats.org/drawingml/2006/main" noGrp="1"/>
+          </p:cNvSpPr>
+          <p:nvPr/>
+        </p:nvSpPr>
+        <p:spPr>
+          <a:xfrm xmlns:a="http://schemas.openxmlformats.org/drawingml/2006/main">
+            <a:off x="4600575" y="3086100"/>
+            <a:ext cx="247650" cy="247650"/>
+          </a:xfrm>
+          <a:prstGeom xmlns:a="http://schemas.openxmlformats.org/drawingml/2006/main" prst="ellipse">
+            <a:avLst/>
+          </a:prstGeom>
+          <a:solidFill xmlns:a="http://schemas.openxmlformats.org/drawingml/2006/main">
+            <a:srgbClr val="1677C8"/>
+          </a:solidFill>
+          <a:ln xmlns:a="http://schemas.openxmlformats.org/drawingml/2006/main" w="28575">
+            <a:solidFill>
+              <a:srgbClr val="FFFFFF"/>
+            </a:solidFill>
+            <a:prstDash val="solid"/>
+          </a:ln>
+        </p:spPr>
+        <p:style>
+          <a:lnRef xmlns:a="http://schemas.openxmlformats.org/drawingml/2006/main" idx="0"/>
+          <a:fillRef xmlns:a="http://schemas.openxmlformats.org/drawingml/2006/main" idx="0"/>
+          <a:effectRef xmlns:a="http://schemas.openxmlformats.org/drawingml/2006/main" idx="4"/>
+          <a:fontRef xmlns:a="http://schemas.openxmlformats.org/drawingml/2006/main" idx="major"/>
+        </p:style>
+      </p:sp>
+      <p:sp>
+        <p:nvSpPr>
+          <p:cNvPr id="15" name="PPAGENT_QA|parent=timeline-title-1|domains=timeline-content">
+            <a:extLst xmlns:a="http://schemas.openxmlformats.org/drawingml/2006/main">
+              <a:ext uri="{FF2B5EF4-FFF2-40B4-BE49-F238E27FC236}">
+                <a16:creationId xmlns:a16="http://schemas.microsoft.com/office/drawing/2014/main" id="{F2FCA2EB-A5F3-44B8-A81A-3183E016DFD9}"/>
+              </a:ext>
+            </a:extLst>
+          </p:cNvPr>
+          <p:cNvSpPr>
+            <a:spLocks xmlns:a="http://schemas.openxmlformats.org/drawingml/2006/main" noGrp="1"/>
+          </p:cNvSpPr>
+          <p:nvPr/>
+        </p:nvSpPr>
+        <p:spPr>
+          <a:xfrm xmlns:a="http://schemas.openxmlformats.org/drawingml/2006/main">
+            <a:off x="3467100" y="3581400"/>
+            <a:ext cx="2514600" cy="552450"/>
+          </a:xfrm>
+          <a:prstGeom xmlns:a="http://schemas.openxmlformats.org/drawingml/2006/main" prst="rect">
+            <a:avLst/>
+          </a:prstGeom>
+          <a:noFill xmlns:a="http://schemas.openxmlformats.org/drawingml/2006/main"/>
+          <a:ln xmlns:a="http://schemas.openxmlformats.org/drawingml/2006/main" w="0">
+            <a:noFill/>
+            <a:prstDash val="solid"/>
+          </a:ln>
+        </p:spPr>
+        <p:txBody>
+          <a:bodyPr xmlns:a="http://schemas.openxmlformats.org/drawingml/2006/main" lIns="0" tIns="0" rIns="0" bIns="0" anchor="ctr">
+            <a:normAutofit fontScale="100000"/>
+          </a:bodyPr>
+          <a:lstStyle xmlns:a="http://schemas.openxmlformats.org/drawingml/2006/main"/>
+          <a:p xmlns:a="http://schemas.openxmlformats.org/drawingml/2006/main">
+            <a:pPr algn="ctr">
+              <a:defRPr sz="1650" b="1">
+                <a:solidFill>
+                  <a:srgbClr val="1677C8"/>
+                </a:solidFill>
+                <a:latin typeface="Microsoft YaHei"/>
+                <a:ea typeface="Microsoft YaHei"/>
+                <a:cs typeface="Microsoft YaHei"/>
+              </a:defRPr>
+            </a:pPr>
+            <a:r>
+              <a:rPr sz="1650" b="1">
+                <a:solidFill>
+                  <a:srgbClr val="1677C8"/>
+                </a:solidFill>
+                <a:latin typeface="Microsoft YaHei"/>
+                <a:ea typeface="Microsoft YaHei"/>
+                <a:cs typeface="Microsoft YaHei"/>
+              </a:rPr>
+              <a:t>验证方向</a:t>
+            </a:r>
+          </a:p>
+        </p:txBody>
+      </p:sp>
+      <p:sp>
+        <p:nvSpPr>
+          <p:cNvPr id="16" name="PPAGENT_QA|parent=timeline-body-1|domains=timeline-content">
+            <a:extLst xmlns:a="http://schemas.openxmlformats.org/drawingml/2006/main">
+              <a:ext uri="{FF2B5EF4-FFF2-40B4-BE49-F238E27FC236}">
+                <a16:creationId xmlns:a16="http://schemas.microsoft.com/office/drawing/2014/main" id="{915D9D3A-B706-42E2-863F-48AABF6D623E}"/>
+              </a:ext>
+            </a:extLst>
+          </p:cNvPr>
+          <p:cNvSpPr>
+            <a:spLocks xmlns:a="http://schemas.openxmlformats.org/drawingml/2006/main" noGrp="1"/>
+          </p:cNvSpPr>
+          <p:nvPr/>
+        </p:nvSpPr>
+        <p:spPr>
+          <a:xfrm xmlns:a="http://schemas.openxmlformats.org/drawingml/2006/main">
+            <a:off x="3505200" y="4210050"/>
+            <a:ext cx="2438400" cy="990600"/>
+          </a:xfrm>
+          <a:prstGeom xmlns:a="http://schemas.openxmlformats.org/drawingml/2006/main" prst="rect">
+            <a:avLst/>
+          </a:prstGeom>
+          <a:noFill xmlns:a="http://schemas.openxmlformats.org/drawingml/2006/main"/>
+          <a:ln xmlns:a="http://schemas.openxmlformats.org/drawingml/2006/main" w="0">
+            <a:noFill/>
+            <a:prstDash val="solid"/>
+          </a:ln>
+        </p:spPr>
+        <p:txBody>
+          <a:bodyPr xmlns:a="http://schemas.openxmlformats.org/drawingml/2006/main" lIns="0" tIns="0" rIns="0" bIns="0" anchor="t">
+            <a:normAutofit fontScale="100000"/>
+          </a:bodyPr>
+          <a:lstStyle xmlns:a="http://schemas.openxmlformats.org/drawingml/2006/main"/>
+          <a:p xmlns:a="http://schemas.openxmlformats.org/drawingml/2006/main">
+            <a:pPr algn="ctr">
+              <a:defRPr sz="1500" b="0">
+                <a:solidFill>
+                  <a:srgbClr val="475569"/>
+                </a:solidFill>
+                <a:latin typeface="Microsoft YaHei"/>
+                <a:ea typeface="Microsoft YaHei"/>
+                <a:cs typeface="Microsoft YaHei"/>
+              </a:defRPr>
+            </a:pPr>
+            <a:r>
+              <a:rPr sz="1500" b="0">
+                <a:solidFill>
+                  <a:srgbClr val="475569"/>
+                </a:solidFill>
+                <a:latin typeface="Microsoft YaHei"/>
+                <a:ea typeface="Microsoft YaHei"/>
+                <a:cs typeface="Microsoft YaHei"/>
+              </a:rPr>
+              <a:t>用真实任务确认最小闭环</a:t>
+            </a:r>
+          </a:p>
+        </p:txBody>
+      </p:sp>
+      <p:sp>
+        <p:nvSpPr>
+          <p:cNvPr id="17" name="PPAGENT_QA|parent=timeline-bar-1|domains=timeline-shape">
+            <a:extLst xmlns:a="http://schemas.openxmlformats.org/drawingml/2006/main">
+              <a:ext uri="{FF2B5EF4-FFF2-40B4-BE49-F238E27FC236}">
+                <a16:creationId xmlns:a16="http://schemas.microsoft.com/office/drawing/2014/main" id="{B15C42D5-5E3A-425F-AF19-2554AD1466D3}"/>
+              </a:ext>
+            </a:extLst>
+          </p:cNvPr>
+          <p:cNvSpPr>
+            <a:spLocks xmlns:a="http://schemas.openxmlformats.org/drawingml/2006/main" noGrp="1"/>
+          </p:cNvSpPr>
+          <p:nvPr/>
+        </p:nvSpPr>
+        <p:spPr>
+          <a:xfrm xmlns:a="http://schemas.openxmlformats.org/drawingml/2006/main">
+            <a:off x="4495800" y="5391150"/>
+            <a:ext cx="457200" cy="47625"/>
+          </a:xfrm>
+          <a:prstGeom xmlns:a="http://schemas.openxmlformats.org/drawingml/2006/main" prst="roundRect">
+            <a:avLst>
+              <a:gd name="adj" fmla="val 50000"/>
+            </a:avLst>
+          </a:prstGeom>
+          <a:solidFill xmlns:a="http://schemas.openxmlformats.org/drawingml/2006/main">
+            <a:srgbClr val="DCEEFF"/>
+          </a:solidFill>
+          <a:ln xmlns:a="http://schemas.openxmlformats.org/drawingml/2006/main" w="0">
+            <a:noFill/>
+            <a:prstDash val="solid"/>
+          </a:ln>
+        </p:spPr>
+      </p:sp>
+      <p:sp>
+        <p:nvSpPr>
+          <p:cNvPr id="18" name="PPAGENT_QA|parent=timeline-period-2|domains=timeline-content">
+            <a:extLst xmlns:a="http://schemas.openxmlformats.org/drawingml/2006/main">
+              <a:ext uri="{FF2B5EF4-FFF2-40B4-BE49-F238E27FC236}">
+                <a16:creationId xmlns:a16="http://schemas.microsoft.com/office/drawing/2014/main" id="{24BA401A-9747-45CE-BE39-DF32C54EA231}"/>
+              </a:ext>
+            </a:extLst>
+          </p:cNvPr>
+          <p:cNvSpPr>
+            <a:spLocks xmlns:a="http://schemas.openxmlformats.org/drawingml/2006/main" noGrp="1"/>
+          </p:cNvSpPr>
+          <p:nvPr/>
+        </p:nvSpPr>
+        <p:spPr>
+          <a:xfrm xmlns:a="http://schemas.openxmlformats.org/drawingml/2006/main">
+            <a:off x="6210300" y="1619250"/>
+            <a:ext cx="2514600" cy="1000125"/>
+          </a:xfrm>
+          <a:prstGeom xmlns:a="http://schemas.openxmlformats.org/drawingml/2006/main" prst="rect">
+            <a:avLst/>
+          </a:prstGeom>
+          <a:noFill xmlns:a="http://schemas.openxmlformats.org/drawingml/2006/main"/>
+          <a:ln xmlns:a="http://schemas.openxmlformats.org/drawingml/2006/main" w="0">
+            <a:noFill/>
+            <a:prstDash val="solid"/>
+          </a:ln>
+        </p:spPr>
+        <p:txBody>
+          <a:bodyPr xmlns:a="http://schemas.openxmlformats.org/drawingml/2006/main" lIns="0" tIns="0" rIns="0" bIns="0" anchor="ctr">
+            <a:normAutofit fontScale="100000"/>
+          </a:bodyPr>
+          <a:lstStyle xmlns:a="http://schemas.openxmlformats.org/drawingml/2006/main"/>
+          <a:p xmlns:a="http://schemas.openxmlformats.org/drawingml/2006/main">
+            <a:pPr algn="ctr">
+              <a:defRPr sz="4350" b="1">
+                <a:solidFill>
+                  <a:srgbClr val="AFC4D8"/>
+                </a:solidFill>
+                <a:latin typeface="Microsoft YaHei"/>
+                <a:ea typeface="Microsoft YaHei"/>
+                <a:cs typeface="Microsoft YaHei"/>
+              </a:defRPr>
+            </a:pPr>
+            <a:r>
+              <a:rPr sz="4350" b="1">
+                <a:solidFill>
+                  <a:srgbClr val="AFC4D8"/>
+                </a:solidFill>
+                <a:latin typeface="Microsoft YaHei"/>
+                <a:ea typeface="Microsoft YaHei"/>
+                <a:cs typeface="Microsoft YaHei"/>
+              </a:rPr>
+              <a:t>2026</a:t>
+            </a:r>
+          </a:p>
+        </p:txBody>
+      </p:sp>
+      <p:sp>
+        <p:nvSpPr>
+          <p:cNvPr id="19" name="">
+            <a:extLst xmlns:a="http://schemas.openxmlformats.org/drawingml/2006/main">
+              <a:ext uri="{FF2B5EF4-FFF2-40B4-BE49-F238E27FC236}">
+                <a16:creationId xmlns:a16="http://schemas.microsoft.com/office/drawing/2014/main" id="{61548751-583F-48D8-86B0-0E2213AE27D1}"/>
+              </a:ext>
+            </a:extLst>
+          </p:cNvPr>
+          <p:cNvSpPr>
+            <a:spLocks xmlns:a="http://schemas.openxmlformats.org/drawingml/2006/main" noGrp="1"/>
+          </p:cNvSpPr>
+          <p:nvPr/>
+        </p:nvSpPr>
+        <p:spPr>
+          <a:xfrm xmlns:a="http://schemas.openxmlformats.org/drawingml/2006/main">
+            <a:off x="6210300" y="2724150"/>
+            <a:ext cx="2514600" cy="247650"/>
+          </a:xfrm>
+          <a:prstGeom xmlns:a="http://schemas.openxmlformats.org/drawingml/2006/main" prst="rect">
+            <a:avLst/>
+          </a:prstGeom>
+          <a:noFill xmlns:a="http://schemas.openxmlformats.org/drawingml/2006/main"/>
+          <a:ln xmlns:a="http://schemas.openxmlformats.org/drawingml/2006/main" w="0">
+            <a:noFill/>
+            <a:prstDash val="solid"/>
+          </a:ln>
+        </p:spPr>
+        <p:txBody>
+          <a:bodyPr xmlns:a="http://schemas.openxmlformats.org/drawingml/2006/main" lIns="0" tIns="0" rIns="0" bIns="0" anchor="ctr">
+            <a:normAutofit fontScale="100000"/>
+          </a:bodyPr>
+          <a:lstStyle xmlns:a="http://schemas.openxmlformats.org/drawingml/2006/main"/>
+          <a:p xmlns:a="http://schemas.openxmlformats.org/drawingml/2006/main">
+            <a:pPr algn="ctr">
+              <a:defRPr sz="1350" b="1">
+                <a:solidFill>
+                  <a:srgbClr val="7C8A9A"/>
+                </a:solidFill>
+                <a:latin typeface="Microsoft YaHei"/>
+                <a:ea typeface="Microsoft YaHei"/>
+                <a:cs typeface="Microsoft YaHei"/>
+              </a:defRPr>
+            </a:pPr>
+            <a:r>
+              <a:rPr sz="1350" b="1">
+                <a:solidFill>
+                  <a:srgbClr val="7C8A9A"/>
+                </a:solidFill>
+                <a:latin typeface="Microsoft YaHei"/>
+                <a:ea typeface="Microsoft YaHei"/>
+                <a:cs typeface="Microsoft YaHei"/>
+              </a:rPr>
+              <a:t>阶段 03</a:t>
+            </a:r>
+          </a:p>
+        </p:txBody>
+      </p:sp>
+      <p:sp>
+        <p:nvSpPr>
+          <p:cNvPr id="20" name="PPAGENT_QA|parent=timeline-node-2|domains=timeline-connection">
+            <a:extLst xmlns:a="http://schemas.openxmlformats.org/drawingml/2006/main">
+              <a:ext uri="{FF2B5EF4-FFF2-40B4-BE49-F238E27FC236}">
+                <a16:creationId xmlns:a16="http://schemas.microsoft.com/office/drawing/2014/main" id="{90BEF0FC-C305-4DDF-A6DA-CFBE641AF07E}"/>
+              </a:ext>
+            </a:extLst>
+          </p:cNvPr>
+          <p:cNvSpPr>
+            <a:spLocks xmlns:a="http://schemas.openxmlformats.org/drawingml/2006/main" noGrp="1"/>
+          </p:cNvSpPr>
+          <p:nvPr/>
+        </p:nvSpPr>
+        <p:spPr>
+          <a:xfrm xmlns:a="http://schemas.openxmlformats.org/drawingml/2006/main">
+            <a:off x="7343775" y="3086100"/>
+            <a:ext cx="247650" cy="247650"/>
+          </a:xfrm>
+          <a:prstGeom xmlns:a="http://schemas.openxmlformats.org/drawingml/2006/main" prst="ellipse">
+            <a:avLst/>
+          </a:prstGeom>
+          <a:solidFill xmlns:a="http://schemas.openxmlformats.org/drawingml/2006/main">
+            <a:srgbClr val="1677C8"/>
+          </a:solidFill>
+          <a:ln xmlns:a="http://schemas.openxmlformats.org/drawingml/2006/main" w="28575">
+            <a:solidFill>
+              <a:srgbClr val="FFFFFF"/>
+            </a:solidFill>
+            <a:prstDash val="solid"/>
+          </a:ln>
+        </p:spPr>
+        <p:style>
+          <a:lnRef xmlns:a="http://schemas.openxmlformats.org/drawingml/2006/main" idx="0"/>
+          <a:fillRef xmlns:a="http://schemas.openxmlformats.org/drawingml/2006/main" idx="0"/>
+          <a:effectRef xmlns:a="http://schemas.openxmlformats.org/drawingml/2006/main" idx="4"/>
+          <a:fontRef xmlns:a="http://schemas.openxmlformats.org/drawingml/2006/main" idx="major"/>
+        </p:style>
+      </p:sp>
+      <p:sp>
+        <p:nvSpPr>
+          <p:cNvPr id="21" name="PPAGENT_QA|parent=timeline-title-2|domains=timeline-content">
+            <a:extLst xmlns:a="http://schemas.openxmlformats.org/drawingml/2006/main">
+              <a:ext uri="{FF2B5EF4-FFF2-40B4-BE49-F238E27FC236}">
+                <a16:creationId xmlns:a16="http://schemas.microsoft.com/office/drawing/2014/main" id="{BF1B43EA-7FD3-49DA-A11F-D1A5A031F7EE}"/>
+              </a:ext>
+            </a:extLst>
+          </p:cNvPr>
+          <p:cNvSpPr>
+            <a:spLocks xmlns:a="http://schemas.openxmlformats.org/drawingml/2006/main" noGrp="1"/>
+          </p:cNvSpPr>
+          <p:nvPr/>
+        </p:nvSpPr>
+        <p:spPr>
+          <a:xfrm xmlns:a="http://schemas.openxmlformats.org/drawingml/2006/main">
+            <a:off x="6210300" y="3581400"/>
+            <a:ext cx="2514600" cy="552450"/>
+          </a:xfrm>
+          <a:prstGeom xmlns:a="http://schemas.openxmlformats.org/drawingml/2006/main" prst="rect">
+            <a:avLst/>
+          </a:prstGeom>
+          <a:noFill xmlns:a="http://schemas.openxmlformats.org/drawingml/2006/main"/>
+          <a:ln xmlns:a="http://schemas.openxmlformats.org/drawingml/2006/main" w="0">
+            <a:noFill/>
+            <a:prstDash val="solid"/>
+          </a:ln>
+        </p:spPr>
+        <p:txBody>
+          <a:bodyPr xmlns:a="http://schemas.openxmlformats.org/drawingml/2006/main" lIns="0" tIns="0" rIns="0" bIns="0" anchor="ctr">
+            <a:normAutofit fontScale="100000"/>
+          </a:bodyPr>
+          <a:lstStyle xmlns:a="http://schemas.openxmlformats.org/drawingml/2006/main"/>
+          <a:p xmlns:a="http://schemas.openxmlformats.org/drawingml/2006/main">
+            <a:pPr algn="ctr">
+              <a:defRPr sz="1650" b="1">
+                <a:solidFill>
+                  <a:srgbClr val="1677C8"/>
+                </a:solidFill>
+                <a:latin typeface="Microsoft YaHei"/>
+                <a:ea typeface="Microsoft YaHei"/>
+                <a:cs typeface="Microsoft YaHei"/>
+              </a:defRPr>
+            </a:pPr>
+            <a:r>
+              <a:rPr sz="1650" b="1">
+                <a:solidFill>
+                  <a:srgbClr val="1677C8"/>
+                </a:solidFill>
+                <a:latin typeface="Microsoft YaHei"/>
+                <a:ea typeface="Microsoft YaHei"/>
+                <a:cs typeface="Microsoft YaHei"/>
+              </a:rPr>
+              <a:t>沉淀能力</a:t>
+            </a:r>
+          </a:p>
+        </p:txBody>
+      </p:sp>
+      <p:sp>
+        <p:nvSpPr>
+          <p:cNvPr id="22" name="PPAGENT_QA|parent=timeline-body-2|domains=timeline-content">
+            <a:extLst xmlns:a="http://schemas.openxmlformats.org/drawingml/2006/main">
+              <a:ext uri="{FF2B5EF4-FFF2-40B4-BE49-F238E27FC236}">
+                <a16:creationId xmlns:a16="http://schemas.microsoft.com/office/drawing/2014/main" id="{3791C8D1-FCB1-4699-A631-33B4BF345111}"/>
+              </a:ext>
+            </a:extLst>
+          </p:cNvPr>
+          <p:cNvSpPr>
+            <a:spLocks xmlns:a="http://schemas.openxmlformats.org/drawingml/2006/main" noGrp="1"/>
+          </p:cNvSpPr>
+          <p:nvPr/>
+        </p:nvSpPr>
+        <p:spPr>
+          <a:xfrm xmlns:a="http://schemas.openxmlformats.org/drawingml/2006/main">
+            <a:off x="6248400" y="4210050"/>
+            <a:ext cx="2438400" cy="990600"/>
+          </a:xfrm>
+          <a:prstGeom xmlns:a="http://schemas.openxmlformats.org/drawingml/2006/main" prst="rect">
+            <a:avLst/>
+          </a:prstGeom>
+          <a:noFill xmlns:a="http://schemas.openxmlformats.org/drawingml/2006/main"/>
+          <a:ln xmlns:a="http://schemas.openxmlformats.org/drawingml/2006/main" w="0">
+            <a:noFill/>
+            <a:prstDash val="solid"/>
+          </a:ln>
+        </p:spPr>
+        <p:txBody>
+          <a:bodyPr xmlns:a="http://schemas.openxmlformats.org/drawingml/2006/main" lIns="0" tIns="0" rIns="0" bIns="0" anchor="t">
+            <a:normAutofit fontScale="100000"/>
+          </a:bodyPr>
+          <a:lstStyle xmlns:a="http://schemas.openxmlformats.org/drawingml/2006/main"/>
+          <a:p xmlns:a="http://schemas.openxmlformats.org/drawingml/2006/main">
+            <a:pPr algn="ctr">
+              <a:defRPr sz="1500" b="0">
+                <a:solidFill>
+                  <a:srgbClr val="475569"/>
+                </a:solidFill>
+                <a:latin typeface="Microsoft YaHei"/>
+                <a:ea typeface="Microsoft YaHei"/>
+                <a:cs typeface="Microsoft YaHei"/>
+              </a:defRPr>
+            </a:pPr>
+            <a:r>
+              <a:rPr sz="1500" b="0">
+                <a:solidFill>
+                  <a:srgbClr val="475569"/>
+                </a:solidFill>
+                <a:latin typeface="Microsoft YaHei"/>
+                <a:ea typeface="Microsoft YaHei"/>
+                <a:cs typeface="Microsoft YaHei"/>
+              </a:rPr>
+              <a:t>把经验整理为规则与资产</a:t>
+            </a:r>
+          </a:p>
+        </p:txBody>
+      </p:sp>
+      <p:sp>
+        <p:nvSpPr>
+          <p:cNvPr id="23" name="PPAGENT_QA|parent=timeline-bar-2|domains=timeline-shape">
+            <a:extLst xmlns:a="http://schemas.openxmlformats.org/drawingml/2006/main">
+              <a:ext uri="{FF2B5EF4-FFF2-40B4-BE49-F238E27FC236}">
+                <a16:creationId xmlns:a16="http://schemas.microsoft.com/office/drawing/2014/main" id="{C210D2FB-E0E4-4A8D-A24D-87934533A60B}"/>
+              </a:ext>
+            </a:extLst>
+          </p:cNvPr>
+          <p:cNvSpPr>
+            <a:spLocks xmlns:a="http://schemas.openxmlformats.org/drawingml/2006/main" noGrp="1"/>
+          </p:cNvSpPr>
+          <p:nvPr/>
+        </p:nvSpPr>
+        <p:spPr>
+          <a:xfrm xmlns:a="http://schemas.openxmlformats.org/drawingml/2006/main">
+            <a:off x="7239000" y="5391150"/>
+            <a:ext cx="457200" cy="47625"/>
+          </a:xfrm>
+          <a:prstGeom xmlns:a="http://schemas.openxmlformats.org/drawingml/2006/main" prst="roundRect">
+            <a:avLst>
+              <a:gd name="adj" fmla="val 50000"/>
+            </a:avLst>
+          </a:prstGeom>
+          <a:solidFill xmlns:a="http://schemas.openxmlformats.org/drawingml/2006/main">
+            <a:srgbClr val="DCEEFF"/>
+          </a:solidFill>
+          <a:ln xmlns:a="http://schemas.openxmlformats.org/drawingml/2006/main" w="0">
+            <a:noFill/>
+            <a:prstDash val="solid"/>
+          </a:ln>
+        </p:spPr>
+      </p:sp>
+      <p:sp>
+        <p:nvSpPr>
+          <p:cNvPr id="24" name="PPAGENT_QA|parent=timeline-period-3|domains=timeline-content">
+            <a:extLst xmlns:a="http://schemas.openxmlformats.org/drawingml/2006/main">
+              <a:ext uri="{FF2B5EF4-FFF2-40B4-BE49-F238E27FC236}">
+                <a16:creationId xmlns:a16="http://schemas.microsoft.com/office/drawing/2014/main" id="{EB996A2D-C460-4772-8C39-8788C1F150A2}"/>
+              </a:ext>
+            </a:extLst>
+          </p:cNvPr>
+          <p:cNvSpPr>
+            <a:spLocks xmlns:a="http://schemas.openxmlformats.org/drawingml/2006/main" noGrp="1"/>
+          </p:cNvSpPr>
+          <p:nvPr/>
+        </p:nvSpPr>
+        <p:spPr>
+          <a:xfrm xmlns:a="http://schemas.openxmlformats.org/drawingml/2006/main">
+            <a:off x="8953500" y="1619250"/>
+            <a:ext cx="2514600" cy="1000125"/>
+          </a:xfrm>
+          <a:prstGeom xmlns:a="http://schemas.openxmlformats.org/drawingml/2006/main" prst="rect">
+            <a:avLst/>
+          </a:prstGeom>
+          <a:noFill xmlns:a="http://schemas.openxmlformats.org/drawingml/2006/main"/>
+          <a:ln xmlns:a="http://schemas.openxmlformats.org/drawingml/2006/main" w="0">
+            <a:noFill/>
+            <a:prstDash val="solid"/>
+          </a:ln>
+        </p:spPr>
+        <p:txBody>
+          <a:bodyPr xmlns:a="http://schemas.openxmlformats.org/drawingml/2006/main" lIns="0" tIns="0" rIns="0" bIns="0" anchor="ctr">
+            <a:normAutofit fontScale="100000"/>
+          </a:bodyPr>
+          <a:lstStyle xmlns:a="http://schemas.openxmlformats.org/drawingml/2006/main"/>
+          <a:p xmlns:a="http://schemas.openxmlformats.org/drawingml/2006/main">
+            <a:pPr algn="ctr">
+              <a:defRPr sz="4350" b="1">
+                <a:solidFill>
+                  <a:srgbClr val="1677C8"/>
+                </a:solidFill>
+                <a:latin typeface="Microsoft YaHei"/>
+                <a:ea typeface="Microsoft YaHei"/>
+                <a:cs typeface="Microsoft YaHei"/>
+              </a:defRPr>
+            </a:pPr>
+            <a:r>
+              <a:rPr sz="4350" b="1">
+                <a:solidFill>
+                  <a:srgbClr val="1677C8"/>
+                </a:solidFill>
+                <a:latin typeface="Microsoft YaHei"/>
+                <a:ea typeface="Microsoft YaHei"/>
+                <a:cs typeface="Microsoft YaHei"/>
+              </a:rPr>
+              <a:t>2027</a:t>
+            </a:r>
+          </a:p>
+        </p:txBody>
+      </p:sp>
+      <p:sp>
+        <p:nvSpPr>
+          <p:cNvPr id="25" name="">
+            <a:extLst xmlns:a="http://schemas.openxmlformats.org/drawingml/2006/main">
+              <a:ext uri="{FF2B5EF4-FFF2-40B4-BE49-F238E27FC236}">
+                <a16:creationId xmlns:a16="http://schemas.microsoft.com/office/drawing/2014/main" id="{E736AC29-C11B-4B8F-9A6E-EDE7920DC02B}"/>
+              </a:ext>
+            </a:extLst>
+          </p:cNvPr>
+          <p:cNvSpPr>
+            <a:spLocks xmlns:a="http://schemas.openxmlformats.org/drawingml/2006/main" noGrp="1"/>
+          </p:cNvSpPr>
+          <p:nvPr/>
+        </p:nvSpPr>
+        <p:spPr>
+          <a:xfrm xmlns:a="http://schemas.openxmlformats.org/drawingml/2006/main">
+            <a:off x="8953500" y="2724150"/>
+            <a:ext cx="2514600" cy="247650"/>
+          </a:xfrm>
+          <a:prstGeom xmlns:a="http://schemas.openxmlformats.org/drawingml/2006/main" prst="rect">
+            <a:avLst/>
+          </a:prstGeom>
+          <a:noFill xmlns:a="http://schemas.openxmlformats.org/drawingml/2006/main"/>
+          <a:ln xmlns:a="http://schemas.openxmlformats.org/drawingml/2006/main" w="0">
+            <a:noFill/>
+            <a:prstDash val="solid"/>
+          </a:ln>
+        </p:spPr>
+        <p:txBody>
+          <a:bodyPr xmlns:a="http://schemas.openxmlformats.org/drawingml/2006/main" lIns="0" tIns="0" rIns="0" bIns="0" anchor="ctr">
+            <a:normAutofit fontScale="100000"/>
+          </a:bodyPr>
+          <a:lstStyle xmlns:a="http://schemas.openxmlformats.org/drawingml/2006/main"/>
+          <a:p xmlns:a="http://schemas.openxmlformats.org/drawingml/2006/main">
+            <a:pPr algn="ctr">
+              <a:defRPr sz="1350" b="1">
+                <a:solidFill>
                   <a:srgbClr val="00A8D8"/>
                 </a:solidFill>
                 <a:latin typeface="Microsoft YaHei"/>
@@ -2367,7 +3653,7 @@
           <p:cNvPr id="26" name="PPAGENT_QA|parent=timeline-node-3|domains=timeline-connection">
             <a:extLst xmlns:a="http://schemas.openxmlformats.org/drawingml/2006/main">
               <a:ext uri="{FF2B5EF4-FFF2-40B4-BE49-F238E27FC236}">
-                <a16:creationId xmlns:a16="http://schemas.microsoft.com/office/drawing/2014/main" id="{C6329E46-9F12-43ED-AAD4-E661F58D9530}"/>
+                <a16:creationId xmlns:a16="http://schemas.microsoft.com/office/drawing/2014/main" id="{197306C7-BA8A-4854-8AD2-41667AA19453}"/>
               </a:ext>
             </a:extLst>
           </p:cNvPr>
@@ -2406,7 +3692,7 @@
           <p:cNvPr id="27" name="PPAGENT_QA|parent=timeline-title-3|domains=timeline-content">
             <a:extLst xmlns:a="http://schemas.openxmlformats.org/drawingml/2006/main">
               <a:ext uri="{FF2B5EF4-FFF2-40B4-BE49-F238E27FC236}">
-                <a16:creationId xmlns:a16="http://schemas.microsoft.com/office/drawing/2014/main" id="{E9BF5404-917F-47E5-835C-F6B235C2507A}"/>
+                <a16:creationId xmlns:a16="http://schemas.microsoft.com/office/drawing/2014/main" id="{888B86F4-73DD-4B4F-96C9-9035387D6CBF}"/>
               </a:ext>
             </a:extLst>
           </p:cNvPr>
@@ -2454,7 +3740,7 @@
                 <a:ea typeface="Microsoft YaHei"/>
                 <a:cs typeface="Microsoft YaHei"/>
               </a:rPr>
-              <a:t>形成系统</a:t>
+              <a:t>扩展场景</a:t>
             </a:r>
           </a:p>
         </p:txBody>
@@ -2464,7 +3750,7 @@
           <p:cNvPr id="28" name="PPAGENT_QA|parent=timeline-body-3|domains=timeline-content">
             <a:extLst xmlns:a="http://schemas.openxmlformats.org/drawingml/2006/main">
               <a:ext uri="{FF2B5EF4-FFF2-40B4-BE49-F238E27FC236}">
-                <a16:creationId xmlns:a16="http://schemas.microsoft.com/office/drawing/2014/main" id="{1C1BD0EC-ADC3-46CF-8A88-A90067DBB502}"/>
+                <a16:creationId xmlns:a16="http://schemas.microsoft.com/office/drawing/2014/main" id="{7DA8AE96-5E22-42E8-B4D8-596C75334F7C}"/>
               </a:ext>
             </a:extLst>
           </p:cNvPr>
@@ -2512,30 +3798,7 @@
                 <a:ea typeface="Microsoft YaHei"/>
                 <a:cs typeface="Microsoft YaHei"/>
               </a:rPr>
-              <a:t>让稿件、视觉规范与</a:t>
-            </a:r>
-          </a:p>
-          <a:p xmlns:a="http://schemas.openxmlformats.org/drawingml/2006/main">
-            <a:pPr algn="ctr">
-              <a:defRPr sz="1500" b="0">
-                <a:solidFill>
-                  <a:srgbClr val="475569"/>
-                </a:solidFill>
-                <a:latin typeface="Microsoft YaHei"/>
-                <a:ea typeface="Microsoft YaHei"/>
-                <a:cs typeface="Microsoft YaHei"/>
-              </a:defRPr>
-            </a:pPr>
-            <a:r>
-              <a:rPr sz="1500" b="0">
-                <a:solidFill>
-                  <a:srgbClr val="475569"/>
-                </a:solidFill>
-                <a:latin typeface="Microsoft YaHei"/>
-                <a:ea typeface="Microsoft YaHei"/>
-                <a:cs typeface="Microsoft YaHei"/>
-              </a:rPr>
-              <a:t>可靠交付形成完整链路</a:t>
+              <a:t>适配更多组织和用途</a:t>
             </a:r>
           </a:p>
         </p:txBody>
@@ -2545,7 +3808,7 @@
           <p:cNvPr id="29" name="PPAGENT_QA|parent=timeline-bar-3|domains=timeline-shape">
             <a:extLst xmlns:a="http://schemas.openxmlformats.org/drawingml/2006/main">
               <a:ext uri="{FF2B5EF4-FFF2-40B4-BE49-F238E27FC236}">
-                <a16:creationId xmlns:a16="http://schemas.microsoft.com/office/drawing/2014/main" id="{811147D2-4F9D-4BFC-8D4A-0487B124E44D}"/>
+                <a16:creationId xmlns:a16="http://schemas.microsoft.com/office/drawing/2014/main" id="{4097E34B-EF20-4CE6-B6A2-224764B02569}"/>
               </a:ext>
             </a:extLst>
           </p:cNvPr>
@@ -2576,7 +3839,4039 @@
     </p:spTree>
     <p:extLst>
       <p:ext uri="{BB962C8B-B14F-4D97-AF65-F5344CB8AC3E}">
-        <p14:creationId xmlns:p14="http://schemas.microsoft.com/office/powerpoint/2010/main" val="1718266946"/>
+        <p14:creationId xmlns:p14="http://schemas.microsoft.com/office/powerpoint/2010/main" val="1994343465"/>
+      </p:ext>
+    </p:extLst>
+  </p:cSld>
+</p:sld>
+</file>
+
+<file path=ppt/slides/slide3.xml><?xml version="1.0" encoding="utf-8"?>
+<p:sld xmlns:p="http://schemas.openxmlformats.org/presentationml/2006/main">
+  <p:cSld>
+    <p:bg>
+      <p:bgPr>
+        <a:solidFill xmlns:a="http://schemas.openxmlformats.org/drawingml/2006/main">
+          <a:srgbClr val="F7FAFC"/>
+        </a:solidFill>
+      </p:bgPr>
+    </p:bg>
+    <p:spTree>
+      <p:nvGrpSpPr>
+        <p:cNvPr id="1" name=""/>
+        <p:cNvGrpSpPr/>
+        <p:nvPr/>
+      </p:nvGrpSpPr>
+      <p:grpSpPr>
+        <a:xfrm xmlns:a="http://schemas.openxmlformats.org/drawingml/2006/main"/>
+      </p:grpSpPr>
+      <p:sp>
+        <p:nvSpPr>
+          <p:cNvPr id="37" name="">
+            <a:extLst xmlns:a="http://schemas.openxmlformats.org/drawingml/2006/main">
+              <a:ext uri="{FF2B5EF4-FFF2-40B4-BE49-F238E27FC236}">
+                <a16:creationId xmlns:a16="http://schemas.microsoft.com/office/drawing/2014/main" id="{CEE05EE2-F397-4867-A20B-62BCC4605EB7}"/>
+              </a:ext>
+            </a:extLst>
+          </p:cNvPr>
+          <p:cNvSpPr>
+            <a:spLocks xmlns:a="http://schemas.openxmlformats.org/drawingml/2006/main" noGrp="1"/>
+          </p:cNvSpPr>
+          <p:nvPr/>
+        </p:nvSpPr>
+        <p:spPr>
+          <a:xfrm xmlns:a="http://schemas.openxmlformats.org/drawingml/2006/main">
+            <a:off x="685800" y="400050"/>
+            <a:ext cx="8382000" cy="457200"/>
+          </a:xfrm>
+          <a:prstGeom xmlns:a="http://schemas.openxmlformats.org/drawingml/2006/main" prst="rect">
+            <a:avLst/>
+          </a:prstGeom>
+          <a:noFill xmlns:a="http://schemas.openxmlformats.org/drawingml/2006/main"/>
+          <a:ln xmlns:a="http://schemas.openxmlformats.org/drawingml/2006/main" w="0">
+            <a:noFill/>
+            <a:prstDash val="solid"/>
+          </a:ln>
+        </p:spPr>
+        <p:txBody>
+          <a:bodyPr xmlns:a="http://schemas.openxmlformats.org/drawingml/2006/main" lIns="0" tIns="0" rIns="0" bIns="0" anchor="ctr">
+            <a:normAutofit fontScale="100000"/>
+          </a:bodyPr>
+          <a:lstStyle xmlns:a="http://schemas.openxmlformats.org/drawingml/2006/main"/>
+          <a:p xmlns:a="http://schemas.openxmlformats.org/drawingml/2006/main">
+            <a:pPr algn="l">
+              <a:defRPr sz="2700" b="1">
+                <a:solidFill>
+                  <a:srgbClr val="1677C8"/>
+                </a:solidFill>
+                <a:latin typeface="Microsoft YaHei"/>
+                <a:ea typeface="Microsoft YaHei"/>
+                <a:cs typeface="Microsoft YaHei"/>
+              </a:defRPr>
+            </a:pPr>
+            <a:r>
+              <a:rPr sz="2700" b="1">
+                <a:solidFill>
+                  <a:srgbClr val="1677C8"/>
+                </a:solidFill>
+                <a:latin typeface="Microsoft YaHei"/>
+                <a:ea typeface="Microsoft YaHei"/>
+                <a:cs typeface="Microsoft YaHei"/>
+              </a:rPr>
+              <a:t>发展历程</a:t>
+            </a:r>
+          </a:p>
+        </p:txBody>
+      </p:sp>
+      <p:sp>
+        <p:nvSpPr>
+          <p:cNvPr id="2" name="">
+            <a:extLst xmlns:a="http://schemas.openxmlformats.org/drawingml/2006/main">
+              <a:ext uri="{FF2B5EF4-FFF2-40B4-BE49-F238E27FC236}">
+                <a16:creationId xmlns:a16="http://schemas.microsoft.com/office/drawing/2014/main" id="{0059410B-D8D1-4910-99D2-BA9A7B223F06}"/>
+              </a:ext>
+            </a:extLst>
+          </p:cNvPr>
+          <p:cNvSpPr>
+            <a:spLocks xmlns:a="http://schemas.openxmlformats.org/drawingml/2006/main" noGrp="1"/>
+          </p:cNvSpPr>
+          <p:nvPr/>
+        </p:nvSpPr>
+        <p:spPr>
+          <a:xfrm xmlns:a="http://schemas.openxmlformats.org/drawingml/2006/main">
+            <a:off x="704850" y="876300"/>
+            <a:ext cx="4953000" cy="247650"/>
+          </a:xfrm>
+          <a:prstGeom xmlns:a="http://schemas.openxmlformats.org/drawingml/2006/main" prst="rect">
+            <a:avLst/>
+          </a:prstGeom>
+          <a:noFill xmlns:a="http://schemas.openxmlformats.org/drawingml/2006/main"/>
+          <a:ln xmlns:a="http://schemas.openxmlformats.org/drawingml/2006/main" w="0">
+            <a:noFill/>
+            <a:prstDash val="solid"/>
+          </a:ln>
+        </p:spPr>
+        <p:txBody>
+          <a:bodyPr xmlns:a="http://schemas.openxmlformats.org/drawingml/2006/main" lIns="0" tIns="0" rIns="0" bIns="0" anchor="ctr">
+            <a:normAutofit fontScale="100000"/>
+          </a:bodyPr>
+          <a:lstStyle xmlns:a="http://schemas.openxmlformats.org/drawingml/2006/main"/>
+          <a:p xmlns:a="http://schemas.openxmlformats.org/drawingml/2006/main">
+            <a:pPr algn="l">
+              <a:defRPr sz="1200" b="0">
+                <a:solidFill>
+                  <a:srgbClr val="7C8A9A"/>
+                </a:solidFill>
+                <a:latin typeface="Microsoft YaHei"/>
+                <a:ea typeface="Microsoft YaHei"/>
+                <a:cs typeface="Microsoft YaHei"/>
+              </a:defRPr>
+            </a:pPr>
+            <a:r>
+              <a:rPr sz="1200" b="0">
+                <a:solidFill>
+                  <a:srgbClr val="7C8A9A"/>
+                </a:solidFill>
+                <a:latin typeface="Microsoft YaHei"/>
+                <a:ea typeface="Microsoft YaHei"/>
+                <a:cs typeface="Microsoft YaHei"/>
+              </a:rPr>
+              <a:t>阶段节点 · 发展历程</a:t>
+            </a:r>
+          </a:p>
+        </p:txBody>
+      </p:sp>
+      <p:sp>
+        <p:nvSpPr>
+          <p:cNvPr id="3" name="">
+            <a:extLst xmlns:a="http://schemas.openxmlformats.org/drawingml/2006/main">
+              <a:ext uri="{FF2B5EF4-FFF2-40B4-BE49-F238E27FC236}">
+                <a16:creationId xmlns:a16="http://schemas.microsoft.com/office/drawing/2014/main" id="{3C308C9B-5807-4DC6-9916-473811D8F95D}"/>
+              </a:ext>
+            </a:extLst>
+          </p:cNvPr>
+          <p:cNvSpPr>
+            <a:spLocks xmlns:a="http://schemas.openxmlformats.org/drawingml/2006/main" noGrp="1"/>
+          </p:cNvSpPr>
+          <p:nvPr/>
+        </p:nvSpPr>
+        <p:spPr>
+          <a:xfrm xmlns:a="http://schemas.openxmlformats.org/drawingml/2006/main">
+            <a:off x="638175" y="1476375"/>
+            <a:ext cx="2137410" cy="4495800"/>
+          </a:xfrm>
+          <a:prstGeom xmlns:a="http://schemas.openxmlformats.org/drawingml/2006/main" prst="roundRect">
+            <a:avLst>
+              <a:gd name="adj" fmla="val 891"/>
+            </a:avLst>
+          </a:prstGeom>
+          <a:solidFill xmlns:a="http://schemas.openxmlformats.org/drawingml/2006/main">
+            <a:srgbClr val="F0F7FC"/>
+          </a:solidFill>
+          <a:ln xmlns:a="http://schemas.openxmlformats.org/drawingml/2006/main" w="0">
+            <a:noFill/>
+            <a:prstDash val="solid"/>
+          </a:ln>
+        </p:spPr>
+      </p:sp>
+      <p:sp>
+        <p:nvSpPr>
+          <p:cNvPr id="4" name="">
+            <a:extLst xmlns:a="http://schemas.openxmlformats.org/drawingml/2006/main">
+              <a:ext uri="{FF2B5EF4-FFF2-40B4-BE49-F238E27FC236}">
+                <a16:creationId xmlns:a16="http://schemas.microsoft.com/office/drawing/2014/main" id="{1866DC0D-0949-43B1-893F-9DEB2E2058C3}"/>
+              </a:ext>
+            </a:extLst>
+          </p:cNvPr>
+          <p:cNvSpPr>
+            <a:spLocks xmlns:a="http://schemas.openxmlformats.org/drawingml/2006/main" noGrp="1"/>
+          </p:cNvSpPr>
+          <p:nvPr/>
+        </p:nvSpPr>
+        <p:spPr>
+          <a:xfrm xmlns:a="http://schemas.openxmlformats.org/drawingml/2006/main">
+            <a:off x="5027295" y="1476375"/>
+            <a:ext cx="2137410" cy="4495800"/>
+          </a:xfrm>
+          <a:prstGeom xmlns:a="http://schemas.openxmlformats.org/drawingml/2006/main" prst="roundRect">
+            <a:avLst>
+              <a:gd name="adj" fmla="val 891"/>
+            </a:avLst>
+          </a:prstGeom>
+          <a:solidFill xmlns:a="http://schemas.openxmlformats.org/drawingml/2006/main">
+            <a:srgbClr val="F0F7FC"/>
+          </a:solidFill>
+          <a:ln xmlns:a="http://schemas.openxmlformats.org/drawingml/2006/main" w="0">
+            <a:noFill/>
+            <a:prstDash val="solid"/>
+          </a:ln>
+        </p:spPr>
+      </p:sp>
+      <p:sp>
+        <p:nvSpPr>
+          <p:cNvPr id="5" name="">
+            <a:extLst xmlns:a="http://schemas.openxmlformats.org/drawingml/2006/main">
+              <a:ext uri="{FF2B5EF4-FFF2-40B4-BE49-F238E27FC236}">
+                <a16:creationId xmlns:a16="http://schemas.microsoft.com/office/drawing/2014/main" id="{31BFBD7C-14F3-435F-A934-E2B52B4DB63C}"/>
+              </a:ext>
+            </a:extLst>
+          </p:cNvPr>
+          <p:cNvSpPr>
+            <a:spLocks xmlns:a="http://schemas.openxmlformats.org/drawingml/2006/main" noGrp="1"/>
+          </p:cNvSpPr>
+          <p:nvPr/>
+        </p:nvSpPr>
+        <p:spPr>
+          <a:xfrm xmlns:a="http://schemas.openxmlformats.org/drawingml/2006/main">
+            <a:off x="9416415" y="1476375"/>
+            <a:ext cx="2137410" cy="4495800"/>
+          </a:xfrm>
+          <a:prstGeom xmlns:a="http://schemas.openxmlformats.org/drawingml/2006/main" prst="roundRect">
+            <a:avLst>
+              <a:gd name="adj" fmla="val 891"/>
+            </a:avLst>
+          </a:prstGeom>
+          <a:solidFill xmlns:a="http://schemas.openxmlformats.org/drawingml/2006/main">
+            <a:srgbClr val="F0F7FC"/>
+          </a:solidFill>
+          <a:ln xmlns:a="http://schemas.openxmlformats.org/drawingml/2006/main" w="0">
+            <a:noFill/>
+            <a:prstDash val="solid"/>
+          </a:ln>
+        </p:spPr>
+      </p:sp>
+      <p:sp>
+        <p:nvSpPr>
+          <p:cNvPr id="6" name="PPAGENT_QA|parent=timeline-axis|domains=timeline-connection">
+            <a:extLst xmlns:a="http://schemas.openxmlformats.org/drawingml/2006/main">
+              <a:ext uri="{FF2B5EF4-FFF2-40B4-BE49-F238E27FC236}">
+                <a16:creationId xmlns:a16="http://schemas.microsoft.com/office/drawing/2014/main" id="{5B21B4B7-2F53-476E-A05E-23307151483B}"/>
+              </a:ext>
+            </a:extLst>
+          </p:cNvPr>
+          <p:cNvSpPr>
+            <a:spLocks xmlns:a="http://schemas.openxmlformats.org/drawingml/2006/main" noGrp="1"/>
+          </p:cNvSpPr>
+          <p:nvPr/>
+        </p:nvSpPr>
+        <p:spPr>
+          <a:xfrm xmlns:a="http://schemas.openxmlformats.org/drawingml/2006/main">
+            <a:off x="609600" y="3209925"/>
+            <a:ext cx="10972800" cy="0"/>
+          </a:xfrm>
+          <a:prstGeom xmlns:a="http://schemas.openxmlformats.org/drawingml/2006/main" prst="line">
+            <a:avLst/>
+          </a:prstGeom>
+          <a:noFill xmlns:a="http://schemas.openxmlformats.org/drawingml/2006/main"/>
+          <a:ln xmlns:a="http://schemas.openxmlformats.org/drawingml/2006/main" w="28575">
+            <a:solidFill>
+              <a:srgbClr val="1677C8"/>
+            </a:solidFill>
+            <a:prstDash val="solid"/>
+          </a:ln>
+        </p:spPr>
+      </p:sp>
+      <p:sp>
+        <p:nvSpPr>
+          <p:cNvPr id="7" name="PPAGENT_QA|parent=timeline-period-0|domains=timeline-content">
+            <a:extLst xmlns:a="http://schemas.openxmlformats.org/drawingml/2006/main">
+              <a:ext uri="{FF2B5EF4-FFF2-40B4-BE49-F238E27FC236}">
+                <a16:creationId xmlns:a16="http://schemas.microsoft.com/office/drawing/2014/main" id="{B0138FDE-B4BE-4E28-8CD5-7AD95CD29BEA}"/>
+              </a:ext>
+            </a:extLst>
+          </p:cNvPr>
+          <p:cNvSpPr>
+            <a:spLocks xmlns:a="http://schemas.openxmlformats.org/drawingml/2006/main" noGrp="1"/>
+          </p:cNvSpPr>
+          <p:nvPr/>
+        </p:nvSpPr>
+        <p:spPr>
+          <a:xfrm xmlns:a="http://schemas.openxmlformats.org/drawingml/2006/main">
+            <a:off x="723900" y="1619250"/>
+            <a:ext cx="1965960" cy="1000125"/>
+          </a:xfrm>
+          <a:prstGeom xmlns:a="http://schemas.openxmlformats.org/drawingml/2006/main" prst="rect">
+            <a:avLst/>
+          </a:prstGeom>
+          <a:noFill xmlns:a="http://schemas.openxmlformats.org/drawingml/2006/main"/>
+          <a:ln xmlns:a="http://schemas.openxmlformats.org/drawingml/2006/main" w="0">
+            <a:noFill/>
+            <a:prstDash val="solid"/>
+          </a:ln>
+        </p:spPr>
+        <p:txBody>
+          <a:bodyPr xmlns:a="http://schemas.openxmlformats.org/drawingml/2006/main" lIns="0" tIns="0" rIns="0" bIns="0" anchor="ctr">
+            <a:normAutofit fontScale="100000"/>
+          </a:bodyPr>
+          <a:lstStyle xmlns:a="http://schemas.openxmlformats.org/drawingml/2006/main"/>
+          <a:p xmlns:a="http://schemas.openxmlformats.org/drawingml/2006/main">
+            <a:pPr algn="ctr">
+              <a:defRPr sz="3300" b="1">
+                <a:solidFill>
+                  <a:srgbClr val="AFC4D8"/>
+                </a:solidFill>
+                <a:latin typeface="Microsoft YaHei"/>
+                <a:ea typeface="Microsoft YaHei"/>
+                <a:cs typeface="Microsoft YaHei"/>
+              </a:defRPr>
+            </a:pPr>
+            <a:r>
+              <a:rPr sz="3300" b="1">
+                <a:solidFill>
+                  <a:srgbClr val="AFC4D8"/>
+                </a:solidFill>
+                <a:latin typeface="Microsoft YaHei"/>
+                <a:ea typeface="Microsoft YaHei"/>
+                <a:cs typeface="Microsoft YaHei"/>
+              </a:rPr>
+              <a:t>2024</a:t>
+            </a:r>
+          </a:p>
+        </p:txBody>
+      </p:sp>
+      <p:sp>
+        <p:nvSpPr>
+          <p:cNvPr id="8" name="">
+            <a:extLst xmlns:a="http://schemas.openxmlformats.org/drawingml/2006/main">
+              <a:ext uri="{FF2B5EF4-FFF2-40B4-BE49-F238E27FC236}">
+                <a16:creationId xmlns:a16="http://schemas.microsoft.com/office/drawing/2014/main" id="{1A60B11C-1DD2-4AA2-BDA1-5D9E6FDA200B}"/>
+              </a:ext>
+            </a:extLst>
+          </p:cNvPr>
+          <p:cNvSpPr>
+            <a:spLocks xmlns:a="http://schemas.openxmlformats.org/drawingml/2006/main" noGrp="1"/>
+          </p:cNvSpPr>
+          <p:nvPr/>
+        </p:nvSpPr>
+        <p:spPr>
+          <a:xfrm xmlns:a="http://schemas.openxmlformats.org/drawingml/2006/main">
+            <a:off x="723900" y="2724150"/>
+            <a:ext cx="1965960" cy="247650"/>
+          </a:xfrm>
+          <a:prstGeom xmlns:a="http://schemas.openxmlformats.org/drawingml/2006/main" prst="rect">
+            <a:avLst/>
+          </a:prstGeom>
+          <a:noFill xmlns:a="http://schemas.openxmlformats.org/drawingml/2006/main"/>
+          <a:ln xmlns:a="http://schemas.openxmlformats.org/drawingml/2006/main" w="0">
+            <a:noFill/>
+            <a:prstDash val="solid"/>
+          </a:ln>
+        </p:spPr>
+        <p:txBody>
+          <a:bodyPr xmlns:a="http://schemas.openxmlformats.org/drawingml/2006/main" lIns="0" tIns="0" rIns="0" bIns="0" anchor="ctr">
+            <a:normAutofit fontScale="100000"/>
+          </a:bodyPr>
+          <a:lstStyle xmlns:a="http://schemas.openxmlformats.org/drawingml/2006/main"/>
+          <a:p xmlns:a="http://schemas.openxmlformats.org/drawingml/2006/main">
+            <a:pPr algn="ctr">
+              <a:defRPr sz="1350" b="1">
+                <a:solidFill>
+                  <a:srgbClr val="7C8A9A"/>
+                </a:solidFill>
+                <a:latin typeface="Microsoft YaHei"/>
+                <a:ea typeface="Microsoft YaHei"/>
+                <a:cs typeface="Microsoft YaHei"/>
+              </a:defRPr>
+            </a:pPr>
+            <a:r>
+              <a:rPr sz="1350" b="1">
+                <a:solidFill>
+                  <a:srgbClr val="7C8A9A"/>
+                </a:solidFill>
+                <a:latin typeface="Microsoft YaHei"/>
+                <a:ea typeface="Microsoft YaHei"/>
+                <a:cs typeface="Microsoft YaHei"/>
+              </a:rPr>
+              <a:t>阶段 01</a:t>
+            </a:r>
+          </a:p>
+        </p:txBody>
+      </p:sp>
+      <p:sp>
+        <p:nvSpPr>
+          <p:cNvPr id="9" name="PPAGENT_QA|parent=timeline-node-0|domains=timeline-connection">
+            <a:extLst xmlns:a="http://schemas.openxmlformats.org/drawingml/2006/main">
+              <a:ext uri="{FF2B5EF4-FFF2-40B4-BE49-F238E27FC236}">
+                <a16:creationId xmlns:a16="http://schemas.microsoft.com/office/drawing/2014/main" id="{1D59657A-42AB-4CE2-A4C8-CD8C71DD25FC}"/>
+              </a:ext>
+            </a:extLst>
+          </p:cNvPr>
+          <p:cNvSpPr>
+            <a:spLocks xmlns:a="http://schemas.openxmlformats.org/drawingml/2006/main" noGrp="1"/>
+          </p:cNvSpPr>
+          <p:nvPr/>
+        </p:nvSpPr>
+        <p:spPr>
+          <a:xfrm xmlns:a="http://schemas.openxmlformats.org/drawingml/2006/main">
+            <a:off x="1583055" y="3086100"/>
+            <a:ext cx="247650" cy="247650"/>
+          </a:xfrm>
+          <a:prstGeom xmlns:a="http://schemas.openxmlformats.org/drawingml/2006/main" prst="ellipse">
+            <a:avLst/>
+          </a:prstGeom>
+          <a:solidFill xmlns:a="http://schemas.openxmlformats.org/drawingml/2006/main">
+            <a:srgbClr val="1677C8"/>
+          </a:solidFill>
+          <a:ln xmlns:a="http://schemas.openxmlformats.org/drawingml/2006/main" w="28575">
+            <a:solidFill>
+              <a:srgbClr val="FFFFFF"/>
+            </a:solidFill>
+            <a:prstDash val="solid"/>
+          </a:ln>
+        </p:spPr>
+        <p:style>
+          <a:lnRef xmlns:a="http://schemas.openxmlformats.org/drawingml/2006/main" idx="0"/>
+          <a:fillRef xmlns:a="http://schemas.openxmlformats.org/drawingml/2006/main" idx="0"/>
+          <a:effectRef xmlns:a="http://schemas.openxmlformats.org/drawingml/2006/main" idx="4"/>
+          <a:fontRef xmlns:a="http://schemas.openxmlformats.org/drawingml/2006/main" idx="major"/>
+        </p:style>
+      </p:sp>
+      <p:sp>
+        <p:nvSpPr>
+          <p:cNvPr id="10" name="PPAGENT_QA|parent=timeline-title-0|domains=timeline-content">
+            <a:extLst xmlns:a="http://schemas.openxmlformats.org/drawingml/2006/main">
+              <a:ext uri="{FF2B5EF4-FFF2-40B4-BE49-F238E27FC236}">
+                <a16:creationId xmlns:a16="http://schemas.microsoft.com/office/drawing/2014/main" id="{17C433C1-DE75-4010-8E82-2E06C5159E48}"/>
+              </a:ext>
+            </a:extLst>
+          </p:cNvPr>
+          <p:cNvSpPr>
+            <a:spLocks xmlns:a="http://schemas.openxmlformats.org/drawingml/2006/main" noGrp="1"/>
+          </p:cNvSpPr>
+          <p:nvPr/>
+        </p:nvSpPr>
+        <p:spPr>
+          <a:xfrm xmlns:a="http://schemas.openxmlformats.org/drawingml/2006/main">
+            <a:off x="723900" y="3581400"/>
+            <a:ext cx="1965960" cy="552450"/>
+          </a:xfrm>
+          <a:prstGeom xmlns:a="http://schemas.openxmlformats.org/drawingml/2006/main" prst="rect">
+            <a:avLst/>
+          </a:prstGeom>
+          <a:noFill xmlns:a="http://schemas.openxmlformats.org/drawingml/2006/main"/>
+          <a:ln xmlns:a="http://schemas.openxmlformats.org/drawingml/2006/main" w="0">
+            <a:noFill/>
+            <a:prstDash val="solid"/>
+          </a:ln>
+        </p:spPr>
+        <p:txBody>
+          <a:bodyPr xmlns:a="http://schemas.openxmlformats.org/drawingml/2006/main" lIns="0" tIns="0" rIns="0" bIns="0" anchor="ctr">
+            <a:normAutofit fontScale="100000"/>
+          </a:bodyPr>
+          <a:lstStyle xmlns:a="http://schemas.openxmlformats.org/drawingml/2006/main"/>
+          <a:p xmlns:a="http://schemas.openxmlformats.org/drawingml/2006/main">
+            <a:pPr algn="ctr">
+              <a:defRPr sz="1425" b="1">
+                <a:solidFill>
+                  <a:srgbClr val="1677C8"/>
+                </a:solidFill>
+                <a:latin typeface="Microsoft YaHei"/>
+                <a:ea typeface="Microsoft YaHei"/>
+                <a:cs typeface="Microsoft YaHei"/>
+              </a:defRPr>
+            </a:pPr>
+            <a:r>
+              <a:rPr sz="1425" b="1">
+                <a:solidFill>
+                  <a:srgbClr val="1677C8"/>
+                </a:solidFill>
+                <a:latin typeface="Microsoft YaHei"/>
+                <a:ea typeface="Microsoft YaHei"/>
+                <a:cs typeface="Microsoft YaHei"/>
+              </a:rPr>
+              <a:t>识别问题</a:t>
+            </a:r>
+          </a:p>
+        </p:txBody>
+      </p:sp>
+      <p:sp>
+        <p:nvSpPr>
+          <p:cNvPr id="11" name="PPAGENT_QA|parent=timeline-body-0|domains=timeline-content">
+            <a:extLst xmlns:a="http://schemas.openxmlformats.org/drawingml/2006/main">
+              <a:ext uri="{FF2B5EF4-FFF2-40B4-BE49-F238E27FC236}">
+                <a16:creationId xmlns:a16="http://schemas.microsoft.com/office/drawing/2014/main" id="{1647CEA6-C1B5-4E51-B260-4F335ABCBE33}"/>
+              </a:ext>
+            </a:extLst>
+          </p:cNvPr>
+          <p:cNvSpPr>
+            <a:spLocks xmlns:a="http://schemas.openxmlformats.org/drawingml/2006/main" noGrp="1"/>
+          </p:cNvSpPr>
+          <p:nvPr/>
+        </p:nvSpPr>
+        <p:spPr>
+          <a:xfrm xmlns:a="http://schemas.openxmlformats.org/drawingml/2006/main">
+            <a:off x="762000" y="4210050"/>
+            <a:ext cx="1889760" cy="990600"/>
+          </a:xfrm>
+          <a:prstGeom xmlns:a="http://schemas.openxmlformats.org/drawingml/2006/main" prst="rect">
+            <a:avLst/>
+          </a:prstGeom>
+          <a:noFill xmlns:a="http://schemas.openxmlformats.org/drawingml/2006/main"/>
+          <a:ln xmlns:a="http://schemas.openxmlformats.org/drawingml/2006/main" w="0">
+            <a:noFill/>
+            <a:prstDash val="solid"/>
+          </a:ln>
+        </p:spPr>
+        <p:txBody>
+          <a:bodyPr xmlns:a="http://schemas.openxmlformats.org/drawingml/2006/main" lIns="0" tIns="0" rIns="0" bIns="0" anchor="t">
+            <a:normAutofit fontScale="100000"/>
+          </a:bodyPr>
+          <a:lstStyle xmlns:a="http://schemas.openxmlformats.org/drawingml/2006/main"/>
+          <a:p xmlns:a="http://schemas.openxmlformats.org/drawingml/2006/main">
+            <a:pPr algn="ctr">
+              <a:defRPr sz="1500" b="0">
+                <a:solidFill>
+                  <a:srgbClr val="475569"/>
+                </a:solidFill>
+                <a:latin typeface="Microsoft YaHei"/>
+                <a:ea typeface="Microsoft YaHei"/>
+                <a:cs typeface="Microsoft YaHei"/>
+              </a:defRPr>
+            </a:pPr>
+            <a:r>
+              <a:rPr sz="1500" b="0">
+                <a:solidFill>
+                  <a:srgbClr val="475569"/>
+                </a:solidFill>
+                <a:latin typeface="Microsoft YaHei"/>
+                <a:ea typeface="Microsoft YaHei"/>
+                <a:cs typeface="Microsoft YaHei"/>
+              </a:rPr>
+              <a:t>明确场景与主要约束</a:t>
+            </a:r>
+          </a:p>
+        </p:txBody>
+      </p:sp>
+      <p:sp>
+        <p:nvSpPr>
+          <p:cNvPr id="12" name="PPAGENT_QA|parent=timeline-bar-0|domains=timeline-shape">
+            <a:extLst xmlns:a="http://schemas.openxmlformats.org/drawingml/2006/main">
+              <a:ext uri="{FF2B5EF4-FFF2-40B4-BE49-F238E27FC236}">
+                <a16:creationId xmlns:a16="http://schemas.microsoft.com/office/drawing/2014/main" id="{FD4F5E9F-B384-4940-ABFA-61D5DC282560}"/>
+              </a:ext>
+            </a:extLst>
+          </p:cNvPr>
+          <p:cNvSpPr>
+            <a:spLocks xmlns:a="http://schemas.openxmlformats.org/drawingml/2006/main" noGrp="1"/>
+          </p:cNvSpPr>
+          <p:nvPr/>
+        </p:nvSpPr>
+        <p:spPr>
+          <a:xfrm xmlns:a="http://schemas.openxmlformats.org/drawingml/2006/main">
+            <a:off x="1478280" y="5391150"/>
+            <a:ext cx="457200" cy="47625"/>
+          </a:xfrm>
+          <a:prstGeom xmlns:a="http://schemas.openxmlformats.org/drawingml/2006/main" prst="roundRect">
+            <a:avLst>
+              <a:gd name="adj" fmla="val 50000"/>
+            </a:avLst>
+          </a:prstGeom>
+          <a:solidFill xmlns:a="http://schemas.openxmlformats.org/drawingml/2006/main">
+            <a:srgbClr val="DCEEFF"/>
+          </a:solidFill>
+          <a:ln xmlns:a="http://schemas.openxmlformats.org/drawingml/2006/main" w="0">
+            <a:noFill/>
+            <a:prstDash val="solid"/>
+          </a:ln>
+        </p:spPr>
+      </p:sp>
+      <p:sp>
+        <p:nvSpPr>
+          <p:cNvPr id="13" name="PPAGENT_QA|parent=timeline-period-1|domains=timeline-content">
+            <a:extLst xmlns:a="http://schemas.openxmlformats.org/drawingml/2006/main">
+              <a:ext uri="{FF2B5EF4-FFF2-40B4-BE49-F238E27FC236}">
+                <a16:creationId xmlns:a16="http://schemas.microsoft.com/office/drawing/2014/main" id="{25FC7B57-BF82-4762-8910-CE8D96DAF422}"/>
+              </a:ext>
+            </a:extLst>
+          </p:cNvPr>
+          <p:cNvSpPr>
+            <a:spLocks xmlns:a="http://schemas.openxmlformats.org/drawingml/2006/main" noGrp="1"/>
+          </p:cNvSpPr>
+          <p:nvPr/>
+        </p:nvSpPr>
+        <p:spPr>
+          <a:xfrm xmlns:a="http://schemas.openxmlformats.org/drawingml/2006/main">
+            <a:off x="2918460" y="1619250"/>
+            <a:ext cx="1965960" cy="1000125"/>
+          </a:xfrm>
+          <a:prstGeom xmlns:a="http://schemas.openxmlformats.org/drawingml/2006/main" prst="rect">
+            <a:avLst/>
+          </a:prstGeom>
+          <a:noFill xmlns:a="http://schemas.openxmlformats.org/drawingml/2006/main"/>
+          <a:ln xmlns:a="http://schemas.openxmlformats.org/drawingml/2006/main" w="0">
+            <a:noFill/>
+            <a:prstDash val="solid"/>
+          </a:ln>
+        </p:spPr>
+        <p:txBody>
+          <a:bodyPr xmlns:a="http://schemas.openxmlformats.org/drawingml/2006/main" lIns="0" tIns="0" rIns="0" bIns="0" anchor="ctr">
+            <a:normAutofit fontScale="100000"/>
+          </a:bodyPr>
+          <a:lstStyle xmlns:a="http://schemas.openxmlformats.org/drawingml/2006/main"/>
+          <a:p xmlns:a="http://schemas.openxmlformats.org/drawingml/2006/main">
+            <a:pPr algn="ctr">
+              <a:defRPr sz="3300" b="1">
+                <a:solidFill>
+                  <a:srgbClr val="AFC4D8"/>
+                </a:solidFill>
+                <a:latin typeface="Microsoft YaHei"/>
+                <a:ea typeface="Microsoft YaHei"/>
+                <a:cs typeface="Microsoft YaHei"/>
+              </a:defRPr>
+            </a:pPr>
+            <a:r>
+              <a:rPr sz="3300" b="1">
+                <a:solidFill>
+                  <a:srgbClr val="AFC4D8"/>
+                </a:solidFill>
+                <a:latin typeface="Microsoft YaHei"/>
+                <a:ea typeface="Microsoft YaHei"/>
+                <a:cs typeface="Microsoft YaHei"/>
+              </a:rPr>
+              <a:t>2025</a:t>
+            </a:r>
+          </a:p>
+        </p:txBody>
+      </p:sp>
+      <p:sp>
+        <p:nvSpPr>
+          <p:cNvPr id="14" name="">
+            <a:extLst xmlns:a="http://schemas.openxmlformats.org/drawingml/2006/main">
+              <a:ext uri="{FF2B5EF4-FFF2-40B4-BE49-F238E27FC236}">
+                <a16:creationId xmlns:a16="http://schemas.microsoft.com/office/drawing/2014/main" id="{003B2B37-94DD-46B4-BAFB-651DCB89C32D}"/>
+              </a:ext>
+            </a:extLst>
+          </p:cNvPr>
+          <p:cNvSpPr>
+            <a:spLocks xmlns:a="http://schemas.openxmlformats.org/drawingml/2006/main" noGrp="1"/>
+          </p:cNvSpPr>
+          <p:nvPr/>
+        </p:nvSpPr>
+        <p:spPr>
+          <a:xfrm xmlns:a="http://schemas.openxmlformats.org/drawingml/2006/main">
+            <a:off x="2918460" y="2724150"/>
+            <a:ext cx="1965960" cy="247650"/>
+          </a:xfrm>
+          <a:prstGeom xmlns:a="http://schemas.openxmlformats.org/drawingml/2006/main" prst="rect">
+            <a:avLst/>
+          </a:prstGeom>
+          <a:noFill xmlns:a="http://schemas.openxmlformats.org/drawingml/2006/main"/>
+          <a:ln xmlns:a="http://schemas.openxmlformats.org/drawingml/2006/main" w="0">
+            <a:noFill/>
+            <a:prstDash val="solid"/>
+          </a:ln>
+        </p:spPr>
+        <p:txBody>
+          <a:bodyPr xmlns:a="http://schemas.openxmlformats.org/drawingml/2006/main" lIns="0" tIns="0" rIns="0" bIns="0" anchor="ctr">
+            <a:normAutofit fontScale="100000"/>
+          </a:bodyPr>
+          <a:lstStyle xmlns:a="http://schemas.openxmlformats.org/drawingml/2006/main"/>
+          <a:p xmlns:a="http://schemas.openxmlformats.org/drawingml/2006/main">
+            <a:pPr algn="ctr">
+              <a:defRPr sz="1350" b="1">
+                <a:solidFill>
+                  <a:srgbClr val="7C8A9A"/>
+                </a:solidFill>
+                <a:latin typeface="Microsoft YaHei"/>
+                <a:ea typeface="Microsoft YaHei"/>
+                <a:cs typeface="Microsoft YaHei"/>
+              </a:defRPr>
+            </a:pPr>
+            <a:r>
+              <a:rPr sz="1350" b="1">
+                <a:solidFill>
+                  <a:srgbClr val="7C8A9A"/>
+                </a:solidFill>
+                <a:latin typeface="Microsoft YaHei"/>
+                <a:ea typeface="Microsoft YaHei"/>
+                <a:cs typeface="Microsoft YaHei"/>
+              </a:rPr>
+              <a:t>阶段 02</a:t>
+            </a:r>
+          </a:p>
+        </p:txBody>
+      </p:sp>
+      <p:sp>
+        <p:nvSpPr>
+          <p:cNvPr id="15" name="PPAGENT_QA|parent=timeline-node-1|domains=timeline-connection">
+            <a:extLst xmlns:a="http://schemas.openxmlformats.org/drawingml/2006/main">
+              <a:ext uri="{FF2B5EF4-FFF2-40B4-BE49-F238E27FC236}">
+                <a16:creationId xmlns:a16="http://schemas.microsoft.com/office/drawing/2014/main" id="{4B9D0FB2-ADEF-4E39-930F-9160EE832AAE}"/>
+              </a:ext>
+            </a:extLst>
+          </p:cNvPr>
+          <p:cNvSpPr>
+            <a:spLocks xmlns:a="http://schemas.openxmlformats.org/drawingml/2006/main" noGrp="1"/>
+          </p:cNvSpPr>
+          <p:nvPr/>
+        </p:nvSpPr>
+        <p:spPr>
+          <a:xfrm xmlns:a="http://schemas.openxmlformats.org/drawingml/2006/main">
+            <a:off x="3777615" y="3086100"/>
+            <a:ext cx="247650" cy="247650"/>
+          </a:xfrm>
+          <a:prstGeom xmlns:a="http://schemas.openxmlformats.org/drawingml/2006/main" prst="ellipse">
+            <a:avLst/>
+          </a:prstGeom>
+          <a:solidFill xmlns:a="http://schemas.openxmlformats.org/drawingml/2006/main">
+            <a:srgbClr val="1677C8"/>
+          </a:solidFill>
+          <a:ln xmlns:a="http://schemas.openxmlformats.org/drawingml/2006/main" w="28575">
+            <a:solidFill>
+              <a:srgbClr val="FFFFFF"/>
+            </a:solidFill>
+            <a:prstDash val="solid"/>
+          </a:ln>
+        </p:spPr>
+        <p:style>
+          <a:lnRef xmlns:a="http://schemas.openxmlformats.org/drawingml/2006/main" idx="0"/>
+          <a:fillRef xmlns:a="http://schemas.openxmlformats.org/drawingml/2006/main" idx="0"/>
+          <a:effectRef xmlns:a="http://schemas.openxmlformats.org/drawingml/2006/main" idx="4"/>
+          <a:fontRef xmlns:a="http://schemas.openxmlformats.org/drawingml/2006/main" idx="major"/>
+        </p:style>
+      </p:sp>
+      <p:sp>
+        <p:nvSpPr>
+          <p:cNvPr id="16" name="PPAGENT_QA|parent=timeline-title-1|domains=timeline-content">
+            <a:extLst xmlns:a="http://schemas.openxmlformats.org/drawingml/2006/main">
+              <a:ext uri="{FF2B5EF4-FFF2-40B4-BE49-F238E27FC236}">
+                <a16:creationId xmlns:a16="http://schemas.microsoft.com/office/drawing/2014/main" id="{6DC4B9ED-F0BF-4709-9DE8-F78927AB91D1}"/>
+              </a:ext>
+            </a:extLst>
+          </p:cNvPr>
+          <p:cNvSpPr>
+            <a:spLocks xmlns:a="http://schemas.openxmlformats.org/drawingml/2006/main" noGrp="1"/>
+          </p:cNvSpPr>
+          <p:nvPr/>
+        </p:nvSpPr>
+        <p:spPr>
+          <a:xfrm xmlns:a="http://schemas.openxmlformats.org/drawingml/2006/main">
+            <a:off x="2918460" y="3581400"/>
+            <a:ext cx="1965960" cy="552450"/>
+          </a:xfrm>
+          <a:prstGeom xmlns:a="http://schemas.openxmlformats.org/drawingml/2006/main" prst="rect">
+            <a:avLst/>
+          </a:prstGeom>
+          <a:noFill xmlns:a="http://schemas.openxmlformats.org/drawingml/2006/main"/>
+          <a:ln xmlns:a="http://schemas.openxmlformats.org/drawingml/2006/main" w="0">
+            <a:noFill/>
+            <a:prstDash val="solid"/>
+          </a:ln>
+        </p:spPr>
+        <p:txBody>
+          <a:bodyPr xmlns:a="http://schemas.openxmlformats.org/drawingml/2006/main" lIns="0" tIns="0" rIns="0" bIns="0" anchor="ctr">
+            <a:normAutofit fontScale="100000"/>
+          </a:bodyPr>
+          <a:lstStyle xmlns:a="http://schemas.openxmlformats.org/drawingml/2006/main"/>
+          <a:p xmlns:a="http://schemas.openxmlformats.org/drawingml/2006/main">
+            <a:pPr algn="ctr">
+              <a:defRPr sz="1425" b="1">
+                <a:solidFill>
+                  <a:srgbClr val="1677C8"/>
+                </a:solidFill>
+                <a:latin typeface="Microsoft YaHei"/>
+                <a:ea typeface="Microsoft YaHei"/>
+                <a:cs typeface="Microsoft YaHei"/>
+              </a:defRPr>
+            </a:pPr>
+            <a:r>
+              <a:rPr sz="1425" b="1">
+                <a:solidFill>
+                  <a:srgbClr val="1677C8"/>
+                </a:solidFill>
+                <a:latin typeface="Microsoft YaHei"/>
+                <a:ea typeface="Microsoft YaHei"/>
+                <a:cs typeface="Microsoft YaHei"/>
+              </a:rPr>
+              <a:t>验证方向</a:t>
+            </a:r>
+          </a:p>
+        </p:txBody>
+      </p:sp>
+      <p:sp>
+        <p:nvSpPr>
+          <p:cNvPr id="17" name="PPAGENT_QA|parent=timeline-body-1|domains=timeline-content">
+            <a:extLst xmlns:a="http://schemas.openxmlformats.org/drawingml/2006/main">
+              <a:ext uri="{FF2B5EF4-FFF2-40B4-BE49-F238E27FC236}">
+                <a16:creationId xmlns:a16="http://schemas.microsoft.com/office/drawing/2014/main" id="{C590B9B4-C15C-4694-BD11-E77B63B4AC2C}"/>
+              </a:ext>
+            </a:extLst>
+          </p:cNvPr>
+          <p:cNvSpPr>
+            <a:spLocks xmlns:a="http://schemas.openxmlformats.org/drawingml/2006/main" noGrp="1"/>
+          </p:cNvSpPr>
+          <p:nvPr/>
+        </p:nvSpPr>
+        <p:spPr>
+          <a:xfrm xmlns:a="http://schemas.openxmlformats.org/drawingml/2006/main">
+            <a:off x="2956560" y="4210050"/>
+            <a:ext cx="1889760" cy="990600"/>
+          </a:xfrm>
+          <a:prstGeom xmlns:a="http://schemas.openxmlformats.org/drawingml/2006/main" prst="rect">
+            <a:avLst/>
+          </a:prstGeom>
+          <a:noFill xmlns:a="http://schemas.openxmlformats.org/drawingml/2006/main"/>
+          <a:ln xmlns:a="http://schemas.openxmlformats.org/drawingml/2006/main" w="0">
+            <a:noFill/>
+            <a:prstDash val="solid"/>
+          </a:ln>
+        </p:spPr>
+        <p:txBody>
+          <a:bodyPr xmlns:a="http://schemas.openxmlformats.org/drawingml/2006/main" lIns="0" tIns="0" rIns="0" bIns="0" anchor="t">
+            <a:normAutofit fontScale="100000"/>
+          </a:bodyPr>
+          <a:lstStyle xmlns:a="http://schemas.openxmlformats.org/drawingml/2006/main"/>
+          <a:p xmlns:a="http://schemas.openxmlformats.org/drawingml/2006/main">
+            <a:pPr algn="ctr">
+              <a:defRPr sz="1500" b="0">
+                <a:solidFill>
+                  <a:srgbClr val="475569"/>
+                </a:solidFill>
+                <a:latin typeface="Microsoft YaHei"/>
+                <a:ea typeface="Microsoft YaHei"/>
+                <a:cs typeface="Microsoft YaHei"/>
+              </a:defRPr>
+            </a:pPr>
+            <a:r>
+              <a:rPr sz="1500" b="0">
+                <a:solidFill>
+                  <a:srgbClr val="475569"/>
+                </a:solidFill>
+                <a:latin typeface="Microsoft YaHei"/>
+                <a:ea typeface="Microsoft YaHei"/>
+                <a:cs typeface="Microsoft YaHei"/>
+              </a:rPr>
+              <a:t>用真实任务</a:t>
+            </a:r>
+          </a:p>
+          <a:p xmlns:a="http://schemas.openxmlformats.org/drawingml/2006/main">
+            <a:pPr algn="ctr">
+              <a:defRPr sz="1500" b="0">
+                <a:solidFill>
+                  <a:srgbClr val="475569"/>
+                </a:solidFill>
+                <a:latin typeface="Microsoft YaHei"/>
+                <a:ea typeface="Microsoft YaHei"/>
+                <a:cs typeface="Microsoft YaHei"/>
+              </a:defRPr>
+            </a:pPr>
+            <a:r>
+              <a:rPr sz="1500" b="0">
+                <a:solidFill>
+                  <a:srgbClr val="475569"/>
+                </a:solidFill>
+                <a:latin typeface="Microsoft YaHei"/>
+                <a:ea typeface="Microsoft YaHei"/>
+                <a:cs typeface="Microsoft YaHei"/>
+              </a:rPr>
+              <a:t>确认最小闭环</a:t>
+            </a:r>
+          </a:p>
+        </p:txBody>
+      </p:sp>
+      <p:sp>
+        <p:nvSpPr>
+          <p:cNvPr id="18" name="PPAGENT_QA|parent=timeline-bar-1|domains=timeline-shape">
+            <a:extLst xmlns:a="http://schemas.openxmlformats.org/drawingml/2006/main">
+              <a:ext uri="{FF2B5EF4-FFF2-40B4-BE49-F238E27FC236}">
+                <a16:creationId xmlns:a16="http://schemas.microsoft.com/office/drawing/2014/main" id="{B5F4D45C-6B13-4929-AB29-53FF91F590F7}"/>
+              </a:ext>
+            </a:extLst>
+          </p:cNvPr>
+          <p:cNvSpPr>
+            <a:spLocks xmlns:a="http://schemas.openxmlformats.org/drawingml/2006/main" noGrp="1"/>
+          </p:cNvSpPr>
+          <p:nvPr/>
+        </p:nvSpPr>
+        <p:spPr>
+          <a:xfrm xmlns:a="http://schemas.openxmlformats.org/drawingml/2006/main">
+            <a:off x="3672840" y="5391150"/>
+            <a:ext cx="457200" cy="47625"/>
+          </a:xfrm>
+          <a:prstGeom xmlns:a="http://schemas.openxmlformats.org/drawingml/2006/main" prst="roundRect">
+            <a:avLst>
+              <a:gd name="adj" fmla="val 50000"/>
+            </a:avLst>
+          </a:prstGeom>
+          <a:solidFill xmlns:a="http://schemas.openxmlformats.org/drawingml/2006/main">
+            <a:srgbClr val="DCEEFF"/>
+          </a:solidFill>
+          <a:ln xmlns:a="http://schemas.openxmlformats.org/drawingml/2006/main" w="0">
+            <a:noFill/>
+            <a:prstDash val="solid"/>
+          </a:ln>
+        </p:spPr>
+      </p:sp>
+      <p:sp>
+        <p:nvSpPr>
+          <p:cNvPr id="19" name="PPAGENT_QA|parent=timeline-period-2|domains=timeline-content">
+            <a:extLst xmlns:a="http://schemas.openxmlformats.org/drawingml/2006/main">
+              <a:ext uri="{FF2B5EF4-FFF2-40B4-BE49-F238E27FC236}">
+                <a16:creationId xmlns:a16="http://schemas.microsoft.com/office/drawing/2014/main" id="{CA2E4784-84AE-43F6-A164-A74906BC7FA8}"/>
+              </a:ext>
+            </a:extLst>
+          </p:cNvPr>
+          <p:cNvSpPr>
+            <a:spLocks xmlns:a="http://schemas.openxmlformats.org/drawingml/2006/main" noGrp="1"/>
+          </p:cNvSpPr>
+          <p:nvPr/>
+        </p:nvSpPr>
+        <p:spPr>
+          <a:xfrm xmlns:a="http://schemas.openxmlformats.org/drawingml/2006/main">
+            <a:off x="5113020" y="1619250"/>
+            <a:ext cx="1965960" cy="1000125"/>
+          </a:xfrm>
+          <a:prstGeom xmlns:a="http://schemas.openxmlformats.org/drawingml/2006/main" prst="rect">
+            <a:avLst/>
+          </a:prstGeom>
+          <a:noFill xmlns:a="http://schemas.openxmlformats.org/drawingml/2006/main"/>
+          <a:ln xmlns:a="http://schemas.openxmlformats.org/drawingml/2006/main" w="0">
+            <a:noFill/>
+            <a:prstDash val="solid"/>
+          </a:ln>
+        </p:spPr>
+        <p:txBody>
+          <a:bodyPr xmlns:a="http://schemas.openxmlformats.org/drawingml/2006/main" lIns="0" tIns="0" rIns="0" bIns="0" anchor="ctr">
+            <a:normAutofit fontScale="100000"/>
+          </a:bodyPr>
+          <a:lstStyle xmlns:a="http://schemas.openxmlformats.org/drawingml/2006/main"/>
+          <a:p xmlns:a="http://schemas.openxmlformats.org/drawingml/2006/main">
+            <a:pPr algn="ctr">
+              <a:defRPr sz="3300" b="1">
+                <a:solidFill>
+                  <a:srgbClr val="AFC4D8"/>
+                </a:solidFill>
+                <a:latin typeface="Microsoft YaHei"/>
+                <a:ea typeface="Microsoft YaHei"/>
+                <a:cs typeface="Microsoft YaHei"/>
+              </a:defRPr>
+            </a:pPr>
+            <a:r>
+              <a:rPr sz="3300" b="1">
+                <a:solidFill>
+                  <a:srgbClr val="AFC4D8"/>
+                </a:solidFill>
+                <a:latin typeface="Microsoft YaHei"/>
+                <a:ea typeface="Microsoft YaHei"/>
+                <a:cs typeface="Microsoft YaHei"/>
+              </a:rPr>
+              <a:t>2026</a:t>
+            </a:r>
+          </a:p>
+        </p:txBody>
+      </p:sp>
+      <p:sp>
+        <p:nvSpPr>
+          <p:cNvPr id="20" name="">
+            <a:extLst xmlns:a="http://schemas.openxmlformats.org/drawingml/2006/main">
+              <a:ext uri="{FF2B5EF4-FFF2-40B4-BE49-F238E27FC236}">
+                <a16:creationId xmlns:a16="http://schemas.microsoft.com/office/drawing/2014/main" id="{F16003D1-E1F3-4641-9BC2-DA8B56FEC99F}"/>
+              </a:ext>
+            </a:extLst>
+          </p:cNvPr>
+          <p:cNvSpPr>
+            <a:spLocks xmlns:a="http://schemas.openxmlformats.org/drawingml/2006/main" noGrp="1"/>
+          </p:cNvSpPr>
+          <p:nvPr/>
+        </p:nvSpPr>
+        <p:spPr>
+          <a:xfrm xmlns:a="http://schemas.openxmlformats.org/drawingml/2006/main">
+            <a:off x="5113020" y="2724150"/>
+            <a:ext cx="1965960" cy="247650"/>
+          </a:xfrm>
+          <a:prstGeom xmlns:a="http://schemas.openxmlformats.org/drawingml/2006/main" prst="rect">
+            <a:avLst/>
+          </a:prstGeom>
+          <a:noFill xmlns:a="http://schemas.openxmlformats.org/drawingml/2006/main"/>
+          <a:ln xmlns:a="http://schemas.openxmlformats.org/drawingml/2006/main" w="0">
+            <a:noFill/>
+            <a:prstDash val="solid"/>
+          </a:ln>
+        </p:spPr>
+        <p:txBody>
+          <a:bodyPr xmlns:a="http://schemas.openxmlformats.org/drawingml/2006/main" lIns="0" tIns="0" rIns="0" bIns="0" anchor="ctr">
+            <a:normAutofit fontScale="100000"/>
+          </a:bodyPr>
+          <a:lstStyle xmlns:a="http://schemas.openxmlformats.org/drawingml/2006/main"/>
+          <a:p xmlns:a="http://schemas.openxmlformats.org/drawingml/2006/main">
+            <a:pPr algn="ctr">
+              <a:defRPr sz="1350" b="1">
+                <a:solidFill>
+                  <a:srgbClr val="7C8A9A"/>
+                </a:solidFill>
+                <a:latin typeface="Microsoft YaHei"/>
+                <a:ea typeface="Microsoft YaHei"/>
+                <a:cs typeface="Microsoft YaHei"/>
+              </a:defRPr>
+            </a:pPr>
+            <a:r>
+              <a:rPr sz="1350" b="1">
+                <a:solidFill>
+                  <a:srgbClr val="7C8A9A"/>
+                </a:solidFill>
+                <a:latin typeface="Microsoft YaHei"/>
+                <a:ea typeface="Microsoft YaHei"/>
+                <a:cs typeface="Microsoft YaHei"/>
+              </a:rPr>
+              <a:t>阶段 03</a:t>
+            </a:r>
+          </a:p>
+        </p:txBody>
+      </p:sp>
+      <p:sp>
+        <p:nvSpPr>
+          <p:cNvPr id="21" name="PPAGENT_QA|parent=timeline-node-2|domains=timeline-connection">
+            <a:extLst xmlns:a="http://schemas.openxmlformats.org/drawingml/2006/main">
+              <a:ext uri="{FF2B5EF4-FFF2-40B4-BE49-F238E27FC236}">
+                <a16:creationId xmlns:a16="http://schemas.microsoft.com/office/drawing/2014/main" id="{C47EA1CA-4097-4DC3-A63E-58F971B444BB}"/>
+              </a:ext>
+            </a:extLst>
+          </p:cNvPr>
+          <p:cNvSpPr>
+            <a:spLocks xmlns:a="http://schemas.openxmlformats.org/drawingml/2006/main" noGrp="1"/>
+          </p:cNvSpPr>
+          <p:nvPr/>
+        </p:nvSpPr>
+        <p:spPr>
+          <a:xfrm xmlns:a="http://schemas.openxmlformats.org/drawingml/2006/main">
+            <a:off x="5972175" y="3086100"/>
+            <a:ext cx="247650" cy="247650"/>
+          </a:xfrm>
+          <a:prstGeom xmlns:a="http://schemas.openxmlformats.org/drawingml/2006/main" prst="ellipse">
+            <a:avLst/>
+          </a:prstGeom>
+          <a:solidFill xmlns:a="http://schemas.openxmlformats.org/drawingml/2006/main">
+            <a:srgbClr val="1677C8"/>
+          </a:solidFill>
+          <a:ln xmlns:a="http://schemas.openxmlformats.org/drawingml/2006/main" w="28575">
+            <a:solidFill>
+              <a:srgbClr val="FFFFFF"/>
+            </a:solidFill>
+            <a:prstDash val="solid"/>
+          </a:ln>
+        </p:spPr>
+        <p:style>
+          <a:lnRef xmlns:a="http://schemas.openxmlformats.org/drawingml/2006/main" idx="0"/>
+          <a:fillRef xmlns:a="http://schemas.openxmlformats.org/drawingml/2006/main" idx="0"/>
+          <a:effectRef xmlns:a="http://schemas.openxmlformats.org/drawingml/2006/main" idx="4"/>
+          <a:fontRef xmlns:a="http://schemas.openxmlformats.org/drawingml/2006/main" idx="major"/>
+        </p:style>
+      </p:sp>
+      <p:sp>
+        <p:nvSpPr>
+          <p:cNvPr id="22" name="PPAGENT_QA|parent=timeline-title-2|domains=timeline-content">
+            <a:extLst xmlns:a="http://schemas.openxmlformats.org/drawingml/2006/main">
+              <a:ext uri="{FF2B5EF4-FFF2-40B4-BE49-F238E27FC236}">
+                <a16:creationId xmlns:a16="http://schemas.microsoft.com/office/drawing/2014/main" id="{6E4DAE56-7A4B-4383-A013-CB314D8F532B}"/>
+              </a:ext>
+            </a:extLst>
+          </p:cNvPr>
+          <p:cNvSpPr>
+            <a:spLocks xmlns:a="http://schemas.openxmlformats.org/drawingml/2006/main" noGrp="1"/>
+          </p:cNvSpPr>
+          <p:nvPr/>
+        </p:nvSpPr>
+        <p:spPr>
+          <a:xfrm xmlns:a="http://schemas.openxmlformats.org/drawingml/2006/main">
+            <a:off x="5113020" y="3581400"/>
+            <a:ext cx="1965960" cy="552450"/>
+          </a:xfrm>
+          <a:prstGeom xmlns:a="http://schemas.openxmlformats.org/drawingml/2006/main" prst="rect">
+            <a:avLst/>
+          </a:prstGeom>
+          <a:noFill xmlns:a="http://schemas.openxmlformats.org/drawingml/2006/main"/>
+          <a:ln xmlns:a="http://schemas.openxmlformats.org/drawingml/2006/main" w="0">
+            <a:noFill/>
+            <a:prstDash val="solid"/>
+          </a:ln>
+        </p:spPr>
+        <p:txBody>
+          <a:bodyPr xmlns:a="http://schemas.openxmlformats.org/drawingml/2006/main" lIns="0" tIns="0" rIns="0" bIns="0" anchor="ctr">
+            <a:normAutofit fontScale="100000"/>
+          </a:bodyPr>
+          <a:lstStyle xmlns:a="http://schemas.openxmlformats.org/drawingml/2006/main"/>
+          <a:p xmlns:a="http://schemas.openxmlformats.org/drawingml/2006/main">
+            <a:pPr algn="ctr">
+              <a:defRPr sz="1425" b="1">
+                <a:solidFill>
+                  <a:srgbClr val="1677C8"/>
+                </a:solidFill>
+                <a:latin typeface="Microsoft YaHei"/>
+                <a:ea typeface="Microsoft YaHei"/>
+                <a:cs typeface="Microsoft YaHei"/>
+              </a:defRPr>
+            </a:pPr>
+            <a:r>
+              <a:rPr sz="1425" b="1">
+                <a:solidFill>
+                  <a:srgbClr val="1677C8"/>
+                </a:solidFill>
+                <a:latin typeface="Microsoft YaHei"/>
+                <a:ea typeface="Microsoft YaHei"/>
+                <a:cs typeface="Microsoft YaHei"/>
+              </a:rPr>
+              <a:t>沉淀能力</a:t>
+            </a:r>
+          </a:p>
+        </p:txBody>
+      </p:sp>
+      <p:sp>
+        <p:nvSpPr>
+          <p:cNvPr id="23" name="PPAGENT_QA|parent=timeline-body-2|domains=timeline-content">
+            <a:extLst xmlns:a="http://schemas.openxmlformats.org/drawingml/2006/main">
+              <a:ext uri="{FF2B5EF4-FFF2-40B4-BE49-F238E27FC236}">
+                <a16:creationId xmlns:a16="http://schemas.microsoft.com/office/drawing/2014/main" id="{D7E9E844-77DD-41EA-89EE-7EBD1E93C0CD}"/>
+              </a:ext>
+            </a:extLst>
+          </p:cNvPr>
+          <p:cNvSpPr>
+            <a:spLocks xmlns:a="http://schemas.openxmlformats.org/drawingml/2006/main" noGrp="1"/>
+          </p:cNvSpPr>
+          <p:nvPr/>
+        </p:nvSpPr>
+        <p:spPr>
+          <a:xfrm xmlns:a="http://schemas.openxmlformats.org/drawingml/2006/main">
+            <a:off x="5151120" y="4210050"/>
+            <a:ext cx="1889760" cy="990600"/>
+          </a:xfrm>
+          <a:prstGeom xmlns:a="http://schemas.openxmlformats.org/drawingml/2006/main" prst="rect">
+            <a:avLst/>
+          </a:prstGeom>
+          <a:noFill xmlns:a="http://schemas.openxmlformats.org/drawingml/2006/main"/>
+          <a:ln xmlns:a="http://schemas.openxmlformats.org/drawingml/2006/main" w="0">
+            <a:noFill/>
+            <a:prstDash val="solid"/>
+          </a:ln>
+        </p:spPr>
+        <p:txBody>
+          <a:bodyPr xmlns:a="http://schemas.openxmlformats.org/drawingml/2006/main" lIns="0" tIns="0" rIns="0" bIns="0" anchor="t">
+            <a:normAutofit fontScale="100000"/>
+          </a:bodyPr>
+          <a:lstStyle xmlns:a="http://schemas.openxmlformats.org/drawingml/2006/main"/>
+          <a:p xmlns:a="http://schemas.openxmlformats.org/drawingml/2006/main">
+            <a:pPr algn="ctr">
+              <a:defRPr sz="1500" b="0">
+                <a:solidFill>
+                  <a:srgbClr val="475569"/>
+                </a:solidFill>
+                <a:latin typeface="Microsoft YaHei"/>
+                <a:ea typeface="Microsoft YaHei"/>
+                <a:cs typeface="Microsoft YaHei"/>
+              </a:defRPr>
+            </a:pPr>
+            <a:r>
+              <a:rPr sz="1500" b="0">
+                <a:solidFill>
+                  <a:srgbClr val="475569"/>
+                </a:solidFill>
+                <a:latin typeface="Microsoft YaHei"/>
+                <a:ea typeface="Microsoft YaHei"/>
+                <a:cs typeface="Microsoft YaHei"/>
+              </a:rPr>
+              <a:t>把经验整理</a:t>
+            </a:r>
+          </a:p>
+          <a:p xmlns:a="http://schemas.openxmlformats.org/drawingml/2006/main">
+            <a:pPr algn="ctr">
+              <a:defRPr sz="1500" b="0">
+                <a:solidFill>
+                  <a:srgbClr val="475569"/>
+                </a:solidFill>
+                <a:latin typeface="Microsoft YaHei"/>
+                <a:ea typeface="Microsoft YaHei"/>
+                <a:cs typeface="Microsoft YaHei"/>
+              </a:defRPr>
+            </a:pPr>
+            <a:r>
+              <a:rPr sz="1500" b="0">
+                <a:solidFill>
+                  <a:srgbClr val="475569"/>
+                </a:solidFill>
+                <a:latin typeface="Microsoft YaHei"/>
+                <a:ea typeface="Microsoft YaHei"/>
+                <a:cs typeface="Microsoft YaHei"/>
+              </a:rPr>
+              <a:t>为规则与资产</a:t>
+            </a:r>
+          </a:p>
+        </p:txBody>
+      </p:sp>
+      <p:sp>
+        <p:nvSpPr>
+          <p:cNvPr id="24" name="PPAGENT_QA|parent=timeline-bar-2|domains=timeline-shape">
+            <a:extLst xmlns:a="http://schemas.openxmlformats.org/drawingml/2006/main">
+              <a:ext uri="{FF2B5EF4-FFF2-40B4-BE49-F238E27FC236}">
+                <a16:creationId xmlns:a16="http://schemas.microsoft.com/office/drawing/2014/main" id="{CB3784C2-24A0-43AE-ADC8-4EA7EE64A6BE}"/>
+              </a:ext>
+            </a:extLst>
+          </p:cNvPr>
+          <p:cNvSpPr>
+            <a:spLocks xmlns:a="http://schemas.openxmlformats.org/drawingml/2006/main" noGrp="1"/>
+          </p:cNvSpPr>
+          <p:nvPr/>
+        </p:nvSpPr>
+        <p:spPr>
+          <a:xfrm xmlns:a="http://schemas.openxmlformats.org/drawingml/2006/main">
+            <a:off x="5867400" y="5391150"/>
+            <a:ext cx="457200" cy="47625"/>
+          </a:xfrm>
+          <a:prstGeom xmlns:a="http://schemas.openxmlformats.org/drawingml/2006/main" prst="roundRect">
+            <a:avLst>
+              <a:gd name="adj" fmla="val 50000"/>
+            </a:avLst>
+          </a:prstGeom>
+          <a:solidFill xmlns:a="http://schemas.openxmlformats.org/drawingml/2006/main">
+            <a:srgbClr val="DCEEFF"/>
+          </a:solidFill>
+          <a:ln xmlns:a="http://schemas.openxmlformats.org/drawingml/2006/main" w="0">
+            <a:noFill/>
+            <a:prstDash val="solid"/>
+          </a:ln>
+        </p:spPr>
+      </p:sp>
+      <p:sp>
+        <p:nvSpPr>
+          <p:cNvPr id="25" name="PPAGENT_QA|parent=timeline-period-3|domains=timeline-content">
+            <a:extLst xmlns:a="http://schemas.openxmlformats.org/drawingml/2006/main">
+              <a:ext uri="{FF2B5EF4-FFF2-40B4-BE49-F238E27FC236}">
+                <a16:creationId xmlns:a16="http://schemas.microsoft.com/office/drawing/2014/main" id="{B319278B-11BC-467F-A1A9-C458F89318F4}"/>
+              </a:ext>
+            </a:extLst>
+          </p:cNvPr>
+          <p:cNvSpPr>
+            <a:spLocks xmlns:a="http://schemas.openxmlformats.org/drawingml/2006/main" noGrp="1"/>
+          </p:cNvSpPr>
+          <p:nvPr/>
+        </p:nvSpPr>
+        <p:spPr>
+          <a:xfrm xmlns:a="http://schemas.openxmlformats.org/drawingml/2006/main">
+            <a:off x="7307580" y="1619250"/>
+            <a:ext cx="1965960" cy="1000125"/>
+          </a:xfrm>
+          <a:prstGeom xmlns:a="http://schemas.openxmlformats.org/drawingml/2006/main" prst="rect">
+            <a:avLst/>
+          </a:prstGeom>
+          <a:noFill xmlns:a="http://schemas.openxmlformats.org/drawingml/2006/main"/>
+          <a:ln xmlns:a="http://schemas.openxmlformats.org/drawingml/2006/main" w="0">
+            <a:noFill/>
+            <a:prstDash val="solid"/>
+          </a:ln>
+        </p:spPr>
+        <p:txBody>
+          <a:bodyPr xmlns:a="http://schemas.openxmlformats.org/drawingml/2006/main" lIns="0" tIns="0" rIns="0" bIns="0" anchor="ctr">
+            <a:normAutofit fontScale="100000"/>
+          </a:bodyPr>
+          <a:lstStyle xmlns:a="http://schemas.openxmlformats.org/drawingml/2006/main"/>
+          <a:p xmlns:a="http://schemas.openxmlformats.org/drawingml/2006/main">
+            <a:pPr algn="ctr">
+              <a:defRPr sz="3300" b="1">
+                <a:solidFill>
+                  <a:srgbClr val="AFC4D8"/>
+                </a:solidFill>
+                <a:latin typeface="Microsoft YaHei"/>
+                <a:ea typeface="Microsoft YaHei"/>
+                <a:cs typeface="Microsoft YaHei"/>
+              </a:defRPr>
+            </a:pPr>
+            <a:r>
+              <a:rPr sz="3300" b="1">
+                <a:solidFill>
+                  <a:srgbClr val="AFC4D8"/>
+                </a:solidFill>
+                <a:latin typeface="Microsoft YaHei"/>
+                <a:ea typeface="Microsoft YaHei"/>
+                <a:cs typeface="Microsoft YaHei"/>
+              </a:rPr>
+              <a:t>2027</a:t>
+            </a:r>
+          </a:p>
+        </p:txBody>
+      </p:sp>
+      <p:sp>
+        <p:nvSpPr>
+          <p:cNvPr id="26" name="">
+            <a:extLst xmlns:a="http://schemas.openxmlformats.org/drawingml/2006/main">
+              <a:ext uri="{FF2B5EF4-FFF2-40B4-BE49-F238E27FC236}">
+                <a16:creationId xmlns:a16="http://schemas.microsoft.com/office/drawing/2014/main" id="{9FCAC5DB-87C7-43D8-A6F9-B557520D66D5}"/>
+              </a:ext>
+            </a:extLst>
+          </p:cNvPr>
+          <p:cNvSpPr>
+            <a:spLocks xmlns:a="http://schemas.openxmlformats.org/drawingml/2006/main" noGrp="1"/>
+          </p:cNvSpPr>
+          <p:nvPr/>
+        </p:nvSpPr>
+        <p:spPr>
+          <a:xfrm xmlns:a="http://schemas.openxmlformats.org/drawingml/2006/main">
+            <a:off x="7307580" y="2724150"/>
+            <a:ext cx="1965960" cy="247650"/>
+          </a:xfrm>
+          <a:prstGeom xmlns:a="http://schemas.openxmlformats.org/drawingml/2006/main" prst="rect">
+            <a:avLst/>
+          </a:prstGeom>
+          <a:noFill xmlns:a="http://schemas.openxmlformats.org/drawingml/2006/main"/>
+          <a:ln xmlns:a="http://schemas.openxmlformats.org/drawingml/2006/main" w="0">
+            <a:noFill/>
+            <a:prstDash val="solid"/>
+          </a:ln>
+        </p:spPr>
+        <p:txBody>
+          <a:bodyPr xmlns:a="http://schemas.openxmlformats.org/drawingml/2006/main" lIns="0" tIns="0" rIns="0" bIns="0" anchor="ctr">
+            <a:normAutofit fontScale="100000"/>
+          </a:bodyPr>
+          <a:lstStyle xmlns:a="http://schemas.openxmlformats.org/drawingml/2006/main"/>
+          <a:p xmlns:a="http://schemas.openxmlformats.org/drawingml/2006/main">
+            <a:pPr algn="ctr">
+              <a:defRPr sz="1350" b="1">
+                <a:solidFill>
+                  <a:srgbClr val="7C8A9A"/>
+                </a:solidFill>
+                <a:latin typeface="Microsoft YaHei"/>
+                <a:ea typeface="Microsoft YaHei"/>
+                <a:cs typeface="Microsoft YaHei"/>
+              </a:defRPr>
+            </a:pPr>
+            <a:r>
+              <a:rPr sz="1350" b="1">
+                <a:solidFill>
+                  <a:srgbClr val="7C8A9A"/>
+                </a:solidFill>
+                <a:latin typeface="Microsoft YaHei"/>
+                <a:ea typeface="Microsoft YaHei"/>
+                <a:cs typeface="Microsoft YaHei"/>
+              </a:rPr>
+              <a:t>阶段 04</a:t>
+            </a:r>
+          </a:p>
+        </p:txBody>
+      </p:sp>
+      <p:sp>
+        <p:nvSpPr>
+          <p:cNvPr id="27" name="PPAGENT_QA|parent=timeline-node-3|domains=timeline-connection">
+            <a:extLst xmlns:a="http://schemas.openxmlformats.org/drawingml/2006/main">
+              <a:ext uri="{FF2B5EF4-FFF2-40B4-BE49-F238E27FC236}">
+                <a16:creationId xmlns:a16="http://schemas.microsoft.com/office/drawing/2014/main" id="{828F5EBD-81B8-4D48-8741-5CE541B4E732}"/>
+              </a:ext>
+            </a:extLst>
+          </p:cNvPr>
+          <p:cNvSpPr>
+            <a:spLocks xmlns:a="http://schemas.openxmlformats.org/drawingml/2006/main" noGrp="1"/>
+          </p:cNvSpPr>
+          <p:nvPr/>
+        </p:nvSpPr>
+        <p:spPr>
+          <a:xfrm xmlns:a="http://schemas.openxmlformats.org/drawingml/2006/main">
+            <a:off x="8166735" y="3086100"/>
+            <a:ext cx="247650" cy="247650"/>
+          </a:xfrm>
+          <a:prstGeom xmlns:a="http://schemas.openxmlformats.org/drawingml/2006/main" prst="ellipse">
+            <a:avLst/>
+          </a:prstGeom>
+          <a:solidFill xmlns:a="http://schemas.openxmlformats.org/drawingml/2006/main">
+            <a:srgbClr val="1677C8"/>
+          </a:solidFill>
+          <a:ln xmlns:a="http://schemas.openxmlformats.org/drawingml/2006/main" w="28575">
+            <a:solidFill>
+              <a:srgbClr val="FFFFFF"/>
+            </a:solidFill>
+            <a:prstDash val="solid"/>
+          </a:ln>
+        </p:spPr>
+        <p:style>
+          <a:lnRef xmlns:a="http://schemas.openxmlformats.org/drawingml/2006/main" idx="0"/>
+          <a:fillRef xmlns:a="http://schemas.openxmlformats.org/drawingml/2006/main" idx="0"/>
+          <a:effectRef xmlns:a="http://schemas.openxmlformats.org/drawingml/2006/main" idx="4"/>
+          <a:fontRef xmlns:a="http://schemas.openxmlformats.org/drawingml/2006/main" idx="major"/>
+        </p:style>
+      </p:sp>
+      <p:sp>
+        <p:nvSpPr>
+          <p:cNvPr id="28" name="PPAGENT_QA|parent=timeline-title-3|domains=timeline-content">
+            <a:extLst xmlns:a="http://schemas.openxmlformats.org/drawingml/2006/main">
+              <a:ext uri="{FF2B5EF4-FFF2-40B4-BE49-F238E27FC236}">
+                <a16:creationId xmlns:a16="http://schemas.microsoft.com/office/drawing/2014/main" id="{72BB8027-F2FC-48AC-B874-06D735CCC24B}"/>
+              </a:ext>
+            </a:extLst>
+          </p:cNvPr>
+          <p:cNvSpPr>
+            <a:spLocks xmlns:a="http://schemas.openxmlformats.org/drawingml/2006/main" noGrp="1"/>
+          </p:cNvSpPr>
+          <p:nvPr/>
+        </p:nvSpPr>
+        <p:spPr>
+          <a:xfrm xmlns:a="http://schemas.openxmlformats.org/drawingml/2006/main">
+            <a:off x="7307580" y="3581400"/>
+            <a:ext cx="1965960" cy="552450"/>
+          </a:xfrm>
+          <a:prstGeom xmlns:a="http://schemas.openxmlformats.org/drawingml/2006/main" prst="rect">
+            <a:avLst/>
+          </a:prstGeom>
+          <a:noFill xmlns:a="http://schemas.openxmlformats.org/drawingml/2006/main"/>
+          <a:ln xmlns:a="http://schemas.openxmlformats.org/drawingml/2006/main" w="0">
+            <a:noFill/>
+            <a:prstDash val="solid"/>
+          </a:ln>
+        </p:spPr>
+        <p:txBody>
+          <a:bodyPr xmlns:a="http://schemas.openxmlformats.org/drawingml/2006/main" lIns="0" tIns="0" rIns="0" bIns="0" anchor="ctr">
+            <a:normAutofit fontScale="100000"/>
+          </a:bodyPr>
+          <a:lstStyle xmlns:a="http://schemas.openxmlformats.org/drawingml/2006/main"/>
+          <a:p xmlns:a="http://schemas.openxmlformats.org/drawingml/2006/main">
+            <a:pPr algn="ctr">
+              <a:defRPr sz="1425" b="1">
+                <a:solidFill>
+                  <a:srgbClr val="1677C8"/>
+                </a:solidFill>
+                <a:latin typeface="Microsoft YaHei"/>
+                <a:ea typeface="Microsoft YaHei"/>
+                <a:cs typeface="Microsoft YaHei"/>
+              </a:defRPr>
+            </a:pPr>
+            <a:r>
+              <a:rPr sz="1425" b="1">
+                <a:solidFill>
+                  <a:srgbClr val="1677C8"/>
+                </a:solidFill>
+                <a:latin typeface="Microsoft YaHei"/>
+                <a:ea typeface="Microsoft YaHei"/>
+                <a:cs typeface="Microsoft YaHei"/>
+              </a:rPr>
+              <a:t>扩展场景</a:t>
+            </a:r>
+          </a:p>
+        </p:txBody>
+      </p:sp>
+      <p:sp>
+        <p:nvSpPr>
+          <p:cNvPr id="29" name="PPAGENT_QA|parent=timeline-body-3|domains=timeline-content">
+            <a:extLst xmlns:a="http://schemas.openxmlformats.org/drawingml/2006/main">
+              <a:ext uri="{FF2B5EF4-FFF2-40B4-BE49-F238E27FC236}">
+                <a16:creationId xmlns:a16="http://schemas.microsoft.com/office/drawing/2014/main" id="{372D3FEA-3CE0-4BB3-9F9D-9A2EB90144CC}"/>
+              </a:ext>
+            </a:extLst>
+          </p:cNvPr>
+          <p:cNvSpPr>
+            <a:spLocks xmlns:a="http://schemas.openxmlformats.org/drawingml/2006/main" noGrp="1"/>
+          </p:cNvSpPr>
+          <p:nvPr/>
+        </p:nvSpPr>
+        <p:spPr>
+          <a:xfrm xmlns:a="http://schemas.openxmlformats.org/drawingml/2006/main">
+            <a:off x="7345680" y="4210050"/>
+            <a:ext cx="1889760" cy="990600"/>
+          </a:xfrm>
+          <a:prstGeom xmlns:a="http://schemas.openxmlformats.org/drawingml/2006/main" prst="rect">
+            <a:avLst/>
+          </a:prstGeom>
+          <a:noFill xmlns:a="http://schemas.openxmlformats.org/drawingml/2006/main"/>
+          <a:ln xmlns:a="http://schemas.openxmlformats.org/drawingml/2006/main" w="0">
+            <a:noFill/>
+            <a:prstDash val="solid"/>
+          </a:ln>
+        </p:spPr>
+        <p:txBody>
+          <a:bodyPr xmlns:a="http://schemas.openxmlformats.org/drawingml/2006/main" lIns="0" tIns="0" rIns="0" bIns="0" anchor="t">
+            <a:normAutofit fontScale="100000"/>
+          </a:bodyPr>
+          <a:lstStyle xmlns:a="http://schemas.openxmlformats.org/drawingml/2006/main"/>
+          <a:p xmlns:a="http://schemas.openxmlformats.org/drawingml/2006/main">
+            <a:pPr algn="ctr">
+              <a:defRPr sz="1500" b="0">
+                <a:solidFill>
+                  <a:srgbClr val="475569"/>
+                </a:solidFill>
+                <a:latin typeface="Microsoft YaHei"/>
+                <a:ea typeface="Microsoft YaHei"/>
+                <a:cs typeface="Microsoft YaHei"/>
+              </a:defRPr>
+            </a:pPr>
+            <a:r>
+              <a:rPr sz="1500" b="0">
+                <a:solidFill>
+                  <a:srgbClr val="475569"/>
+                </a:solidFill>
+                <a:latin typeface="Microsoft YaHei"/>
+                <a:ea typeface="Microsoft YaHei"/>
+                <a:cs typeface="Microsoft YaHei"/>
+              </a:rPr>
+              <a:t>适配更多组织和用途</a:t>
+            </a:r>
+          </a:p>
+        </p:txBody>
+      </p:sp>
+      <p:sp>
+        <p:nvSpPr>
+          <p:cNvPr id="30" name="PPAGENT_QA|parent=timeline-bar-3|domains=timeline-shape">
+            <a:extLst xmlns:a="http://schemas.openxmlformats.org/drawingml/2006/main">
+              <a:ext uri="{FF2B5EF4-FFF2-40B4-BE49-F238E27FC236}">
+                <a16:creationId xmlns:a16="http://schemas.microsoft.com/office/drawing/2014/main" id="{6BD2BC3F-CC85-43C3-986C-8C94BCE9D39D}"/>
+              </a:ext>
+            </a:extLst>
+          </p:cNvPr>
+          <p:cNvSpPr>
+            <a:spLocks xmlns:a="http://schemas.openxmlformats.org/drawingml/2006/main" noGrp="1"/>
+          </p:cNvSpPr>
+          <p:nvPr/>
+        </p:nvSpPr>
+        <p:spPr>
+          <a:xfrm xmlns:a="http://schemas.openxmlformats.org/drawingml/2006/main">
+            <a:off x="8061960" y="5391150"/>
+            <a:ext cx="457200" cy="47625"/>
+          </a:xfrm>
+          <a:prstGeom xmlns:a="http://schemas.openxmlformats.org/drawingml/2006/main" prst="roundRect">
+            <a:avLst>
+              <a:gd name="adj" fmla="val 50000"/>
+            </a:avLst>
+          </a:prstGeom>
+          <a:solidFill xmlns:a="http://schemas.openxmlformats.org/drawingml/2006/main">
+            <a:srgbClr val="DCEEFF"/>
+          </a:solidFill>
+          <a:ln xmlns:a="http://schemas.openxmlformats.org/drawingml/2006/main" w="0">
+            <a:noFill/>
+            <a:prstDash val="solid"/>
+          </a:ln>
+        </p:spPr>
+      </p:sp>
+      <p:sp>
+        <p:nvSpPr>
+          <p:cNvPr id="31" name="PPAGENT_QA|parent=timeline-period-4|domains=timeline-content">
+            <a:extLst xmlns:a="http://schemas.openxmlformats.org/drawingml/2006/main">
+              <a:ext uri="{FF2B5EF4-FFF2-40B4-BE49-F238E27FC236}">
+                <a16:creationId xmlns:a16="http://schemas.microsoft.com/office/drawing/2014/main" id="{DF628896-944A-4DEA-950C-01C902A5400E}"/>
+              </a:ext>
+            </a:extLst>
+          </p:cNvPr>
+          <p:cNvSpPr>
+            <a:spLocks xmlns:a="http://schemas.openxmlformats.org/drawingml/2006/main" noGrp="1"/>
+          </p:cNvSpPr>
+          <p:nvPr/>
+        </p:nvSpPr>
+        <p:spPr>
+          <a:xfrm xmlns:a="http://schemas.openxmlformats.org/drawingml/2006/main">
+            <a:off x="9502140" y="1619250"/>
+            <a:ext cx="1965960" cy="1000125"/>
+          </a:xfrm>
+          <a:prstGeom xmlns:a="http://schemas.openxmlformats.org/drawingml/2006/main" prst="rect">
+            <a:avLst/>
+          </a:prstGeom>
+          <a:noFill xmlns:a="http://schemas.openxmlformats.org/drawingml/2006/main"/>
+          <a:ln xmlns:a="http://schemas.openxmlformats.org/drawingml/2006/main" w="0">
+            <a:noFill/>
+            <a:prstDash val="solid"/>
+          </a:ln>
+        </p:spPr>
+        <p:txBody>
+          <a:bodyPr xmlns:a="http://schemas.openxmlformats.org/drawingml/2006/main" lIns="0" tIns="0" rIns="0" bIns="0" anchor="ctr">
+            <a:normAutofit fontScale="100000"/>
+          </a:bodyPr>
+          <a:lstStyle xmlns:a="http://schemas.openxmlformats.org/drawingml/2006/main"/>
+          <a:p xmlns:a="http://schemas.openxmlformats.org/drawingml/2006/main">
+            <a:pPr algn="ctr">
+              <a:defRPr sz="3300" b="1">
+                <a:solidFill>
+                  <a:srgbClr val="1677C8"/>
+                </a:solidFill>
+                <a:latin typeface="Microsoft YaHei"/>
+                <a:ea typeface="Microsoft YaHei"/>
+                <a:cs typeface="Microsoft YaHei"/>
+              </a:defRPr>
+            </a:pPr>
+            <a:r>
+              <a:rPr sz="3300" b="1">
+                <a:solidFill>
+                  <a:srgbClr val="1677C8"/>
+                </a:solidFill>
+                <a:latin typeface="Microsoft YaHei"/>
+                <a:ea typeface="Microsoft YaHei"/>
+                <a:cs typeface="Microsoft YaHei"/>
+              </a:rPr>
+              <a:t>2028</a:t>
+            </a:r>
+          </a:p>
+        </p:txBody>
+      </p:sp>
+      <p:sp>
+        <p:nvSpPr>
+          <p:cNvPr id="32" name="">
+            <a:extLst xmlns:a="http://schemas.openxmlformats.org/drawingml/2006/main">
+              <a:ext uri="{FF2B5EF4-FFF2-40B4-BE49-F238E27FC236}">
+                <a16:creationId xmlns:a16="http://schemas.microsoft.com/office/drawing/2014/main" id="{D778D91B-287A-4EDB-B4B0-1E45895D94BF}"/>
+              </a:ext>
+            </a:extLst>
+          </p:cNvPr>
+          <p:cNvSpPr>
+            <a:spLocks xmlns:a="http://schemas.openxmlformats.org/drawingml/2006/main" noGrp="1"/>
+          </p:cNvSpPr>
+          <p:nvPr/>
+        </p:nvSpPr>
+        <p:spPr>
+          <a:xfrm xmlns:a="http://schemas.openxmlformats.org/drawingml/2006/main">
+            <a:off x="9502140" y="2724150"/>
+            <a:ext cx="1965960" cy="247650"/>
+          </a:xfrm>
+          <a:prstGeom xmlns:a="http://schemas.openxmlformats.org/drawingml/2006/main" prst="rect">
+            <a:avLst/>
+          </a:prstGeom>
+          <a:noFill xmlns:a="http://schemas.openxmlformats.org/drawingml/2006/main"/>
+          <a:ln xmlns:a="http://schemas.openxmlformats.org/drawingml/2006/main" w="0">
+            <a:noFill/>
+            <a:prstDash val="solid"/>
+          </a:ln>
+        </p:spPr>
+        <p:txBody>
+          <a:bodyPr xmlns:a="http://schemas.openxmlformats.org/drawingml/2006/main" lIns="0" tIns="0" rIns="0" bIns="0" anchor="ctr">
+            <a:normAutofit fontScale="100000"/>
+          </a:bodyPr>
+          <a:lstStyle xmlns:a="http://schemas.openxmlformats.org/drawingml/2006/main"/>
+          <a:p xmlns:a="http://schemas.openxmlformats.org/drawingml/2006/main">
+            <a:pPr algn="ctr">
+              <a:defRPr sz="1350" b="1">
+                <a:solidFill>
+                  <a:srgbClr val="00A8D8"/>
+                </a:solidFill>
+                <a:latin typeface="Microsoft YaHei"/>
+                <a:ea typeface="Microsoft YaHei"/>
+                <a:cs typeface="Microsoft YaHei"/>
+              </a:defRPr>
+            </a:pPr>
+            <a:r>
+              <a:rPr sz="1350" b="1">
+                <a:solidFill>
+                  <a:srgbClr val="00A8D8"/>
+                </a:solidFill>
+                <a:latin typeface="Microsoft YaHei"/>
+                <a:ea typeface="Microsoft YaHei"/>
+                <a:cs typeface="Microsoft YaHei"/>
+              </a:rPr>
+              <a:t>阶段 05</a:t>
+            </a:r>
+          </a:p>
+        </p:txBody>
+      </p:sp>
+      <p:sp>
+        <p:nvSpPr>
+          <p:cNvPr id="33" name="PPAGENT_QA|parent=timeline-node-4|domains=timeline-connection">
+            <a:extLst xmlns:a="http://schemas.openxmlformats.org/drawingml/2006/main">
+              <a:ext uri="{FF2B5EF4-FFF2-40B4-BE49-F238E27FC236}">
+                <a16:creationId xmlns:a16="http://schemas.microsoft.com/office/drawing/2014/main" id="{8399ADD2-00F0-4794-A437-B0B440B9BB48}"/>
+              </a:ext>
+            </a:extLst>
+          </p:cNvPr>
+          <p:cNvSpPr>
+            <a:spLocks xmlns:a="http://schemas.openxmlformats.org/drawingml/2006/main" noGrp="1"/>
+          </p:cNvSpPr>
+          <p:nvPr/>
+        </p:nvSpPr>
+        <p:spPr>
+          <a:xfrm xmlns:a="http://schemas.openxmlformats.org/drawingml/2006/main">
+            <a:off x="10361295" y="3086100"/>
+            <a:ext cx="247650" cy="247650"/>
+          </a:xfrm>
+          <a:prstGeom xmlns:a="http://schemas.openxmlformats.org/drawingml/2006/main" prst="ellipse">
+            <a:avLst/>
+          </a:prstGeom>
+          <a:solidFill xmlns:a="http://schemas.openxmlformats.org/drawingml/2006/main">
+            <a:srgbClr val="14CBD1"/>
+          </a:solidFill>
+          <a:ln xmlns:a="http://schemas.openxmlformats.org/drawingml/2006/main" w="28575">
+            <a:solidFill>
+              <a:srgbClr val="FFFFFF"/>
+            </a:solidFill>
+            <a:prstDash val="solid"/>
+          </a:ln>
+        </p:spPr>
+        <p:style>
+          <a:lnRef xmlns:a="http://schemas.openxmlformats.org/drawingml/2006/main" idx="0"/>
+          <a:fillRef xmlns:a="http://schemas.openxmlformats.org/drawingml/2006/main" idx="0"/>
+          <a:effectRef xmlns:a="http://schemas.openxmlformats.org/drawingml/2006/main" idx="4"/>
+          <a:fontRef xmlns:a="http://schemas.openxmlformats.org/drawingml/2006/main" idx="major"/>
+        </p:style>
+      </p:sp>
+      <p:sp>
+        <p:nvSpPr>
+          <p:cNvPr id="34" name="PPAGENT_QA|parent=timeline-title-4|domains=timeline-content">
+            <a:extLst xmlns:a="http://schemas.openxmlformats.org/drawingml/2006/main">
+              <a:ext uri="{FF2B5EF4-FFF2-40B4-BE49-F238E27FC236}">
+                <a16:creationId xmlns:a16="http://schemas.microsoft.com/office/drawing/2014/main" id="{F45E1266-A411-41F4-8415-649D2323781D}"/>
+              </a:ext>
+            </a:extLst>
+          </p:cNvPr>
+          <p:cNvSpPr>
+            <a:spLocks xmlns:a="http://schemas.openxmlformats.org/drawingml/2006/main" noGrp="1"/>
+          </p:cNvSpPr>
+          <p:nvPr/>
+        </p:nvSpPr>
+        <p:spPr>
+          <a:xfrm xmlns:a="http://schemas.openxmlformats.org/drawingml/2006/main">
+            <a:off x="9502140" y="3581400"/>
+            <a:ext cx="1965960" cy="552450"/>
+          </a:xfrm>
+          <a:prstGeom xmlns:a="http://schemas.openxmlformats.org/drawingml/2006/main" prst="rect">
+            <a:avLst/>
+          </a:prstGeom>
+          <a:noFill xmlns:a="http://schemas.openxmlformats.org/drawingml/2006/main"/>
+          <a:ln xmlns:a="http://schemas.openxmlformats.org/drawingml/2006/main" w="0">
+            <a:noFill/>
+            <a:prstDash val="solid"/>
+          </a:ln>
+        </p:spPr>
+        <p:txBody>
+          <a:bodyPr xmlns:a="http://schemas.openxmlformats.org/drawingml/2006/main" lIns="0" tIns="0" rIns="0" bIns="0" anchor="ctr">
+            <a:normAutofit fontScale="100000"/>
+          </a:bodyPr>
+          <a:lstStyle xmlns:a="http://schemas.openxmlformats.org/drawingml/2006/main"/>
+          <a:p xmlns:a="http://schemas.openxmlformats.org/drawingml/2006/main">
+            <a:pPr algn="ctr">
+              <a:defRPr sz="1425" b="1">
+                <a:solidFill>
+                  <a:srgbClr val="1677C8"/>
+                </a:solidFill>
+                <a:latin typeface="Microsoft YaHei"/>
+                <a:ea typeface="Microsoft YaHei"/>
+                <a:cs typeface="Microsoft YaHei"/>
+              </a:defRPr>
+            </a:pPr>
+            <a:r>
+              <a:rPr sz="1425" b="1">
+                <a:solidFill>
+                  <a:srgbClr val="1677C8"/>
+                </a:solidFill>
+                <a:latin typeface="Microsoft YaHei"/>
+                <a:ea typeface="Microsoft YaHei"/>
+                <a:cs typeface="Microsoft YaHei"/>
+              </a:rPr>
+              <a:t>形成系统</a:t>
+            </a:r>
+          </a:p>
+        </p:txBody>
+      </p:sp>
+      <p:sp>
+        <p:nvSpPr>
+          <p:cNvPr id="35" name="PPAGENT_QA|parent=timeline-body-4|domains=timeline-content">
+            <a:extLst xmlns:a="http://schemas.openxmlformats.org/drawingml/2006/main">
+              <a:ext uri="{FF2B5EF4-FFF2-40B4-BE49-F238E27FC236}">
+                <a16:creationId xmlns:a16="http://schemas.microsoft.com/office/drawing/2014/main" id="{7C032C2A-828B-431F-A896-7181803E801B}"/>
+              </a:ext>
+            </a:extLst>
+          </p:cNvPr>
+          <p:cNvSpPr>
+            <a:spLocks xmlns:a="http://schemas.openxmlformats.org/drawingml/2006/main" noGrp="1"/>
+          </p:cNvSpPr>
+          <p:nvPr/>
+        </p:nvSpPr>
+        <p:spPr>
+          <a:xfrm xmlns:a="http://schemas.openxmlformats.org/drawingml/2006/main">
+            <a:off x="9540240" y="4210050"/>
+            <a:ext cx="1889760" cy="990600"/>
+          </a:xfrm>
+          <a:prstGeom xmlns:a="http://schemas.openxmlformats.org/drawingml/2006/main" prst="rect">
+            <a:avLst/>
+          </a:prstGeom>
+          <a:noFill xmlns:a="http://schemas.openxmlformats.org/drawingml/2006/main"/>
+          <a:ln xmlns:a="http://schemas.openxmlformats.org/drawingml/2006/main" w="0">
+            <a:noFill/>
+            <a:prstDash val="solid"/>
+          </a:ln>
+        </p:spPr>
+        <p:txBody>
+          <a:bodyPr xmlns:a="http://schemas.openxmlformats.org/drawingml/2006/main" lIns="0" tIns="0" rIns="0" bIns="0" anchor="t">
+            <a:normAutofit fontScale="100000"/>
+          </a:bodyPr>
+          <a:lstStyle xmlns:a="http://schemas.openxmlformats.org/drawingml/2006/main"/>
+          <a:p xmlns:a="http://schemas.openxmlformats.org/drawingml/2006/main">
+            <a:pPr algn="ctr">
+              <a:defRPr sz="1500" b="0">
+                <a:solidFill>
+                  <a:srgbClr val="475569"/>
+                </a:solidFill>
+                <a:latin typeface="Microsoft YaHei"/>
+                <a:ea typeface="Microsoft YaHei"/>
+                <a:cs typeface="Microsoft YaHei"/>
+              </a:defRPr>
+            </a:pPr>
+            <a:r>
+              <a:rPr sz="1500" b="0">
+                <a:solidFill>
+                  <a:srgbClr val="475569"/>
+                </a:solidFill>
+                <a:latin typeface="Microsoft YaHei"/>
+                <a:ea typeface="Microsoft YaHei"/>
+                <a:cs typeface="Microsoft YaHei"/>
+              </a:rPr>
+              <a:t>让生成与可靠</a:t>
+            </a:r>
+          </a:p>
+          <a:p xmlns:a="http://schemas.openxmlformats.org/drawingml/2006/main">
+            <a:pPr algn="ctr">
+              <a:defRPr sz="1500" b="0">
+                <a:solidFill>
+                  <a:srgbClr val="475569"/>
+                </a:solidFill>
+                <a:latin typeface="Microsoft YaHei"/>
+                <a:ea typeface="Microsoft YaHei"/>
+                <a:cs typeface="Microsoft YaHei"/>
+              </a:defRPr>
+            </a:pPr>
+            <a:r>
+              <a:rPr sz="1500" b="0">
+                <a:solidFill>
+                  <a:srgbClr val="475569"/>
+                </a:solidFill>
+                <a:latin typeface="Microsoft YaHei"/>
+                <a:ea typeface="Microsoft YaHei"/>
+                <a:cs typeface="Microsoft YaHei"/>
+              </a:rPr>
+              <a:t>交付形成链路</a:t>
+            </a:r>
+          </a:p>
+        </p:txBody>
+      </p:sp>
+      <p:sp>
+        <p:nvSpPr>
+          <p:cNvPr id="36" name="PPAGENT_QA|parent=timeline-bar-4|domains=timeline-shape">
+            <a:extLst xmlns:a="http://schemas.openxmlformats.org/drawingml/2006/main">
+              <a:ext uri="{FF2B5EF4-FFF2-40B4-BE49-F238E27FC236}">
+                <a16:creationId xmlns:a16="http://schemas.microsoft.com/office/drawing/2014/main" id="{597ACE33-66A5-4710-B022-116832516681}"/>
+              </a:ext>
+            </a:extLst>
+          </p:cNvPr>
+          <p:cNvSpPr>
+            <a:spLocks xmlns:a="http://schemas.openxmlformats.org/drawingml/2006/main" noGrp="1"/>
+          </p:cNvSpPr>
+          <p:nvPr/>
+        </p:nvSpPr>
+        <p:spPr>
+          <a:xfrm xmlns:a="http://schemas.openxmlformats.org/drawingml/2006/main">
+            <a:off x="10256520" y="5391150"/>
+            <a:ext cx="457200" cy="47625"/>
+          </a:xfrm>
+          <a:prstGeom xmlns:a="http://schemas.openxmlformats.org/drawingml/2006/main" prst="roundRect">
+            <a:avLst>
+              <a:gd name="adj" fmla="val 50000"/>
+            </a:avLst>
+          </a:prstGeom>
+          <a:solidFill xmlns:a="http://schemas.openxmlformats.org/drawingml/2006/main">
+            <a:srgbClr val="14CBD1"/>
+          </a:solidFill>
+          <a:ln xmlns:a="http://schemas.openxmlformats.org/drawingml/2006/main" w="0">
+            <a:noFill/>
+            <a:prstDash val="solid"/>
+          </a:ln>
+        </p:spPr>
+      </p:sp>
+    </p:spTree>
+    <p:extLst>
+      <p:ext uri="{BB962C8B-B14F-4D97-AF65-F5344CB8AC3E}">
+        <p14:creationId xmlns:p14="http://schemas.microsoft.com/office/powerpoint/2010/main" val="895253037"/>
+      </p:ext>
+    </p:extLst>
+  </p:cSld>
+</p:sld>
+</file>
+
+<file path=ppt/slides/slide4.xml><?xml version="1.0" encoding="utf-8"?>
+<p:sld xmlns:p="http://schemas.openxmlformats.org/presentationml/2006/main">
+  <p:cSld>
+    <p:bg>
+      <p:bgPr>
+        <a:solidFill xmlns:a="http://schemas.openxmlformats.org/drawingml/2006/main">
+          <a:srgbClr val="F7FAFC"/>
+        </a:solidFill>
+      </p:bgPr>
+    </p:bg>
+    <p:spTree>
+      <p:nvGrpSpPr>
+        <p:cNvPr id="1" name=""/>
+        <p:cNvGrpSpPr/>
+        <p:nvPr/>
+      </p:nvGrpSpPr>
+      <p:grpSpPr>
+        <a:xfrm xmlns:a="http://schemas.openxmlformats.org/drawingml/2006/main"/>
+      </p:grpSpPr>
+      <p:sp>
+        <p:nvSpPr>
+          <p:cNvPr id="43" name="">
+            <a:extLst xmlns:a="http://schemas.openxmlformats.org/drawingml/2006/main">
+              <a:ext uri="{FF2B5EF4-FFF2-40B4-BE49-F238E27FC236}">
+                <a16:creationId xmlns:a16="http://schemas.microsoft.com/office/drawing/2014/main" id="{D3C6A040-2025-4659-9F08-DA73AE4FC17C}"/>
+              </a:ext>
+            </a:extLst>
+          </p:cNvPr>
+          <p:cNvSpPr>
+            <a:spLocks xmlns:a="http://schemas.openxmlformats.org/drawingml/2006/main" noGrp="1"/>
+          </p:cNvSpPr>
+          <p:nvPr/>
+        </p:nvSpPr>
+        <p:spPr>
+          <a:xfrm xmlns:a="http://schemas.openxmlformats.org/drawingml/2006/main">
+            <a:off x="685800" y="400050"/>
+            <a:ext cx="8382000" cy="457200"/>
+          </a:xfrm>
+          <a:prstGeom xmlns:a="http://schemas.openxmlformats.org/drawingml/2006/main" prst="rect">
+            <a:avLst/>
+          </a:prstGeom>
+          <a:noFill xmlns:a="http://schemas.openxmlformats.org/drawingml/2006/main"/>
+          <a:ln xmlns:a="http://schemas.openxmlformats.org/drawingml/2006/main" w="0">
+            <a:noFill/>
+            <a:prstDash val="solid"/>
+          </a:ln>
+        </p:spPr>
+        <p:txBody>
+          <a:bodyPr xmlns:a="http://schemas.openxmlformats.org/drawingml/2006/main" lIns="0" tIns="0" rIns="0" bIns="0" anchor="ctr">
+            <a:normAutofit fontScale="100000"/>
+          </a:bodyPr>
+          <a:lstStyle xmlns:a="http://schemas.openxmlformats.org/drawingml/2006/main"/>
+          <a:p xmlns:a="http://schemas.openxmlformats.org/drawingml/2006/main">
+            <a:pPr algn="l">
+              <a:defRPr sz="2700" b="1">
+                <a:solidFill>
+                  <a:srgbClr val="1677C8"/>
+                </a:solidFill>
+                <a:latin typeface="Microsoft YaHei"/>
+                <a:ea typeface="Microsoft YaHei"/>
+                <a:cs typeface="Microsoft YaHei"/>
+              </a:defRPr>
+            </a:pPr>
+            <a:r>
+              <a:rPr sz="2700" b="1">
+                <a:solidFill>
+                  <a:srgbClr val="1677C8"/>
+                </a:solidFill>
+                <a:latin typeface="Microsoft YaHei"/>
+                <a:ea typeface="Microsoft YaHei"/>
+                <a:cs typeface="Microsoft YaHei"/>
+              </a:rPr>
+              <a:t>发展历程</a:t>
+            </a:r>
+          </a:p>
+        </p:txBody>
+      </p:sp>
+      <p:sp>
+        <p:nvSpPr>
+          <p:cNvPr id="2" name="">
+            <a:extLst xmlns:a="http://schemas.openxmlformats.org/drawingml/2006/main">
+              <a:ext uri="{FF2B5EF4-FFF2-40B4-BE49-F238E27FC236}">
+                <a16:creationId xmlns:a16="http://schemas.microsoft.com/office/drawing/2014/main" id="{020186E4-0829-4E60-AF7F-9874F96A871B}"/>
+              </a:ext>
+            </a:extLst>
+          </p:cNvPr>
+          <p:cNvSpPr>
+            <a:spLocks xmlns:a="http://schemas.openxmlformats.org/drawingml/2006/main" noGrp="1"/>
+          </p:cNvSpPr>
+          <p:nvPr/>
+        </p:nvSpPr>
+        <p:spPr>
+          <a:xfrm xmlns:a="http://schemas.openxmlformats.org/drawingml/2006/main">
+            <a:off x="704850" y="876300"/>
+            <a:ext cx="4953000" cy="247650"/>
+          </a:xfrm>
+          <a:prstGeom xmlns:a="http://schemas.openxmlformats.org/drawingml/2006/main" prst="rect">
+            <a:avLst/>
+          </a:prstGeom>
+          <a:noFill xmlns:a="http://schemas.openxmlformats.org/drawingml/2006/main"/>
+          <a:ln xmlns:a="http://schemas.openxmlformats.org/drawingml/2006/main" w="0">
+            <a:noFill/>
+            <a:prstDash val="solid"/>
+          </a:ln>
+        </p:spPr>
+        <p:txBody>
+          <a:bodyPr xmlns:a="http://schemas.openxmlformats.org/drawingml/2006/main" lIns="0" tIns="0" rIns="0" bIns="0" anchor="ctr">
+            <a:normAutofit fontScale="100000"/>
+          </a:bodyPr>
+          <a:lstStyle xmlns:a="http://schemas.openxmlformats.org/drawingml/2006/main"/>
+          <a:p xmlns:a="http://schemas.openxmlformats.org/drawingml/2006/main">
+            <a:pPr algn="l">
+              <a:defRPr sz="1200" b="0">
+                <a:solidFill>
+                  <a:srgbClr val="7C8A9A"/>
+                </a:solidFill>
+                <a:latin typeface="Microsoft YaHei"/>
+                <a:ea typeface="Microsoft YaHei"/>
+                <a:cs typeface="Microsoft YaHei"/>
+              </a:defRPr>
+            </a:pPr>
+            <a:r>
+              <a:rPr sz="1200" b="0">
+                <a:solidFill>
+                  <a:srgbClr val="7C8A9A"/>
+                </a:solidFill>
+                <a:latin typeface="Microsoft YaHei"/>
+                <a:ea typeface="Microsoft YaHei"/>
+                <a:cs typeface="Microsoft YaHei"/>
+              </a:rPr>
+              <a:t>阶段节点 · 发展历程</a:t>
+            </a:r>
+          </a:p>
+        </p:txBody>
+      </p:sp>
+      <p:sp>
+        <p:nvSpPr>
+          <p:cNvPr id="3" name="">
+            <a:extLst xmlns:a="http://schemas.openxmlformats.org/drawingml/2006/main">
+              <a:ext uri="{FF2B5EF4-FFF2-40B4-BE49-F238E27FC236}">
+                <a16:creationId xmlns:a16="http://schemas.microsoft.com/office/drawing/2014/main" id="{8FCB13F9-B3A5-47D3-8A20-B56D9F51C6E8}"/>
+              </a:ext>
+            </a:extLst>
+          </p:cNvPr>
+          <p:cNvSpPr>
+            <a:spLocks xmlns:a="http://schemas.openxmlformats.org/drawingml/2006/main" noGrp="1"/>
+          </p:cNvSpPr>
+          <p:nvPr/>
+        </p:nvSpPr>
+        <p:spPr>
+          <a:xfrm xmlns:a="http://schemas.openxmlformats.org/drawingml/2006/main">
+            <a:off x="638175" y="1476375"/>
+            <a:ext cx="1771650" cy="4495800"/>
+          </a:xfrm>
+          <a:prstGeom xmlns:a="http://schemas.openxmlformats.org/drawingml/2006/main" prst="roundRect">
+            <a:avLst>
+              <a:gd name="adj" fmla="val 1075"/>
+            </a:avLst>
+          </a:prstGeom>
+          <a:solidFill xmlns:a="http://schemas.openxmlformats.org/drawingml/2006/main">
+            <a:srgbClr val="F0F7FC"/>
+          </a:solidFill>
+          <a:ln xmlns:a="http://schemas.openxmlformats.org/drawingml/2006/main" w="0">
+            <a:noFill/>
+            <a:prstDash val="solid"/>
+          </a:ln>
+        </p:spPr>
+      </p:sp>
+      <p:sp>
+        <p:nvSpPr>
+          <p:cNvPr id="4" name="">
+            <a:extLst xmlns:a="http://schemas.openxmlformats.org/drawingml/2006/main">
+              <a:ext uri="{FF2B5EF4-FFF2-40B4-BE49-F238E27FC236}">
+                <a16:creationId xmlns:a16="http://schemas.microsoft.com/office/drawing/2014/main" id="{1777A63F-BEA6-40EA-80C8-148148DDA1C5}"/>
+              </a:ext>
+            </a:extLst>
+          </p:cNvPr>
+          <p:cNvSpPr>
+            <a:spLocks xmlns:a="http://schemas.openxmlformats.org/drawingml/2006/main" noGrp="1"/>
+          </p:cNvSpPr>
+          <p:nvPr/>
+        </p:nvSpPr>
+        <p:spPr>
+          <a:xfrm xmlns:a="http://schemas.openxmlformats.org/drawingml/2006/main">
+            <a:off x="4295775" y="1476375"/>
+            <a:ext cx="1771650" cy="4495800"/>
+          </a:xfrm>
+          <a:prstGeom xmlns:a="http://schemas.openxmlformats.org/drawingml/2006/main" prst="roundRect">
+            <a:avLst>
+              <a:gd name="adj" fmla="val 1075"/>
+            </a:avLst>
+          </a:prstGeom>
+          <a:solidFill xmlns:a="http://schemas.openxmlformats.org/drawingml/2006/main">
+            <a:srgbClr val="F0F7FC"/>
+          </a:solidFill>
+          <a:ln xmlns:a="http://schemas.openxmlformats.org/drawingml/2006/main" w="0">
+            <a:noFill/>
+            <a:prstDash val="solid"/>
+          </a:ln>
+        </p:spPr>
+      </p:sp>
+      <p:sp>
+        <p:nvSpPr>
+          <p:cNvPr id="5" name="">
+            <a:extLst xmlns:a="http://schemas.openxmlformats.org/drawingml/2006/main">
+              <a:ext uri="{FF2B5EF4-FFF2-40B4-BE49-F238E27FC236}">
+                <a16:creationId xmlns:a16="http://schemas.microsoft.com/office/drawing/2014/main" id="{F207438E-FCAE-4A32-9CED-594D7B81ECFD}"/>
+              </a:ext>
+            </a:extLst>
+          </p:cNvPr>
+          <p:cNvSpPr>
+            <a:spLocks xmlns:a="http://schemas.openxmlformats.org/drawingml/2006/main" noGrp="1"/>
+          </p:cNvSpPr>
+          <p:nvPr/>
+        </p:nvSpPr>
+        <p:spPr>
+          <a:xfrm xmlns:a="http://schemas.openxmlformats.org/drawingml/2006/main">
+            <a:off x="7953375" y="1476375"/>
+            <a:ext cx="1771650" cy="4495800"/>
+          </a:xfrm>
+          <a:prstGeom xmlns:a="http://schemas.openxmlformats.org/drawingml/2006/main" prst="roundRect">
+            <a:avLst>
+              <a:gd name="adj" fmla="val 1075"/>
+            </a:avLst>
+          </a:prstGeom>
+          <a:solidFill xmlns:a="http://schemas.openxmlformats.org/drawingml/2006/main">
+            <a:srgbClr val="F0F7FC"/>
+          </a:solidFill>
+          <a:ln xmlns:a="http://schemas.openxmlformats.org/drawingml/2006/main" w="0">
+            <a:noFill/>
+            <a:prstDash val="solid"/>
+          </a:ln>
+        </p:spPr>
+      </p:sp>
+      <p:sp>
+        <p:nvSpPr>
+          <p:cNvPr id="6" name="PPAGENT_QA|parent=timeline-axis|domains=timeline-connection">
+            <a:extLst xmlns:a="http://schemas.openxmlformats.org/drawingml/2006/main">
+              <a:ext uri="{FF2B5EF4-FFF2-40B4-BE49-F238E27FC236}">
+                <a16:creationId xmlns:a16="http://schemas.microsoft.com/office/drawing/2014/main" id="{05A2091D-A5B8-445F-9EA7-43A0403010E9}"/>
+              </a:ext>
+            </a:extLst>
+          </p:cNvPr>
+          <p:cNvSpPr>
+            <a:spLocks xmlns:a="http://schemas.openxmlformats.org/drawingml/2006/main" noGrp="1"/>
+          </p:cNvSpPr>
+          <p:nvPr/>
+        </p:nvSpPr>
+        <p:spPr>
+          <a:xfrm xmlns:a="http://schemas.openxmlformats.org/drawingml/2006/main">
+            <a:off x="609600" y="3209925"/>
+            <a:ext cx="10972800" cy="0"/>
+          </a:xfrm>
+          <a:prstGeom xmlns:a="http://schemas.openxmlformats.org/drawingml/2006/main" prst="line">
+            <a:avLst/>
+          </a:prstGeom>
+          <a:noFill xmlns:a="http://schemas.openxmlformats.org/drawingml/2006/main"/>
+          <a:ln xmlns:a="http://schemas.openxmlformats.org/drawingml/2006/main" w="28575">
+            <a:solidFill>
+              <a:srgbClr val="1677C8"/>
+            </a:solidFill>
+            <a:prstDash val="solid"/>
+          </a:ln>
+        </p:spPr>
+      </p:sp>
+      <p:sp>
+        <p:nvSpPr>
+          <p:cNvPr id="7" name="PPAGENT_QA|parent=timeline-period-0|domains=timeline-content">
+            <a:extLst xmlns:a="http://schemas.openxmlformats.org/drawingml/2006/main">
+              <a:ext uri="{FF2B5EF4-FFF2-40B4-BE49-F238E27FC236}">
+                <a16:creationId xmlns:a16="http://schemas.microsoft.com/office/drawing/2014/main" id="{A5D124B6-47CC-4B65-B950-FC22B3307292}"/>
+              </a:ext>
+            </a:extLst>
+          </p:cNvPr>
+          <p:cNvSpPr>
+            <a:spLocks xmlns:a="http://schemas.openxmlformats.org/drawingml/2006/main" noGrp="1"/>
+          </p:cNvSpPr>
+          <p:nvPr/>
+        </p:nvSpPr>
+        <p:spPr>
+          <a:xfrm xmlns:a="http://schemas.openxmlformats.org/drawingml/2006/main">
+            <a:off x="723900" y="1619250"/>
+            <a:ext cx="1600200" cy="1000125"/>
+          </a:xfrm>
+          <a:prstGeom xmlns:a="http://schemas.openxmlformats.org/drawingml/2006/main" prst="rect">
+            <a:avLst/>
+          </a:prstGeom>
+          <a:noFill xmlns:a="http://schemas.openxmlformats.org/drawingml/2006/main"/>
+          <a:ln xmlns:a="http://schemas.openxmlformats.org/drawingml/2006/main" w="0">
+            <a:noFill/>
+            <a:prstDash val="solid"/>
+          </a:ln>
+        </p:spPr>
+        <p:txBody>
+          <a:bodyPr xmlns:a="http://schemas.openxmlformats.org/drawingml/2006/main" lIns="0" tIns="0" rIns="0" bIns="0" anchor="ctr">
+            <a:normAutofit fontScale="100000"/>
+          </a:bodyPr>
+          <a:lstStyle xmlns:a="http://schemas.openxmlformats.org/drawingml/2006/main"/>
+          <a:p xmlns:a="http://schemas.openxmlformats.org/drawingml/2006/main">
+            <a:pPr algn="ctr">
+              <a:defRPr sz="3300" b="1">
+                <a:solidFill>
+                  <a:srgbClr val="AFC4D8"/>
+                </a:solidFill>
+                <a:latin typeface="Microsoft YaHei"/>
+                <a:ea typeface="Microsoft YaHei"/>
+                <a:cs typeface="Microsoft YaHei"/>
+              </a:defRPr>
+            </a:pPr>
+            <a:r>
+              <a:rPr sz="3300" b="1">
+                <a:solidFill>
+                  <a:srgbClr val="AFC4D8"/>
+                </a:solidFill>
+                <a:latin typeface="Microsoft YaHei"/>
+                <a:ea typeface="Microsoft YaHei"/>
+                <a:cs typeface="Microsoft YaHei"/>
+              </a:rPr>
+              <a:t>2024</a:t>
+            </a:r>
+          </a:p>
+        </p:txBody>
+      </p:sp>
+      <p:sp>
+        <p:nvSpPr>
+          <p:cNvPr id="8" name="">
+            <a:extLst xmlns:a="http://schemas.openxmlformats.org/drawingml/2006/main">
+              <a:ext uri="{FF2B5EF4-FFF2-40B4-BE49-F238E27FC236}">
+                <a16:creationId xmlns:a16="http://schemas.microsoft.com/office/drawing/2014/main" id="{D9F7EFF4-AA6D-4A4C-A2CA-BB9438894E38}"/>
+              </a:ext>
+            </a:extLst>
+          </p:cNvPr>
+          <p:cNvSpPr>
+            <a:spLocks xmlns:a="http://schemas.openxmlformats.org/drawingml/2006/main" noGrp="1"/>
+          </p:cNvSpPr>
+          <p:nvPr/>
+        </p:nvSpPr>
+        <p:spPr>
+          <a:xfrm xmlns:a="http://schemas.openxmlformats.org/drawingml/2006/main">
+            <a:off x="723900" y="2724150"/>
+            <a:ext cx="1600200" cy="247650"/>
+          </a:xfrm>
+          <a:prstGeom xmlns:a="http://schemas.openxmlformats.org/drawingml/2006/main" prst="rect">
+            <a:avLst/>
+          </a:prstGeom>
+          <a:noFill xmlns:a="http://schemas.openxmlformats.org/drawingml/2006/main"/>
+          <a:ln xmlns:a="http://schemas.openxmlformats.org/drawingml/2006/main" w="0">
+            <a:noFill/>
+            <a:prstDash val="solid"/>
+          </a:ln>
+        </p:spPr>
+        <p:txBody>
+          <a:bodyPr xmlns:a="http://schemas.openxmlformats.org/drawingml/2006/main" lIns="0" tIns="0" rIns="0" bIns="0" anchor="ctr">
+            <a:normAutofit fontScale="100000"/>
+          </a:bodyPr>
+          <a:lstStyle xmlns:a="http://schemas.openxmlformats.org/drawingml/2006/main"/>
+          <a:p xmlns:a="http://schemas.openxmlformats.org/drawingml/2006/main">
+            <a:pPr algn="ctr">
+              <a:defRPr sz="1350" b="1">
+                <a:solidFill>
+                  <a:srgbClr val="7C8A9A"/>
+                </a:solidFill>
+                <a:latin typeface="Microsoft YaHei"/>
+                <a:ea typeface="Microsoft YaHei"/>
+                <a:cs typeface="Microsoft YaHei"/>
+              </a:defRPr>
+            </a:pPr>
+            <a:r>
+              <a:rPr sz="1350" b="1">
+                <a:solidFill>
+                  <a:srgbClr val="7C8A9A"/>
+                </a:solidFill>
+                <a:latin typeface="Microsoft YaHei"/>
+                <a:ea typeface="Microsoft YaHei"/>
+                <a:cs typeface="Microsoft YaHei"/>
+              </a:rPr>
+              <a:t>阶段 01</a:t>
+            </a:r>
+          </a:p>
+        </p:txBody>
+      </p:sp>
+      <p:sp>
+        <p:nvSpPr>
+          <p:cNvPr id="9" name="PPAGENT_QA|parent=timeline-node-0|domains=timeline-connection">
+            <a:extLst xmlns:a="http://schemas.openxmlformats.org/drawingml/2006/main">
+              <a:ext uri="{FF2B5EF4-FFF2-40B4-BE49-F238E27FC236}">
+                <a16:creationId xmlns:a16="http://schemas.microsoft.com/office/drawing/2014/main" id="{5CED503F-0B6C-4FB0-8E27-A9257D983D95}"/>
+              </a:ext>
+            </a:extLst>
+          </p:cNvPr>
+          <p:cNvSpPr>
+            <a:spLocks xmlns:a="http://schemas.openxmlformats.org/drawingml/2006/main" noGrp="1"/>
+          </p:cNvSpPr>
+          <p:nvPr/>
+        </p:nvSpPr>
+        <p:spPr>
+          <a:xfrm xmlns:a="http://schemas.openxmlformats.org/drawingml/2006/main">
+            <a:off x="1400175" y="3086100"/>
+            <a:ext cx="247650" cy="247650"/>
+          </a:xfrm>
+          <a:prstGeom xmlns:a="http://schemas.openxmlformats.org/drawingml/2006/main" prst="ellipse">
+            <a:avLst/>
+          </a:prstGeom>
+          <a:solidFill xmlns:a="http://schemas.openxmlformats.org/drawingml/2006/main">
+            <a:srgbClr val="1677C8"/>
+          </a:solidFill>
+          <a:ln xmlns:a="http://schemas.openxmlformats.org/drawingml/2006/main" w="28575">
+            <a:solidFill>
+              <a:srgbClr val="FFFFFF"/>
+            </a:solidFill>
+            <a:prstDash val="solid"/>
+          </a:ln>
+        </p:spPr>
+        <p:style>
+          <a:lnRef xmlns:a="http://schemas.openxmlformats.org/drawingml/2006/main" idx="0"/>
+          <a:fillRef xmlns:a="http://schemas.openxmlformats.org/drawingml/2006/main" idx="0"/>
+          <a:effectRef xmlns:a="http://schemas.openxmlformats.org/drawingml/2006/main" idx="4"/>
+          <a:fontRef xmlns:a="http://schemas.openxmlformats.org/drawingml/2006/main" idx="major"/>
+        </p:style>
+      </p:sp>
+      <p:sp>
+        <p:nvSpPr>
+          <p:cNvPr id="10" name="PPAGENT_QA|parent=timeline-title-0|domains=timeline-content">
+            <a:extLst xmlns:a="http://schemas.openxmlformats.org/drawingml/2006/main">
+              <a:ext uri="{FF2B5EF4-FFF2-40B4-BE49-F238E27FC236}">
+                <a16:creationId xmlns:a16="http://schemas.microsoft.com/office/drawing/2014/main" id="{F1046369-FF50-46A7-8272-1DB4C0AEF02F}"/>
+              </a:ext>
+            </a:extLst>
+          </p:cNvPr>
+          <p:cNvSpPr>
+            <a:spLocks xmlns:a="http://schemas.openxmlformats.org/drawingml/2006/main" noGrp="1"/>
+          </p:cNvSpPr>
+          <p:nvPr/>
+        </p:nvSpPr>
+        <p:spPr>
+          <a:xfrm xmlns:a="http://schemas.openxmlformats.org/drawingml/2006/main">
+            <a:off x="723900" y="3581400"/>
+            <a:ext cx="1600200" cy="552450"/>
+          </a:xfrm>
+          <a:prstGeom xmlns:a="http://schemas.openxmlformats.org/drawingml/2006/main" prst="rect">
+            <a:avLst/>
+          </a:prstGeom>
+          <a:noFill xmlns:a="http://schemas.openxmlformats.org/drawingml/2006/main"/>
+          <a:ln xmlns:a="http://schemas.openxmlformats.org/drawingml/2006/main" w="0">
+            <a:noFill/>
+            <a:prstDash val="solid"/>
+          </a:ln>
+        </p:spPr>
+        <p:txBody>
+          <a:bodyPr xmlns:a="http://schemas.openxmlformats.org/drawingml/2006/main" lIns="0" tIns="0" rIns="0" bIns="0" anchor="ctr">
+            <a:normAutofit fontScale="100000"/>
+          </a:bodyPr>
+          <a:lstStyle xmlns:a="http://schemas.openxmlformats.org/drawingml/2006/main"/>
+          <a:p xmlns:a="http://schemas.openxmlformats.org/drawingml/2006/main">
+            <a:pPr algn="ctr">
+              <a:defRPr sz="1425" b="1">
+                <a:solidFill>
+                  <a:srgbClr val="1677C8"/>
+                </a:solidFill>
+                <a:latin typeface="Microsoft YaHei"/>
+                <a:ea typeface="Microsoft YaHei"/>
+                <a:cs typeface="Microsoft YaHei"/>
+              </a:defRPr>
+            </a:pPr>
+            <a:r>
+              <a:rPr sz="1425" b="1">
+                <a:solidFill>
+                  <a:srgbClr val="1677C8"/>
+                </a:solidFill>
+                <a:latin typeface="Microsoft YaHei"/>
+                <a:ea typeface="Microsoft YaHei"/>
+                <a:cs typeface="Microsoft YaHei"/>
+              </a:rPr>
+              <a:t>识别问题</a:t>
+            </a:r>
+          </a:p>
+        </p:txBody>
+      </p:sp>
+      <p:sp>
+        <p:nvSpPr>
+          <p:cNvPr id="11" name="PPAGENT_QA|parent=timeline-body-0|domains=timeline-content">
+            <a:extLst xmlns:a="http://schemas.openxmlformats.org/drawingml/2006/main">
+              <a:ext uri="{FF2B5EF4-FFF2-40B4-BE49-F238E27FC236}">
+                <a16:creationId xmlns:a16="http://schemas.microsoft.com/office/drawing/2014/main" id="{5670A31B-4E5F-4C71-B23D-A284502B6AF2}"/>
+              </a:ext>
+            </a:extLst>
+          </p:cNvPr>
+          <p:cNvSpPr>
+            <a:spLocks xmlns:a="http://schemas.openxmlformats.org/drawingml/2006/main" noGrp="1"/>
+          </p:cNvSpPr>
+          <p:nvPr/>
+        </p:nvSpPr>
+        <p:spPr>
+          <a:xfrm xmlns:a="http://schemas.openxmlformats.org/drawingml/2006/main">
+            <a:off x="762000" y="4210050"/>
+            <a:ext cx="1524000" cy="990600"/>
+          </a:xfrm>
+          <a:prstGeom xmlns:a="http://schemas.openxmlformats.org/drawingml/2006/main" prst="rect">
+            <a:avLst/>
+          </a:prstGeom>
+          <a:noFill xmlns:a="http://schemas.openxmlformats.org/drawingml/2006/main"/>
+          <a:ln xmlns:a="http://schemas.openxmlformats.org/drawingml/2006/main" w="0">
+            <a:noFill/>
+            <a:prstDash val="solid"/>
+          </a:ln>
+        </p:spPr>
+        <p:txBody>
+          <a:bodyPr xmlns:a="http://schemas.openxmlformats.org/drawingml/2006/main" lIns="0" tIns="0" rIns="0" bIns="0" anchor="t">
+            <a:normAutofit fontScale="100000"/>
+          </a:bodyPr>
+          <a:lstStyle xmlns:a="http://schemas.openxmlformats.org/drawingml/2006/main"/>
+          <a:p xmlns:a="http://schemas.openxmlformats.org/drawingml/2006/main">
+            <a:pPr algn="ctr">
+              <a:defRPr sz="1500" b="0">
+                <a:solidFill>
+                  <a:srgbClr val="475569"/>
+                </a:solidFill>
+                <a:latin typeface="Microsoft YaHei"/>
+                <a:ea typeface="Microsoft YaHei"/>
+                <a:cs typeface="Microsoft YaHei"/>
+              </a:defRPr>
+            </a:pPr>
+            <a:r>
+              <a:rPr sz="1500" b="0">
+                <a:solidFill>
+                  <a:srgbClr val="475569"/>
+                </a:solidFill>
+                <a:latin typeface="Microsoft YaHei"/>
+                <a:ea typeface="Microsoft YaHei"/>
+                <a:cs typeface="Microsoft YaHei"/>
+              </a:rPr>
+              <a:t>明确场景与主要约束</a:t>
+            </a:r>
+          </a:p>
+        </p:txBody>
+      </p:sp>
+      <p:sp>
+        <p:nvSpPr>
+          <p:cNvPr id="12" name="PPAGENT_QA|parent=timeline-bar-0|domains=timeline-shape">
+            <a:extLst xmlns:a="http://schemas.openxmlformats.org/drawingml/2006/main">
+              <a:ext uri="{FF2B5EF4-FFF2-40B4-BE49-F238E27FC236}">
+                <a16:creationId xmlns:a16="http://schemas.microsoft.com/office/drawing/2014/main" id="{5C328EF1-D127-4572-AD41-A5877A91C4DE}"/>
+              </a:ext>
+            </a:extLst>
+          </p:cNvPr>
+          <p:cNvSpPr>
+            <a:spLocks xmlns:a="http://schemas.openxmlformats.org/drawingml/2006/main" noGrp="1"/>
+          </p:cNvSpPr>
+          <p:nvPr/>
+        </p:nvSpPr>
+        <p:spPr>
+          <a:xfrm xmlns:a="http://schemas.openxmlformats.org/drawingml/2006/main">
+            <a:off x="1295400" y="5391150"/>
+            <a:ext cx="457200" cy="47625"/>
+          </a:xfrm>
+          <a:prstGeom xmlns:a="http://schemas.openxmlformats.org/drawingml/2006/main" prst="roundRect">
+            <a:avLst>
+              <a:gd name="adj" fmla="val 50000"/>
+            </a:avLst>
+          </a:prstGeom>
+          <a:solidFill xmlns:a="http://schemas.openxmlformats.org/drawingml/2006/main">
+            <a:srgbClr val="DCEEFF"/>
+          </a:solidFill>
+          <a:ln xmlns:a="http://schemas.openxmlformats.org/drawingml/2006/main" w="0">
+            <a:noFill/>
+            <a:prstDash val="solid"/>
+          </a:ln>
+        </p:spPr>
+      </p:sp>
+      <p:sp>
+        <p:nvSpPr>
+          <p:cNvPr id="13" name="PPAGENT_QA|parent=timeline-period-1|domains=timeline-content">
+            <a:extLst xmlns:a="http://schemas.openxmlformats.org/drawingml/2006/main">
+              <a:ext uri="{FF2B5EF4-FFF2-40B4-BE49-F238E27FC236}">
+                <a16:creationId xmlns:a16="http://schemas.microsoft.com/office/drawing/2014/main" id="{887FB89C-0CC2-4A93-9060-BE6D9452C35F}"/>
+              </a:ext>
+            </a:extLst>
+          </p:cNvPr>
+          <p:cNvSpPr>
+            <a:spLocks xmlns:a="http://schemas.openxmlformats.org/drawingml/2006/main" noGrp="1"/>
+          </p:cNvSpPr>
+          <p:nvPr/>
+        </p:nvSpPr>
+        <p:spPr>
+          <a:xfrm xmlns:a="http://schemas.openxmlformats.org/drawingml/2006/main">
+            <a:off x="2552700" y="1619250"/>
+            <a:ext cx="1600200" cy="1000125"/>
+          </a:xfrm>
+          <a:prstGeom xmlns:a="http://schemas.openxmlformats.org/drawingml/2006/main" prst="rect">
+            <a:avLst/>
+          </a:prstGeom>
+          <a:noFill xmlns:a="http://schemas.openxmlformats.org/drawingml/2006/main"/>
+          <a:ln xmlns:a="http://schemas.openxmlformats.org/drawingml/2006/main" w="0">
+            <a:noFill/>
+            <a:prstDash val="solid"/>
+          </a:ln>
+        </p:spPr>
+        <p:txBody>
+          <a:bodyPr xmlns:a="http://schemas.openxmlformats.org/drawingml/2006/main" lIns="0" tIns="0" rIns="0" bIns="0" anchor="ctr">
+            <a:normAutofit fontScale="100000"/>
+          </a:bodyPr>
+          <a:lstStyle xmlns:a="http://schemas.openxmlformats.org/drawingml/2006/main"/>
+          <a:p xmlns:a="http://schemas.openxmlformats.org/drawingml/2006/main">
+            <a:pPr algn="ctr">
+              <a:defRPr sz="3300" b="1">
+                <a:solidFill>
+                  <a:srgbClr val="AFC4D8"/>
+                </a:solidFill>
+                <a:latin typeface="Microsoft YaHei"/>
+                <a:ea typeface="Microsoft YaHei"/>
+                <a:cs typeface="Microsoft YaHei"/>
+              </a:defRPr>
+            </a:pPr>
+            <a:r>
+              <a:rPr sz="3300" b="1">
+                <a:solidFill>
+                  <a:srgbClr val="AFC4D8"/>
+                </a:solidFill>
+                <a:latin typeface="Microsoft YaHei"/>
+                <a:ea typeface="Microsoft YaHei"/>
+                <a:cs typeface="Microsoft YaHei"/>
+              </a:rPr>
+              <a:t>2025</a:t>
+            </a:r>
+          </a:p>
+        </p:txBody>
+      </p:sp>
+      <p:sp>
+        <p:nvSpPr>
+          <p:cNvPr id="14" name="">
+            <a:extLst xmlns:a="http://schemas.openxmlformats.org/drawingml/2006/main">
+              <a:ext uri="{FF2B5EF4-FFF2-40B4-BE49-F238E27FC236}">
+                <a16:creationId xmlns:a16="http://schemas.microsoft.com/office/drawing/2014/main" id="{C02600C8-6012-4DA4-8CDF-DFFF8A954002}"/>
+              </a:ext>
+            </a:extLst>
+          </p:cNvPr>
+          <p:cNvSpPr>
+            <a:spLocks xmlns:a="http://schemas.openxmlformats.org/drawingml/2006/main" noGrp="1"/>
+          </p:cNvSpPr>
+          <p:nvPr/>
+        </p:nvSpPr>
+        <p:spPr>
+          <a:xfrm xmlns:a="http://schemas.openxmlformats.org/drawingml/2006/main">
+            <a:off x="2552700" y="2724150"/>
+            <a:ext cx="1600200" cy="247650"/>
+          </a:xfrm>
+          <a:prstGeom xmlns:a="http://schemas.openxmlformats.org/drawingml/2006/main" prst="rect">
+            <a:avLst/>
+          </a:prstGeom>
+          <a:noFill xmlns:a="http://schemas.openxmlformats.org/drawingml/2006/main"/>
+          <a:ln xmlns:a="http://schemas.openxmlformats.org/drawingml/2006/main" w="0">
+            <a:noFill/>
+            <a:prstDash val="solid"/>
+          </a:ln>
+        </p:spPr>
+        <p:txBody>
+          <a:bodyPr xmlns:a="http://schemas.openxmlformats.org/drawingml/2006/main" lIns="0" tIns="0" rIns="0" bIns="0" anchor="ctr">
+            <a:normAutofit fontScale="100000"/>
+          </a:bodyPr>
+          <a:lstStyle xmlns:a="http://schemas.openxmlformats.org/drawingml/2006/main"/>
+          <a:p xmlns:a="http://schemas.openxmlformats.org/drawingml/2006/main">
+            <a:pPr algn="ctr">
+              <a:defRPr sz="1350" b="1">
+                <a:solidFill>
+                  <a:srgbClr val="7C8A9A"/>
+                </a:solidFill>
+                <a:latin typeface="Microsoft YaHei"/>
+                <a:ea typeface="Microsoft YaHei"/>
+                <a:cs typeface="Microsoft YaHei"/>
+              </a:defRPr>
+            </a:pPr>
+            <a:r>
+              <a:rPr sz="1350" b="1">
+                <a:solidFill>
+                  <a:srgbClr val="7C8A9A"/>
+                </a:solidFill>
+                <a:latin typeface="Microsoft YaHei"/>
+                <a:ea typeface="Microsoft YaHei"/>
+                <a:cs typeface="Microsoft YaHei"/>
+              </a:rPr>
+              <a:t>阶段 02</a:t>
+            </a:r>
+          </a:p>
+        </p:txBody>
+      </p:sp>
+      <p:sp>
+        <p:nvSpPr>
+          <p:cNvPr id="15" name="PPAGENT_QA|parent=timeline-node-1|domains=timeline-connection">
+            <a:extLst xmlns:a="http://schemas.openxmlformats.org/drawingml/2006/main">
+              <a:ext uri="{FF2B5EF4-FFF2-40B4-BE49-F238E27FC236}">
+                <a16:creationId xmlns:a16="http://schemas.microsoft.com/office/drawing/2014/main" id="{FB1D3DB3-4A70-42A0-8F2F-B4FA6C874364}"/>
+              </a:ext>
+            </a:extLst>
+          </p:cNvPr>
+          <p:cNvSpPr>
+            <a:spLocks xmlns:a="http://schemas.openxmlformats.org/drawingml/2006/main" noGrp="1"/>
+          </p:cNvSpPr>
+          <p:nvPr/>
+        </p:nvSpPr>
+        <p:spPr>
+          <a:xfrm xmlns:a="http://schemas.openxmlformats.org/drawingml/2006/main">
+            <a:off x="3228975" y="3086100"/>
+            <a:ext cx="247650" cy="247650"/>
+          </a:xfrm>
+          <a:prstGeom xmlns:a="http://schemas.openxmlformats.org/drawingml/2006/main" prst="ellipse">
+            <a:avLst/>
+          </a:prstGeom>
+          <a:solidFill xmlns:a="http://schemas.openxmlformats.org/drawingml/2006/main">
+            <a:srgbClr val="1677C8"/>
+          </a:solidFill>
+          <a:ln xmlns:a="http://schemas.openxmlformats.org/drawingml/2006/main" w="28575">
+            <a:solidFill>
+              <a:srgbClr val="FFFFFF"/>
+            </a:solidFill>
+            <a:prstDash val="solid"/>
+          </a:ln>
+        </p:spPr>
+        <p:style>
+          <a:lnRef xmlns:a="http://schemas.openxmlformats.org/drawingml/2006/main" idx="0"/>
+          <a:fillRef xmlns:a="http://schemas.openxmlformats.org/drawingml/2006/main" idx="0"/>
+          <a:effectRef xmlns:a="http://schemas.openxmlformats.org/drawingml/2006/main" idx="4"/>
+          <a:fontRef xmlns:a="http://schemas.openxmlformats.org/drawingml/2006/main" idx="major"/>
+        </p:style>
+      </p:sp>
+      <p:sp>
+        <p:nvSpPr>
+          <p:cNvPr id="16" name="PPAGENT_QA|parent=timeline-title-1|domains=timeline-content">
+            <a:extLst xmlns:a="http://schemas.openxmlformats.org/drawingml/2006/main">
+              <a:ext uri="{FF2B5EF4-FFF2-40B4-BE49-F238E27FC236}">
+                <a16:creationId xmlns:a16="http://schemas.microsoft.com/office/drawing/2014/main" id="{BA64FBB4-501F-4111-A964-33BA293BBADF}"/>
+              </a:ext>
+            </a:extLst>
+          </p:cNvPr>
+          <p:cNvSpPr>
+            <a:spLocks xmlns:a="http://schemas.openxmlformats.org/drawingml/2006/main" noGrp="1"/>
+          </p:cNvSpPr>
+          <p:nvPr/>
+        </p:nvSpPr>
+        <p:spPr>
+          <a:xfrm xmlns:a="http://schemas.openxmlformats.org/drawingml/2006/main">
+            <a:off x="2552700" y="3581400"/>
+            <a:ext cx="1600200" cy="552450"/>
+          </a:xfrm>
+          <a:prstGeom xmlns:a="http://schemas.openxmlformats.org/drawingml/2006/main" prst="rect">
+            <a:avLst/>
+          </a:prstGeom>
+          <a:noFill xmlns:a="http://schemas.openxmlformats.org/drawingml/2006/main"/>
+          <a:ln xmlns:a="http://schemas.openxmlformats.org/drawingml/2006/main" w="0">
+            <a:noFill/>
+            <a:prstDash val="solid"/>
+          </a:ln>
+        </p:spPr>
+        <p:txBody>
+          <a:bodyPr xmlns:a="http://schemas.openxmlformats.org/drawingml/2006/main" lIns="0" tIns="0" rIns="0" bIns="0" anchor="ctr">
+            <a:normAutofit fontScale="100000"/>
+          </a:bodyPr>
+          <a:lstStyle xmlns:a="http://schemas.openxmlformats.org/drawingml/2006/main"/>
+          <a:p xmlns:a="http://schemas.openxmlformats.org/drawingml/2006/main">
+            <a:pPr algn="ctr">
+              <a:defRPr sz="1425" b="1">
+                <a:solidFill>
+                  <a:srgbClr val="1677C8"/>
+                </a:solidFill>
+                <a:latin typeface="Microsoft YaHei"/>
+                <a:ea typeface="Microsoft YaHei"/>
+                <a:cs typeface="Microsoft YaHei"/>
+              </a:defRPr>
+            </a:pPr>
+            <a:r>
+              <a:rPr sz="1425" b="1">
+                <a:solidFill>
+                  <a:srgbClr val="1677C8"/>
+                </a:solidFill>
+                <a:latin typeface="Microsoft YaHei"/>
+                <a:ea typeface="Microsoft YaHei"/>
+                <a:cs typeface="Microsoft YaHei"/>
+              </a:rPr>
+              <a:t>验证方向</a:t>
+            </a:r>
+          </a:p>
+        </p:txBody>
+      </p:sp>
+      <p:sp>
+        <p:nvSpPr>
+          <p:cNvPr id="17" name="PPAGENT_QA|parent=timeline-body-1|domains=timeline-content">
+            <a:extLst xmlns:a="http://schemas.openxmlformats.org/drawingml/2006/main">
+              <a:ext uri="{FF2B5EF4-FFF2-40B4-BE49-F238E27FC236}">
+                <a16:creationId xmlns:a16="http://schemas.microsoft.com/office/drawing/2014/main" id="{77BDD3E9-AF4C-4EA8-8F94-EFF4CECDCC0A}"/>
+              </a:ext>
+            </a:extLst>
+          </p:cNvPr>
+          <p:cNvSpPr>
+            <a:spLocks xmlns:a="http://schemas.openxmlformats.org/drawingml/2006/main" noGrp="1"/>
+          </p:cNvSpPr>
+          <p:nvPr/>
+        </p:nvSpPr>
+        <p:spPr>
+          <a:xfrm xmlns:a="http://schemas.openxmlformats.org/drawingml/2006/main">
+            <a:off x="2590800" y="4210050"/>
+            <a:ext cx="1524000" cy="990600"/>
+          </a:xfrm>
+          <a:prstGeom xmlns:a="http://schemas.openxmlformats.org/drawingml/2006/main" prst="rect">
+            <a:avLst/>
+          </a:prstGeom>
+          <a:noFill xmlns:a="http://schemas.openxmlformats.org/drawingml/2006/main"/>
+          <a:ln xmlns:a="http://schemas.openxmlformats.org/drawingml/2006/main" w="0">
+            <a:noFill/>
+            <a:prstDash val="solid"/>
+          </a:ln>
+        </p:spPr>
+        <p:txBody>
+          <a:bodyPr xmlns:a="http://schemas.openxmlformats.org/drawingml/2006/main" lIns="0" tIns="0" rIns="0" bIns="0" anchor="t">
+            <a:normAutofit fontScale="100000"/>
+          </a:bodyPr>
+          <a:lstStyle xmlns:a="http://schemas.openxmlformats.org/drawingml/2006/main"/>
+          <a:p xmlns:a="http://schemas.openxmlformats.org/drawingml/2006/main">
+            <a:pPr algn="ctr">
+              <a:defRPr sz="1500" b="0">
+                <a:solidFill>
+                  <a:srgbClr val="475569"/>
+                </a:solidFill>
+                <a:latin typeface="Microsoft YaHei"/>
+                <a:ea typeface="Microsoft YaHei"/>
+                <a:cs typeface="Microsoft YaHei"/>
+              </a:defRPr>
+            </a:pPr>
+            <a:r>
+              <a:rPr sz="1500" b="0">
+                <a:solidFill>
+                  <a:srgbClr val="475569"/>
+                </a:solidFill>
+                <a:latin typeface="Microsoft YaHei"/>
+                <a:ea typeface="Microsoft YaHei"/>
+                <a:cs typeface="Microsoft YaHei"/>
+              </a:rPr>
+              <a:t>用真实任务</a:t>
+            </a:r>
+          </a:p>
+          <a:p xmlns:a="http://schemas.openxmlformats.org/drawingml/2006/main">
+            <a:pPr algn="ctr">
+              <a:defRPr sz="1500" b="0">
+                <a:solidFill>
+                  <a:srgbClr val="475569"/>
+                </a:solidFill>
+                <a:latin typeface="Microsoft YaHei"/>
+                <a:ea typeface="Microsoft YaHei"/>
+                <a:cs typeface="Microsoft YaHei"/>
+              </a:defRPr>
+            </a:pPr>
+            <a:r>
+              <a:rPr sz="1500" b="0">
+                <a:solidFill>
+                  <a:srgbClr val="475569"/>
+                </a:solidFill>
+                <a:latin typeface="Microsoft YaHei"/>
+                <a:ea typeface="Microsoft YaHei"/>
+                <a:cs typeface="Microsoft YaHei"/>
+              </a:rPr>
+              <a:t>确认最小闭环</a:t>
+            </a:r>
+          </a:p>
+        </p:txBody>
+      </p:sp>
+      <p:sp>
+        <p:nvSpPr>
+          <p:cNvPr id="18" name="PPAGENT_QA|parent=timeline-bar-1|domains=timeline-shape">
+            <a:extLst xmlns:a="http://schemas.openxmlformats.org/drawingml/2006/main">
+              <a:ext uri="{FF2B5EF4-FFF2-40B4-BE49-F238E27FC236}">
+                <a16:creationId xmlns:a16="http://schemas.microsoft.com/office/drawing/2014/main" id="{F089D11E-3048-43AE-A2C5-89A2F52689BD}"/>
+              </a:ext>
+            </a:extLst>
+          </p:cNvPr>
+          <p:cNvSpPr>
+            <a:spLocks xmlns:a="http://schemas.openxmlformats.org/drawingml/2006/main" noGrp="1"/>
+          </p:cNvSpPr>
+          <p:nvPr/>
+        </p:nvSpPr>
+        <p:spPr>
+          <a:xfrm xmlns:a="http://schemas.openxmlformats.org/drawingml/2006/main">
+            <a:off x="3124200" y="5391150"/>
+            <a:ext cx="457200" cy="47625"/>
+          </a:xfrm>
+          <a:prstGeom xmlns:a="http://schemas.openxmlformats.org/drawingml/2006/main" prst="roundRect">
+            <a:avLst>
+              <a:gd name="adj" fmla="val 50000"/>
+            </a:avLst>
+          </a:prstGeom>
+          <a:solidFill xmlns:a="http://schemas.openxmlformats.org/drawingml/2006/main">
+            <a:srgbClr val="DCEEFF"/>
+          </a:solidFill>
+          <a:ln xmlns:a="http://schemas.openxmlformats.org/drawingml/2006/main" w="0">
+            <a:noFill/>
+            <a:prstDash val="solid"/>
+          </a:ln>
+        </p:spPr>
+      </p:sp>
+      <p:sp>
+        <p:nvSpPr>
+          <p:cNvPr id="19" name="PPAGENT_QA|parent=timeline-period-2|domains=timeline-content">
+            <a:extLst xmlns:a="http://schemas.openxmlformats.org/drawingml/2006/main">
+              <a:ext uri="{FF2B5EF4-FFF2-40B4-BE49-F238E27FC236}">
+                <a16:creationId xmlns:a16="http://schemas.microsoft.com/office/drawing/2014/main" id="{E5C5EADD-8910-49E9-8C22-E4FE7CC1495A}"/>
+              </a:ext>
+            </a:extLst>
+          </p:cNvPr>
+          <p:cNvSpPr>
+            <a:spLocks xmlns:a="http://schemas.openxmlformats.org/drawingml/2006/main" noGrp="1"/>
+          </p:cNvSpPr>
+          <p:nvPr/>
+        </p:nvSpPr>
+        <p:spPr>
+          <a:xfrm xmlns:a="http://schemas.openxmlformats.org/drawingml/2006/main">
+            <a:off x="4381500" y="1619250"/>
+            <a:ext cx="1600200" cy="1000125"/>
+          </a:xfrm>
+          <a:prstGeom xmlns:a="http://schemas.openxmlformats.org/drawingml/2006/main" prst="rect">
+            <a:avLst/>
+          </a:prstGeom>
+          <a:noFill xmlns:a="http://schemas.openxmlformats.org/drawingml/2006/main"/>
+          <a:ln xmlns:a="http://schemas.openxmlformats.org/drawingml/2006/main" w="0">
+            <a:noFill/>
+            <a:prstDash val="solid"/>
+          </a:ln>
+        </p:spPr>
+        <p:txBody>
+          <a:bodyPr xmlns:a="http://schemas.openxmlformats.org/drawingml/2006/main" lIns="0" tIns="0" rIns="0" bIns="0" anchor="ctr">
+            <a:normAutofit fontScale="100000"/>
+          </a:bodyPr>
+          <a:lstStyle xmlns:a="http://schemas.openxmlformats.org/drawingml/2006/main"/>
+          <a:p xmlns:a="http://schemas.openxmlformats.org/drawingml/2006/main">
+            <a:pPr algn="ctr">
+              <a:defRPr sz="3300" b="1">
+                <a:solidFill>
+                  <a:srgbClr val="AFC4D8"/>
+                </a:solidFill>
+                <a:latin typeface="Microsoft YaHei"/>
+                <a:ea typeface="Microsoft YaHei"/>
+                <a:cs typeface="Microsoft YaHei"/>
+              </a:defRPr>
+            </a:pPr>
+            <a:r>
+              <a:rPr sz="3300" b="1">
+                <a:solidFill>
+                  <a:srgbClr val="AFC4D8"/>
+                </a:solidFill>
+                <a:latin typeface="Microsoft YaHei"/>
+                <a:ea typeface="Microsoft YaHei"/>
+                <a:cs typeface="Microsoft YaHei"/>
+              </a:rPr>
+              <a:t>2026</a:t>
+            </a:r>
+          </a:p>
+        </p:txBody>
+      </p:sp>
+      <p:sp>
+        <p:nvSpPr>
+          <p:cNvPr id="20" name="">
+            <a:extLst xmlns:a="http://schemas.openxmlformats.org/drawingml/2006/main">
+              <a:ext uri="{FF2B5EF4-FFF2-40B4-BE49-F238E27FC236}">
+                <a16:creationId xmlns:a16="http://schemas.microsoft.com/office/drawing/2014/main" id="{1DF53344-E56B-4E39-9B63-440CA840D065}"/>
+              </a:ext>
+            </a:extLst>
+          </p:cNvPr>
+          <p:cNvSpPr>
+            <a:spLocks xmlns:a="http://schemas.openxmlformats.org/drawingml/2006/main" noGrp="1"/>
+          </p:cNvSpPr>
+          <p:nvPr/>
+        </p:nvSpPr>
+        <p:spPr>
+          <a:xfrm xmlns:a="http://schemas.openxmlformats.org/drawingml/2006/main">
+            <a:off x="4381500" y="2724150"/>
+            <a:ext cx="1600200" cy="247650"/>
+          </a:xfrm>
+          <a:prstGeom xmlns:a="http://schemas.openxmlformats.org/drawingml/2006/main" prst="rect">
+            <a:avLst/>
+          </a:prstGeom>
+          <a:noFill xmlns:a="http://schemas.openxmlformats.org/drawingml/2006/main"/>
+          <a:ln xmlns:a="http://schemas.openxmlformats.org/drawingml/2006/main" w="0">
+            <a:noFill/>
+            <a:prstDash val="solid"/>
+          </a:ln>
+        </p:spPr>
+        <p:txBody>
+          <a:bodyPr xmlns:a="http://schemas.openxmlformats.org/drawingml/2006/main" lIns="0" tIns="0" rIns="0" bIns="0" anchor="ctr">
+            <a:normAutofit fontScale="100000"/>
+          </a:bodyPr>
+          <a:lstStyle xmlns:a="http://schemas.openxmlformats.org/drawingml/2006/main"/>
+          <a:p xmlns:a="http://schemas.openxmlformats.org/drawingml/2006/main">
+            <a:pPr algn="ctr">
+              <a:defRPr sz="1350" b="1">
+                <a:solidFill>
+                  <a:srgbClr val="7C8A9A"/>
+                </a:solidFill>
+                <a:latin typeface="Microsoft YaHei"/>
+                <a:ea typeface="Microsoft YaHei"/>
+                <a:cs typeface="Microsoft YaHei"/>
+              </a:defRPr>
+            </a:pPr>
+            <a:r>
+              <a:rPr sz="1350" b="1">
+                <a:solidFill>
+                  <a:srgbClr val="7C8A9A"/>
+                </a:solidFill>
+                <a:latin typeface="Microsoft YaHei"/>
+                <a:ea typeface="Microsoft YaHei"/>
+                <a:cs typeface="Microsoft YaHei"/>
+              </a:rPr>
+              <a:t>阶段 03</a:t>
+            </a:r>
+          </a:p>
+        </p:txBody>
+      </p:sp>
+      <p:sp>
+        <p:nvSpPr>
+          <p:cNvPr id="21" name="PPAGENT_QA|parent=timeline-node-2|domains=timeline-connection">
+            <a:extLst xmlns:a="http://schemas.openxmlformats.org/drawingml/2006/main">
+              <a:ext uri="{FF2B5EF4-FFF2-40B4-BE49-F238E27FC236}">
+                <a16:creationId xmlns:a16="http://schemas.microsoft.com/office/drawing/2014/main" id="{7EFAFE21-E729-40D5-986C-9689661E2A69}"/>
+              </a:ext>
+            </a:extLst>
+          </p:cNvPr>
+          <p:cNvSpPr>
+            <a:spLocks xmlns:a="http://schemas.openxmlformats.org/drawingml/2006/main" noGrp="1"/>
+          </p:cNvSpPr>
+          <p:nvPr/>
+        </p:nvSpPr>
+        <p:spPr>
+          <a:xfrm xmlns:a="http://schemas.openxmlformats.org/drawingml/2006/main">
+            <a:off x="5057775" y="3086100"/>
+            <a:ext cx="247650" cy="247650"/>
+          </a:xfrm>
+          <a:prstGeom xmlns:a="http://schemas.openxmlformats.org/drawingml/2006/main" prst="ellipse">
+            <a:avLst/>
+          </a:prstGeom>
+          <a:solidFill xmlns:a="http://schemas.openxmlformats.org/drawingml/2006/main">
+            <a:srgbClr val="1677C8"/>
+          </a:solidFill>
+          <a:ln xmlns:a="http://schemas.openxmlformats.org/drawingml/2006/main" w="28575">
+            <a:solidFill>
+              <a:srgbClr val="FFFFFF"/>
+            </a:solidFill>
+            <a:prstDash val="solid"/>
+          </a:ln>
+        </p:spPr>
+        <p:style>
+          <a:lnRef xmlns:a="http://schemas.openxmlformats.org/drawingml/2006/main" idx="0"/>
+          <a:fillRef xmlns:a="http://schemas.openxmlformats.org/drawingml/2006/main" idx="0"/>
+          <a:effectRef xmlns:a="http://schemas.openxmlformats.org/drawingml/2006/main" idx="4"/>
+          <a:fontRef xmlns:a="http://schemas.openxmlformats.org/drawingml/2006/main" idx="major"/>
+        </p:style>
+      </p:sp>
+      <p:sp>
+        <p:nvSpPr>
+          <p:cNvPr id="22" name="PPAGENT_QA|parent=timeline-title-2|domains=timeline-content">
+            <a:extLst xmlns:a="http://schemas.openxmlformats.org/drawingml/2006/main">
+              <a:ext uri="{FF2B5EF4-FFF2-40B4-BE49-F238E27FC236}">
+                <a16:creationId xmlns:a16="http://schemas.microsoft.com/office/drawing/2014/main" id="{FF9F4DCF-FE88-4EE1-BC23-0FC3B43485CE}"/>
+              </a:ext>
+            </a:extLst>
+          </p:cNvPr>
+          <p:cNvSpPr>
+            <a:spLocks xmlns:a="http://schemas.openxmlformats.org/drawingml/2006/main" noGrp="1"/>
+          </p:cNvSpPr>
+          <p:nvPr/>
+        </p:nvSpPr>
+        <p:spPr>
+          <a:xfrm xmlns:a="http://schemas.openxmlformats.org/drawingml/2006/main">
+            <a:off x="4381500" y="3581400"/>
+            <a:ext cx="1600200" cy="552450"/>
+          </a:xfrm>
+          <a:prstGeom xmlns:a="http://schemas.openxmlformats.org/drawingml/2006/main" prst="rect">
+            <a:avLst/>
+          </a:prstGeom>
+          <a:noFill xmlns:a="http://schemas.openxmlformats.org/drawingml/2006/main"/>
+          <a:ln xmlns:a="http://schemas.openxmlformats.org/drawingml/2006/main" w="0">
+            <a:noFill/>
+            <a:prstDash val="solid"/>
+          </a:ln>
+        </p:spPr>
+        <p:txBody>
+          <a:bodyPr xmlns:a="http://schemas.openxmlformats.org/drawingml/2006/main" lIns="0" tIns="0" rIns="0" bIns="0" anchor="ctr">
+            <a:normAutofit fontScale="100000"/>
+          </a:bodyPr>
+          <a:lstStyle xmlns:a="http://schemas.openxmlformats.org/drawingml/2006/main"/>
+          <a:p xmlns:a="http://schemas.openxmlformats.org/drawingml/2006/main">
+            <a:pPr algn="ctr">
+              <a:defRPr sz="1425" b="1">
+                <a:solidFill>
+                  <a:srgbClr val="1677C8"/>
+                </a:solidFill>
+                <a:latin typeface="Microsoft YaHei"/>
+                <a:ea typeface="Microsoft YaHei"/>
+                <a:cs typeface="Microsoft YaHei"/>
+              </a:defRPr>
+            </a:pPr>
+            <a:r>
+              <a:rPr sz="1425" b="1">
+                <a:solidFill>
+                  <a:srgbClr val="1677C8"/>
+                </a:solidFill>
+                <a:latin typeface="Microsoft YaHei"/>
+                <a:ea typeface="Microsoft YaHei"/>
+                <a:cs typeface="Microsoft YaHei"/>
+              </a:rPr>
+              <a:t>沉淀能力</a:t>
+            </a:r>
+          </a:p>
+        </p:txBody>
+      </p:sp>
+      <p:sp>
+        <p:nvSpPr>
+          <p:cNvPr id="23" name="PPAGENT_QA|parent=timeline-body-2|domains=timeline-content">
+            <a:extLst xmlns:a="http://schemas.openxmlformats.org/drawingml/2006/main">
+              <a:ext uri="{FF2B5EF4-FFF2-40B4-BE49-F238E27FC236}">
+                <a16:creationId xmlns:a16="http://schemas.microsoft.com/office/drawing/2014/main" id="{29E27AFB-B4D9-4257-95AD-600205C0A82E}"/>
+              </a:ext>
+            </a:extLst>
+          </p:cNvPr>
+          <p:cNvSpPr>
+            <a:spLocks xmlns:a="http://schemas.openxmlformats.org/drawingml/2006/main" noGrp="1"/>
+          </p:cNvSpPr>
+          <p:nvPr/>
+        </p:nvSpPr>
+        <p:spPr>
+          <a:xfrm xmlns:a="http://schemas.openxmlformats.org/drawingml/2006/main">
+            <a:off x="4419600" y="4210050"/>
+            <a:ext cx="1524000" cy="990600"/>
+          </a:xfrm>
+          <a:prstGeom xmlns:a="http://schemas.openxmlformats.org/drawingml/2006/main" prst="rect">
+            <a:avLst/>
+          </a:prstGeom>
+          <a:noFill xmlns:a="http://schemas.openxmlformats.org/drawingml/2006/main"/>
+          <a:ln xmlns:a="http://schemas.openxmlformats.org/drawingml/2006/main" w="0">
+            <a:noFill/>
+            <a:prstDash val="solid"/>
+          </a:ln>
+        </p:spPr>
+        <p:txBody>
+          <a:bodyPr xmlns:a="http://schemas.openxmlformats.org/drawingml/2006/main" lIns="0" tIns="0" rIns="0" bIns="0" anchor="t">
+            <a:normAutofit fontScale="100000"/>
+          </a:bodyPr>
+          <a:lstStyle xmlns:a="http://schemas.openxmlformats.org/drawingml/2006/main"/>
+          <a:p xmlns:a="http://schemas.openxmlformats.org/drawingml/2006/main">
+            <a:pPr algn="ctr">
+              <a:defRPr sz="1500" b="0">
+                <a:solidFill>
+                  <a:srgbClr val="475569"/>
+                </a:solidFill>
+                <a:latin typeface="Microsoft YaHei"/>
+                <a:ea typeface="Microsoft YaHei"/>
+                <a:cs typeface="Microsoft YaHei"/>
+              </a:defRPr>
+            </a:pPr>
+            <a:r>
+              <a:rPr sz="1500" b="0">
+                <a:solidFill>
+                  <a:srgbClr val="475569"/>
+                </a:solidFill>
+                <a:latin typeface="Microsoft YaHei"/>
+                <a:ea typeface="Microsoft YaHei"/>
+                <a:cs typeface="Microsoft YaHei"/>
+              </a:rPr>
+              <a:t>把经验整理</a:t>
+            </a:r>
+          </a:p>
+          <a:p xmlns:a="http://schemas.openxmlformats.org/drawingml/2006/main">
+            <a:pPr algn="ctr">
+              <a:defRPr sz="1500" b="0">
+                <a:solidFill>
+                  <a:srgbClr val="475569"/>
+                </a:solidFill>
+                <a:latin typeface="Microsoft YaHei"/>
+                <a:ea typeface="Microsoft YaHei"/>
+                <a:cs typeface="Microsoft YaHei"/>
+              </a:defRPr>
+            </a:pPr>
+            <a:r>
+              <a:rPr sz="1500" b="0">
+                <a:solidFill>
+                  <a:srgbClr val="475569"/>
+                </a:solidFill>
+                <a:latin typeface="Microsoft YaHei"/>
+                <a:ea typeface="Microsoft YaHei"/>
+                <a:cs typeface="Microsoft YaHei"/>
+              </a:rPr>
+              <a:t>为规则与资产</a:t>
+            </a:r>
+          </a:p>
+        </p:txBody>
+      </p:sp>
+      <p:sp>
+        <p:nvSpPr>
+          <p:cNvPr id="24" name="PPAGENT_QA|parent=timeline-bar-2|domains=timeline-shape">
+            <a:extLst xmlns:a="http://schemas.openxmlformats.org/drawingml/2006/main">
+              <a:ext uri="{FF2B5EF4-FFF2-40B4-BE49-F238E27FC236}">
+                <a16:creationId xmlns:a16="http://schemas.microsoft.com/office/drawing/2014/main" id="{552147D0-CD26-4E9F-BF86-D668F7474ED8}"/>
+              </a:ext>
+            </a:extLst>
+          </p:cNvPr>
+          <p:cNvSpPr>
+            <a:spLocks xmlns:a="http://schemas.openxmlformats.org/drawingml/2006/main" noGrp="1"/>
+          </p:cNvSpPr>
+          <p:nvPr/>
+        </p:nvSpPr>
+        <p:spPr>
+          <a:xfrm xmlns:a="http://schemas.openxmlformats.org/drawingml/2006/main">
+            <a:off x="4953000" y="5391150"/>
+            <a:ext cx="457200" cy="47625"/>
+          </a:xfrm>
+          <a:prstGeom xmlns:a="http://schemas.openxmlformats.org/drawingml/2006/main" prst="roundRect">
+            <a:avLst>
+              <a:gd name="adj" fmla="val 50000"/>
+            </a:avLst>
+          </a:prstGeom>
+          <a:solidFill xmlns:a="http://schemas.openxmlformats.org/drawingml/2006/main">
+            <a:srgbClr val="DCEEFF"/>
+          </a:solidFill>
+          <a:ln xmlns:a="http://schemas.openxmlformats.org/drawingml/2006/main" w="0">
+            <a:noFill/>
+            <a:prstDash val="solid"/>
+          </a:ln>
+        </p:spPr>
+      </p:sp>
+      <p:sp>
+        <p:nvSpPr>
+          <p:cNvPr id="25" name="PPAGENT_QA|parent=timeline-period-3|domains=timeline-content">
+            <a:extLst xmlns:a="http://schemas.openxmlformats.org/drawingml/2006/main">
+              <a:ext uri="{FF2B5EF4-FFF2-40B4-BE49-F238E27FC236}">
+                <a16:creationId xmlns:a16="http://schemas.microsoft.com/office/drawing/2014/main" id="{67A36DD2-1A5A-445E-A8B8-FE8888E82C32}"/>
+              </a:ext>
+            </a:extLst>
+          </p:cNvPr>
+          <p:cNvSpPr>
+            <a:spLocks xmlns:a="http://schemas.openxmlformats.org/drawingml/2006/main" noGrp="1"/>
+          </p:cNvSpPr>
+          <p:nvPr/>
+        </p:nvSpPr>
+        <p:spPr>
+          <a:xfrm xmlns:a="http://schemas.openxmlformats.org/drawingml/2006/main">
+            <a:off x="6210300" y="1619250"/>
+            <a:ext cx="1600200" cy="1000125"/>
+          </a:xfrm>
+          <a:prstGeom xmlns:a="http://schemas.openxmlformats.org/drawingml/2006/main" prst="rect">
+            <a:avLst/>
+          </a:prstGeom>
+          <a:noFill xmlns:a="http://schemas.openxmlformats.org/drawingml/2006/main"/>
+          <a:ln xmlns:a="http://schemas.openxmlformats.org/drawingml/2006/main" w="0">
+            <a:noFill/>
+            <a:prstDash val="solid"/>
+          </a:ln>
+        </p:spPr>
+        <p:txBody>
+          <a:bodyPr xmlns:a="http://schemas.openxmlformats.org/drawingml/2006/main" lIns="0" tIns="0" rIns="0" bIns="0" anchor="ctr">
+            <a:normAutofit fontScale="100000"/>
+          </a:bodyPr>
+          <a:lstStyle xmlns:a="http://schemas.openxmlformats.org/drawingml/2006/main"/>
+          <a:p xmlns:a="http://schemas.openxmlformats.org/drawingml/2006/main">
+            <a:pPr algn="ctr">
+              <a:defRPr sz="3300" b="1">
+                <a:solidFill>
+                  <a:srgbClr val="AFC4D8"/>
+                </a:solidFill>
+                <a:latin typeface="Microsoft YaHei"/>
+                <a:ea typeface="Microsoft YaHei"/>
+                <a:cs typeface="Microsoft YaHei"/>
+              </a:defRPr>
+            </a:pPr>
+            <a:r>
+              <a:rPr sz="3300" b="1">
+                <a:solidFill>
+                  <a:srgbClr val="AFC4D8"/>
+                </a:solidFill>
+                <a:latin typeface="Microsoft YaHei"/>
+                <a:ea typeface="Microsoft YaHei"/>
+                <a:cs typeface="Microsoft YaHei"/>
+              </a:rPr>
+              <a:t>2027</a:t>
+            </a:r>
+          </a:p>
+        </p:txBody>
+      </p:sp>
+      <p:sp>
+        <p:nvSpPr>
+          <p:cNvPr id="26" name="">
+            <a:extLst xmlns:a="http://schemas.openxmlformats.org/drawingml/2006/main">
+              <a:ext uri="{FF2B5EF4-FFF2-40B4-BE49-F238E27FC236}">
+                <a16:creationId xmlns:a16="http://schemas.microsoft.com/office/drawing/2014/main" id="{1CF8B67A-85C1-4510-8339-A81051710CB2}"/>
+              </a:ext>
+            </a:extLst>
+          </p:cNvPr>
+          <p:cNvSpPr>
+            <a:spLocks xmlns:a="http://schemas.openxmlformats.org/drawingml/2006/main" noGrp="1"/>
+          </p:cNvSpPr>
+          <p:nvPr/>
+        </p:nvSpPr>
+        <p:spPr>
+          <a:xfrm xmlns:a="http://schemas.openxmlformats.org/drawingml/2006/main">
+            <a:off x="6210300" y="2724150"/>
+            <a:ext cx="1600200" cy="247650"/>
+          </a:xfrm>
+          <a:prstGeom xmlns:a="http://schemas.openxmlformats.org/drawingml/2006/main" prst="rect">
+            <a:avLst/>
+          </a:prstGeom>
+          <a:noFill xmlns:a="http://schemas.openxmlformats.org/drawingml/2006/main"/>
+          <a:ln xmlns:a="http://schemas.openxmlformats.org/drawingml/2006/main" w="0">
+            <a:noFill/>
+            <a:prstDash val="solid"/>
+          </a:ln>
+        </p:spPr>
+        <p:txBody>
+          <a:bodyPr xmlns:a="http://schemas.openxmlformats.org/drawingml/2006/main" lIns="0" tIns="0" rIns="0" bIns="0" anchor="ctr">
+            <a:normAutofit fontScale="100000"/>
+          </a:bodyPr>
+          <a:lstStyle xmlns:a="http://schemas.openxmlformats.org/drawingml/2006/main"/>
+          <a:p xmlns:a="http://schemas.openxmlformats.org/drawingml/2006/main">
+            <a:pPr algn="ctr">
+              <a:defRPr sz="1350" b="1">
+                <a:solidFill>
+                  <a:srgbClr val="7C8A9A"/>
+                </a:solidFill>
+                <a:latin typeface="Microsoft YaHei"/>
+                <a:ea typeface="Microsoft YaHei"/>
+                <a:cs typeface="Microsoft YaHei"/>
+              </a:defRPr>
+            </a:pPr>
+            <a:r>
+              <a:rPr sz="1350" b="1">
+                <a:solidFill>
+                  <a:srgbClr val="7C8A9A"/>
+                </a:solidFill>
+                <a:latin typeface="Microsoft YaHei"/>
+                <a:ea typeface="Microsoft YaHei"/>
+                <a:cs typeface="Microsoft YaHei"/>
+              </a:rPr>
+              <a:t>阶段 04</a:t>
+            </a:r>
+          </a:p>
+        </p:txBody>
+      </p:sp>
+      <p:sp>
+        <p:nvSpPr>
+          <p:cNvPr id="27" name="PPAGENT_QA|parent=timeline-node-3|domains=timeline-connection">
+            <a:extLst xmlns:a="http://schemas.openxmlformats.org/drawingml/2006/main">
+              <a:ext uri="{FF2B5EF4-FFF2-40B4-BE49-F238E27FC236}">
+                <a16:creationId xmlns:a16="http://schemas.microsoft.com/office/drawing/2014/main" id="{34D95DCB-98E1-42A7-82CA-F746B42E9D12}"/>
+              </a:ext>
+            </a:extLst>
+          </p:cNvPr>
+          <p:cNvSpPr>
+            <a:spLocks xmlns:a="http://schemas.openxmlformats.org/drawingml/2006/main" noGrp="1"/>
+          </p:cNvSpPr>
+          <p:nvPr/>
+        </p:nvSpPr>
+        <p:spPr>
+          <a:xfrm xmlns:a="http://schemas.openxmlformats.org/drawingml/2006/main">
+            <a:off x="6886575" y="3086100"/>
+            <a:ext cx="247650" cy="247650"/>
+          </a:xfrm>
+          <a:prstGeom xmlns:a="http://schemas.openxmlformats.org/drawingml/2006/main" prst="ellipse">
+            <a:avLst/>
+          </a:prstGeom>
+          <a:solidFill xmlns:a="http://schemas.openxmlformats.org/drawingml/2006/main">
+            <a:srgbClr val="1677C8"/>
+          </a:solidFill>
+          <a:ln xmlns:a="http://schemas.openxmlformats.org/drawingml/2006/main" w="28575">
+            <a:solidFill>
+              <a:srgbClr val="FFFFFF"/>
+            </a:solidFill>
+            <a:prstDash val="solid"/>
+          </a:ln>
+        </p:spPr>
+        <p:style>
+          <a:lnRef xmlns:a="http://schemas.openxmlformats.org/drawingml/2006/main" idx="0"/>
+          <a:fillRef xmlns:a="http://schemas.openxmlformats.org/drawingml/2006/main" idx="0"/>
+          <a:effectRef xmlns:a="http://schemas.openxmlformats.org/drawingml/2006/main" idx="4"/>
+          <a:fontRef xmlns:a="http://schemas.openxmlformats.org/drawingml/2006/main" idx="major"/>
+        </p:style>
+      </p:sp>
+      <p:sp>
+        <p:nvSpPr>
+          <p:cNvPr id="28" name="PPAGENT_QA|parent=timeline-title-3|domains=timeline-content">
+            <a:extLst xmlns:a="http://schemas.openxmlformats.org/drawingml/2006/main">
+              <a:ext uri="{FF2B5EF4-FFF2-40B4-BE49-F238E27FC236}">
+                <a16:creationId xmlns:a16="http://schemas.microsoft.com/office/drawing/2014/main" id="{CB058124-0E40-4955-9F59-2F4364F67DBF}"/>
+              </a:ext>
+            </a:extLst>
+          </p:cNvPr>
+          <p:cNvSpPr>
+            <a:spLocks xmlns:a="http://schemas.openxmlformats.org/drawingml/2006/main" noGrp="1"/>
+          </p:cNvSpPr>
+          <p:nvPr/>
+        </p:nvSpPr>
+        <p:spPr>
+          <a:xfrm xmlns:a="http://schemas.openxmlformats.org/drawingml/2006/main">
+            <a:off x="6210300" y="3581400"/>
+            <a:ext cx="1600200" cy="552450"/>
+          </a:xfrm>
+          <a:prstGeom xmlns:a="http://schemas.openxmlformats.org/drawingml/2006/main" prst="rect">
+            <a:avLst/>
+          </a:prstGeom>
+          <a:noFill xmlns:a="http://schemas.openxmlformats.org/drawingml/2006/main"/>
+          <a:ln xmlns:a="http://schemas.openxmlformats.org/drawingml/2006/main" w="0">
+            <a:noFill/>
+            <a:prstDash val="solid"/>
+          </a:ln>
+        </p:spPr>
+        <p:txBody>
+          <a:bodyPr xmlns:a="http://schemas.openxmlformats.org/drawingml/2006/main" lIns="0" tIns="0" rIns="0" bIns="0" anchor="ctr">
+            <a:normAutofit fontScale="100000"/>
+          </a:bodyPr>
+          <a:lstStyle xmlns:a="http://schemas.openxmlformats.org/drawingml/2006/main"/>
+          <a:p xmlns:a="http://schemas.openxmlformats.org/drawingml/2006/main">
+            <a:pPr algn="ctr">
+              <a:defRPr sz="1425" b="1">
+                <a:solidFill>
+                  <a:srgbClr val="1677C8"/>
+                </a:solidFill>
+                <a:latin typeface="Microsoft YaHei"/>
+                <a:ea typeface="Microsoft YaHei"/>
+                <a:cs typeface="Microsoft YaHei"/>
+              </a:defRPr>
+            </a:pPr>
+            <a:r>
+              <a:rPr sz="1425" b="1">
+                <a:solidFill>
+                  <a:srgbClr val="1677C8"/>
+                </a:solidFill>
+                <a:latin typeface="Microsoft YaHei"/>
+                <a:ea typeface="Microsoft YaHei"/>
+                <a:cs typeface="Microsoft YaHei"/>
+              </a:rPr>
+              <a:t>扩展场景</a:t>
+            </a:r>
+          </a:p>
+        </p:txBody>
+      </p:sp>
+      <p:sp>
+        <p:nvSpPr>
+          <p:cNvPr id="29" name="PPAGENT_QA|parent=timeline-body-3|domains=timeline-content">
+            <a:extLst xmlns:a="http://schemas.openxmlformats.org/drawingml/2006/main">
+              <a:ext uri="{FF2B5EF4-FFF2-40B4-BE49-F238E27FC236}">
+                <a16:creationId xmlns:a16="http://schemas.microsoft.com/office/drawing/2014/main" id="{B6F302D4-84F5-49E9-8114-4B8C5C8E88C3}"/>
+              </a:ext>
+            </a:extLst>
+          </p:cNvPr>
+          <p:cNvSpPr>
+            <a:spLocks xmlns:a="http://schemas.openxmlformats.org/drawingml/2006/main" noGrp="1"/>
+          </p:cNvSpPr>
+          <p:nvPr/>
+        </p:nvSpPr>
+        <p:spPr>
+          <a:xfrm xmlns:a="http://schemas.openxmlformats.org/drawingml/2006/main">
+            <a:off x="6248400" y="4210050"/>
+            <a:ext cx="1524000" cy="990600"/>
+          </a:xfrm>
+          <a:prstGeom xmlns:a="http://schemas.openxmlformats.org/drawingml/2006/main" prst="rect">
+            <a:avLst/>
+          </a:prstGeom>
+          <a:noFill xmlns:a="http://schemas.openxmlformats.org/drawingml/2006/main"/>
+          <a:ln xmlns:a="http://schemas.openxmlformats.org/drawingml/2006/main" w="0">
+            <a:noFill/>
+            <a:prstDash val="solid"/>
+          </a:ln>
+        </p:spPr>
+        <p:txBody>
+          <a:bodyPr xmlns:a="http://schemas.openxmlformats.org/drawingml/2006/main" lIns="0" tIns="0" rIns="0" bIns="0" anchor="t">
+            <a:normAutofit fontScale="100000"/>
+          </a:bodyPr>
+          <a:lstStyle xmlns:a="http://schemas.openxmlformats.org/drawingml/2006/main"/>
+          <a:p xmlns:a="http://schemas.openxmlformats.org/drawingml/2006/main">
+            <a:pPr algn="ctr">
+              <a:defRPr sz="1500" b="0">
+                <a:solidFill>
+                  <a:srgbClr val="475569"/>
+                </a:solidFill>
+                <a:latin typeface="Microsoft YaHei"/>
+                <a:ea typeface="Microsoft YaHei"/>
+                <a:cs typeface="Microsoft YaHei"/>
+              </a:defRPr>
+            </a:pPr>
+            <a:r>
+              <a:rPr sz="1500" b="0">
+                <a:solidFill>
+                  <a:srgbClr val="475569"/>
+                </a:solidFill>
+                <a:latin typeface="Microsoft YaHei"/>
+                <a:ea typeface="Microsoft YaHei"/>
+                <a:cs typeface="Microsoft YaHei"/>
+              </a:rPr>
+              <a:t>适配更多组织和用途</a:t>
+            </a:r>
+          </a:p>
+        </p:txBody>
+      </p:sp>
+      <p:sp>
+        <p:nvSpPr>
+          <p:cNvPr id="30" name="PPAGENT_QA|parent=timeline-bar-3|domains=timeline-shape">
+            <a:extLst xmlns:a="http://schemas.openxmlformats.org/drawingml/2006/main">
+              <a:ext uri="{FF2B5EF4-FFF2-40B4-BE49-F238E27FC236}">
+                <a16:creationId xmlns:a16="http://schemas.microsoft.com/office/drawing/2014/main" id="{10FA5BCA-4ABE-443D-8E73-BD3D5AA379E8}"/>
+              </a:ext>
+            </a:extLst>
+          </p:cNvPr>
+          <p:cNvSpPr>
+            <a:spLocks xmlns:a="http://schemas.openxmlformats.org/drawingml/2006/main" noGrp="1"/>
+          </p:cNvSpPr>
+          <p:nvPr/>
+        </p:nvSpPr>
+        <p:spPr>
+          <a:xfrm xmlns:a="http://schemas.openxmlformats.org/drawingml/2006/main">
+            <a:off x="6781800" y="5391150"/>
+            <a:ext cx="457200" cy="47625"/>
+          </a:xfrm>
+          <a:prstGeom xmlns:a="http://schemas.openxmlformats.org/drawingml/2006/main" prst="roundRect">
+            <a:avLst>
+              <a:gd name="adj" fmla="val 50000"/>
+            </a:avLst>
+          </a:prstGeom>
+          <a:solidFill xmlns:a="http://schemas.openxmlformats.org/drawingml/2006/main">
+            <a:srgbClr val="DCEEFF"/>
+          </a:solidFill>
+          <a:ln xmlns:a="http://schemas.openxmlformats.org/drawingml/2006/main" w="0">
+            <a:noFill/>
+            <a:prstDash val="solid"/>
+          </a:ln>
+        </p:spPr>
+      </p:sp>
+      <p:sp>
+        <p:nvSpPr>
+          <p:cNvPr id="31" name="PPAGENT_QA|parent=timeline-period-4|domains=timeline-content">
+            <a:extLst xmlns:a="http://schemas.openxmlformats.org/drawingml/2006/main">
+              <a:ext uri="{FF2B5EF4-FFF2-40B4-BE49-F238E27FC236}">
+                <a16:creationId xmlns:a16="http://schemas.microsoft.com/office/drawing/2014/main" id="{79FAD980-5EA5-4376-BA5A-1C1FC4876496}"/>
+              </a:ext>
+            </a:extLst>
+          </p:cNvPr>
+          <p:cNvSpPr>
+            <a:spLocks xmlns:a="http://schemas.openxmlformats.org/drawingml/2006/main" noGrp="1"/>
+          </p:cNvSpPr>
+          <p:nvPr/>
+        </p:nvSpPr>
+        <p:spPr>
+          <a:xfrm xmlns:a="http://schemas.openxmlformats.org/drawingml/2006/main">
+            <a:off x="8039100" y="1619250"/>
+            <a:ext cx="1600200" cy="1000125"/>
+          </a:xfrm>
+          <a:prstGeom xmlns:a="http://schemas.openxmlformats.org/drawingml/2006/main" prst="rect">
+            <a:avLst/>
+          </a:prstGeom>
+          <a:noFill xmlns:a="http://schemas.openxmlformats.org/drawingml/2006/main"/>
+          <a:ln xmlns:a="http://schemas.openxmlformats.org/drawingml/2006/main" w="0">
+            <a:noFill/>
+            <a:prstDash val="solid"/>
+          </a:ln>
+        </p:spPr>
+        <p:txBody>
+          <a:bodyPr xmlns:a="http://schemas.openxmlformats.org/drawingml/2006/main" lIns="0" tIns="0" rIns="0" bIns="0" anchor="ctr">
+            <a:normAutofit fontScale="100000"/>
+          </a:bodyPr>
+          <a:lstStyle xmlns:a="http://schemas.openxmlformats.org/drawingml/2006/main"/>
+          <a:p xmlns:a="http://schemas.openxmlformats.org/drawingml/2006/main">
+            <a:pPr algn="ctr">
+              <a:defRPr sz="3300" b="1">
+                <a:solidFill>
+                  <a:srgbClr val="AFC4D8"/>
+                </a:solidFill>
+                <a:latin typeface="Microsoft YaHei"/>
+                <a:ea typeface="Microsoft YaHei"/>
+                <a:cs typeface="Microsoft YaHei"/>
+              </a:defRPr>
+            </a:pPr>
+            <a:r>
+              <a:rPr sz="3300" b="1">
+                <a:solidFill>
+                  <a:srgbClr val="AFC4D8"/>
+                </a:solidFill>
+                <a:latin typeface="Microsoft YaHei"/>
+                <a:ea typeface="Microsoft YaHei"/>
+                <a:cs typeface="Microsoft YaHei"/>
+              </a:rPr>
+              <a:t>2028</a:t>
+            </a:r>
+          </a:p>
+        </p:txBody>
+      </p:sp>
+      <p:sp>
+        <p:nvSpPr>
+          <p:cNvPr id="32" name="">
+            <a:extLst xmlns:a="http://schemas.openxmlformats.org/drawingml/2006/main">
+              <a:ext uri="{FF2B5EF4-FFF2-40B4-BE49-F238E27FC236}">
+                <a16:creationId xmlns:a16="http://schemas.microsoft.com/office/drawing/2014/main" id="{FAEA72AD-9F1D-4694-8BA5-43BAEB80C5A6}"/>
+              </a:ext>
+            </a:extLst>
+          </p:cNvPr>
+          <p:cNvSpPr>
+            <a:spLocks xmlns:a="http://schemas.openxmlformats.org/drawingml/2006/main" noGrp="1"/>
+          </p:cNvSpPr>
+          <p:nvPr/>
+        </p:nvSpPr>
+        <p:spPr>
+          <a:xfrm xmlns:a="http://schemas.openxmlformats.org/drawingml/2006/main">
+            <a:off x="8039100" y="2724150"/>
+            <a:ext cx="1600200" cy="247650"/>
+          </a:xfrm>
+          <a:prstGeom xmlns:a="http://schemas.openxmlformats.org/drawingml/2006/main" prst="rect">
+            <a:avLst/>
+          </a:prstGeom>
+          <a:noFill xmlns:a="http://schemas.openxmlformats.org/drawingml/2006/main"/>
+          <a:ln xmlns:a="http://schemas.openxmlformats.org/drawingml/2006/main" w="0">
+            <a:noFill/>
+            <a:prstDash val="solid"/>
+          </a:ln>
+        </p:spPr>
+        <p:txBody>
+          <a:bodyPr xmlns:a="http://schemas.openxmlformats.org/drawingml/2006/main" lIns="0" tIns="0" rIns="0" bIns="0" anchor="ctr">
+            <a:normAutofit fontScale="100000"/>
+          </a:bodyPr>
+          <a:lstStyle xmlns:a="http://schemas.openxmlformats.org/drawingml/2006/main"/>
+          <a:p xmlns:a="http://schemas.openxmlformats.org/drawingml/2006/main">
+            <a:pPr algn="ctr">
+              <a:defRPr sz="1350" b="1">
+                <a:solidFill>
+                  <a:srgbClr val="7C8A9A"/>
+                </a:solidFill>
+                <a:latin typeface="Microsoft YaHei"/>
+                <a:ea typeface="Microsoft YaHei"/>
+                <a:cs typeface="Microsoft YaHei"/>
+              </a:defRPr>
+            </a:pPr>
+            <a:r>
+              <a:rPr sz="1350" b="1">
+                <a:solidFill>
+                  <a:srgbClr val="7C8A9A"/>
+                </a:solidFill>
+                <a:latin typeface="Microsoft YaHei"/>
+                <a:ea typeface="Microsoft YaHei"/>
+                <a:cs typeface="Microsoft YaHei"/>
+              </a:rPr>
+              <a:t>阶段 05</a:t>
+            </a:r>
+          </a:p>
+        </p:txBody>
+      </p:sp>
+      <p:sp>
+        <p:nvSpPr>
+          <p:cNvPr id="33" name="PPAGENT_QA|parent=timeline-node-4|domains=timeline-connection">
+            <a:extLst xmlns:a="http://schemas.openxmlformats.org/drawingml/2006/main">
+              <a:ext uri="{FF2B5EF4-FFF2-40B4-BE49-F238E27FC236}">
+                <a16:creationId xmlns:a16="http://schemas.microsoft.com/office/drawing/2014/main" id="{EECBC65F-EDEB-4C78-91BE-072042793FCD}"/>
+              </a:ext>
+            </a:extLst>
+          </p:cNvPr>
+          <p:cNvSpPr>
+            <a:spLocks xmlns:a="http://schemas.openxmlformats.org/drawingml/2006/main" noGrp="1"/>
+          </p:cNvSpPr>
+          <p:nvPr/>
+        </p:nvSpPr>
+        <p:spPr>
+          <a:xfrm xmlns:a="http://schemas.openxmlformats.org/drawingml/2006/main">
+            <a:off x="8715375" y="3086100"/>
+            <a:ext cx="247650" cy="247650"/>
+          </a:xfrm>
+          <a:prstGeom xmlns:a="http://schemas.openxmlformats.org/drawingml/2006/main" prst="ellipse">
+            <a:avLst/>
+          </a:prstGeom>
+          <a:solidFill xmlns:a="http://schemas.openxmlformats.org/drawingml/2006/main">
+            <a:srgbClr val="1677C8"/>
+          </a:solidFill>
+          <a:ln xmlns:a="http://schemas.openxmlformats.org/drawingml/2006/main" w="28575">
+            <a:solidFill>
+              <a:srgbClr val="FFFFFF"/>
+            </a:solidFill>
+            <a:prstDash val="solid"/>
+          </a:ln>
+        </p:spPr>
+        <p:style>
+          <a:lnRef xmlns:a="http://schemas.openxmlformats.org/drawingml/2006/main" idx="0"/>
+          <a:fillRef xmlns:a="http://schemas.openxmlformats.org/drawingml/2006/main" idx="0"/>
+          <a:effectRef xmlns:a="http://schemas.openxmlformats.org/drawingml/2006/main" idx="4"/>
+          <a:fontRef xmlns:a="http://schemas.openxmlformats.org/drawingml/2006/main" idx="major"/>
+        </p:style>
+      </p:sp>
+      <p:sp>
+        <p:nvSpPr>
+          <p:cNvPr id="34" name="PPAGENT_QA|parent=timeline-title-4|domains=timeline-content">
+            <a:extLst xmlns:a="http://schemas.openxmlformats.org/drawingml/2006/main">
+              <a:ext uri="{FF2B5EF4-FFF2-40B4-BE49-F238E27FC236}">
+                <a16:creationId xmlns:a16="http://schemas.microsoft.com/office/drawing/2014/main" id="{D425B9BD-6313-4DA1-8BE9-5BD1BC81CA8A}"/>
+              </a:ext>
+            </a:extLst>
+          </p:cNvPr>
+          <p:cNvSpPr>
+            <a:spLocks xmlns:a="http://schemas.openxmlformats.org/drawingml/2006/main" noGrp="1"/>
+          </p:cNvSpPr>
+          <p:nvPr/>
+        </p:nvSpPr>
+        <p:spPr>
+          <a:xfrm xmlns:a="http://schemas.openxmlformats.org/drawingml/2006/main">
+            <a:off x="8039100" y="3581400"/>
+            <a:ext cx="1600200" cy="552450"/>
+          </a:xfrm>
+          <a:prstGeom xmlns:a="http://schemas.openxmlformats.org/drawingml/2006/main" prst="rect">
+            <a:avLst/>
+          </a:prstGeom>
+          <a:noFill xmlns:a="http://schemas.openxmlformats.org/drawingml/2006/main"/>
+          <a:ln xmlns:a="http://schemas.openxmlformats.org/drawingml/2006/main" w="0">
+            <a:noFill/>
+            <a:prstDash val="solid"/>
+          </a:ln>
+        </p:spPr>
+        <p:txBody>
+          <a:bodyPr xmlns:a="http://schemas.openxmlformats.org/drawingml/2006/main" lIns="0" tIns="0" rIns="0" bIns="0" anchor="ctr">
+            <a:normAutofit fontScale="100000"/>
+          </a:bodyPr>
+          <a:lstStyle xmlns:a="http://schemas.openxmlformats.org/drawingml/2006/main"/>
+          <a:p xmlns:a="http://schemas.openxmlformats.org/drawingml/2006/main">
+            <a:pPr algn="ctr">
+              <a:defRPr sz="1425" b="1">
+                <a:solidFill>
+                  <a:srgbClr val="1677C8"/>
+                </a:solidFill>
+                <a:latin typeface="Microsoft YaHei"/>
+                <a:ea typeface="Microsoft YaHei"/>
+                <a:cs typeface="Microsoft YaHei"/>
+              </a:defRPr>
+            </a:pPr>
+            <a:r>
+              <a:rPr sz="1425" b="1">
+                <a:solidFill>
+                  <a:srgbClr val="1677C8"/>
+                </a:solidFill>
+                <a:latin typeface="Microsoft YaHei"/>
+                <a:ea typeface="Microsoft YaHei"/>
+                <a:cs typeface="Microsoft YaHei"/>
+              </a:rPr>
+              <a:t>形成系统</a:t>
+            </a:r>
+          </a:p>
+        </p:txBody>
+      </p:sp>
+      <p:sp>
+        <p:nvSpPr>
+          <p:cNvPr id="35" name="PPAGENT_QA|parent=timeline-body-4|domains=timeline-content">
+            <a:extLst xmlns:a="http://schemas.openxmlformats.org/drawingml/2006/main">
+              <a:ext uri="{FF2B5EF4-FFF2-40B4-BE49-F238E27FC236}">
+                <a16:creationId xmlns:a16="http://schemas.microsoft.com/office/drawing/2014/main" id="{BCF5397F-8929-4FF2-8903-863B76DCA033}"/>
+              </a:ext>
+            </a:extLst>
+          </p:cNvPr>
+          <p:cNvSpPr>
+            <a:spLocks xmlns:a="http://schemas.openxmlformats.org/drawingml/2006/main" noGrp="1"/>
+          </p:cNvSpPr>
+          <p:nvPr/>
+        </p:nvSpPr>
+        <p:spPr>
+          <a:xfrm xmlns:a="http://schemas.openxmlformats.org/drawingml/2006/main">
+            <a:off x="8077200" y="4210050"/>
+            <a:ext cx="1524000" cy="990600"/>
+          </a:xfrm>
+          <a:prstGeom xmlns:a="http://schemas.openxmlformats.org/drawingml/2006/main" prst="rect">
+            <a:avLst/>
+          </a:prstGeom>
+          <a:noFill xmlns:a="http://schemas.openxmlformats.org/drawingml/2006/main"/>
+          <a:ln xmlns:a="http://schemas.openxmlformats.org/drawingml/2006/main" w="0">
+            <a:noFill/>
+            <a:prstDash val="solid"/>
+          </a:ln>
+        </p:spPr>
+        <p:txBody>
+          <a:bodyPr xmlns:a="http://schemas.openxmlformats.org/drawingml/2006/main" lIns="0" tIns="0" rIns="0" bIns="0" anchor="t">
+            <a:normAutofit fontScale="100000"/>
+          </a:bodyPr>
+          <a:lstStyle xmlns:a="http://schemas.openxmlformats.org/drawingml/2006/main"/>
+          <a:p xmlns:a="http://schemas.openxmlformats.org/drawingml/2006/main">
+            <a:pPr algn="ctr">
+              <a:defRPr sz="1500" b="0">
+                <a:solidFill>
+                  <a:srgbClr val="475569"/>
+                </a:solidFill>
+                <a:latin typeface="Microsoft YaHei"/>
+                <a:ea typeface="Microsoft YaHei"/>
+                <a:cs typeface="Microsoft YaHei"/>
+              </a:defRPr>
+            </a:pPr>
+            <a:r>
+              <a:rPr sz="1500" b="0">
+                <a:solidFill>
+                  <a:srgbClr val="475569"/>
+                </a:solidFill>
+                <a:latin typeface="Microsoft YaHei"/>
+                <a:ea typeface="Microsoft YaHei"/>
+                <a:cs typeface="Microsoft YaHei"/>
+              </a:rPr>
+              <a:t>让生成与可靠</a:t>
+            </a:r>
+          </a:p>
+          <a:p xmlns:a="http://schemas.openxmlformats.org/drawingml/2006/main">
+            <a:pPr algn="ctr">
+              <a:defRPr sz="1500" b="0">
+                <a:solidFill>
+                  <a:srgbClr val="475569"/>
+                </a:solidFill>
+                <a:latin typeface="Microsoft YaHei"/>
+                <a:ea typeface="Microsoft YaHei"/>
+                <a:cs typeface="Microsoft YaHei"/>
+              </a:defRPr>
+            </a:pPr>
+            <a:r>
+              <a:rPr sz="1500" b="0">
+                <a:solidFill>
+                  <a:srgbClr val="475569"/>
+                </a:solidFill>
+                <a:latin typeface="Microsoft YaHei"/>
+                <a:ea typeface="Microsoft YaHei"/>
+                <a:cs typeface="Microsoft YaHei"/>
+              </a:rPr>
+              <a:t>交付形成链路</a:t>
+            </a:r>
+          </a:p>
+        </p:txBody>
+      </p:sp>
+      <p:sp>
+        <p:nvSpPr>
+          <p:cNvPr id="36" name="PPAGENT_QA|parent=timeline-bar-4|domains=timeline-shape">
+            <a:extLst xmlns:a="http://schemas.openxmlformats.org/drawingml/2006/main">
+              <a:ext uri="{FF2B5EF4-FFF2-40B4-BE49-F238E27FC236}">
+                <a16:creationId xmlns:a16="http://schemas.microsoft.com/office/drawing/2014/main" id="{F81E86A5-6404-4492-8957-09675FF2BD0A}"/>
+              </a:ext>
+            </a:extLst>
+          </p:cNvPr>
+          <p:cNvSpPr>
+            <a:spLocks xmlns:a="http://schemas.openxmlformats.org/drawingml/2006/main" noGrp="1"/>
+          </p:cNvSpPr>
+          <p:nvPr/>
+        </p:nvSpPr>
+        <p:spPr>
+          <a:xfrm xmlns:a="http://schemas.openxmlformats.org/drawingml/2006/main">
+            <a:off x="8610600" y="5391150"/>
+            <a:ext cx="457200" cy="47625"/>
+          </a:xfrm>
+          <a:prstGeom xmlns:a="http://schemas.openxmlformats.org/drawingml/2006/main" prst="roundRect">
+            <a:avLst>
+              <a:gd name="adj" fmla="val 50000"/>
+            </a:avLst>
+          </a:prstGeom>
+          <a:solidFill xmlns:a="http://schemas.openxmlformats.org/drawingml/2006/main">
+            <a:srgbClr val="DCEEFF"/>
+          </a:solidFill>
+          <a:ln xmlns:a="http://schemas.openxmlformats.org/drawingml/2006/main" w="0">
+            <a:noFill/>
+            <a:prstDash val="solid"/>
+          </a:ln>
+        </p:spPr>
+      </p:sp>
+      <p:sp>
+        <p:nvSpPr>
+          <p:cNvPr id="37" name="PPAGENT_QA|parent=timeline-period-5|domains=timeline-content">
+            <a:extLst xmlns:a="http://schemas.openxmlformats.org/drawingml/2006/main">
+              <a:ext uri="{FF2B5EF4-FFF2-40B4-BE49-F238E27FC236}">
+                <a16:creationId xmlns:a16="http://schemas.microsoft.com/office/drawing/2014/main" id="{1DBA0710-F1BB-440D-8792-5C91741064E7}"/>
+              </a:ext>
+            </a:extLst>
+          </p:cNvPr>
+          <p:cNvSpPr>
+            <a:spLocks xmlns:a="http://schemas.openxmlformats.org/drawingml/2006/main" noGrp="1"/>
+          </p:cNvSpPr>
+          <p:nvPr/>
+        </p:nvSpPr>
+        <p:spPr>
+          <a:xfrm xmlns:a="http://schemas.openxmlformats.org/drawingml/2006/main">
+            <a:off x="9867900" y="1619250"/>
+            <a:ext cx="1600200" cy="1000125"/>
+          </a:xfrm>
+          <a:prstGeom xmlns:a="http://schemas.openxmlformats.org/drawingml/2006/main" prst="rect">
+            <a:avLst/>
+          </a:prstGeom>
+          <a:noFill xmlns:a="http://schemas.openxmlformats.org/drawingml/2006/main"/>
+          <a:ln xmlns:a="http://schemas.openxmlformats.org/drawingml/2006/main" w="0">
+            <a:noFill/>
+            <a:prstDash val="solid"/>
+          </a:ln>
+        </p:spPr>
+        <p:txBody>
+          <a:bodyPr xmlns:a="http://schemas.openxmlformats.org/drawingml/2006/main" lIns="0" tIns="0" rIns="0" bIns="0" anchor="ctr">
+            <a:normAutofit fontScale="100000"/>
+          </a:bodyPr>
+          <a:lstStyle xmlns:a="http://schemas.openxmlformats.org/drawingml/2006/main"/>
+          <a:p xmlns:a="http://schemas.openxmlformats.org/drawingml/2006/main">
+            <a:pPr algn="ctr">
+              <a:defRPr sz="3300" b="1">
+                <a:solidFill>
+                  <a:srgbClr val="1677C8"/>
+                </a:solidFill>
+                <a:latin typeface="Microsoft YaHei"/>
+                <a:ea typeface="Microsoft YaHei"/>
+                <a:cs typeface="Microsoft YaHei"/>
+              </a:defRPr>
+            </a:pPr>
+            <a:r>
+              <a:rPr sz="3300" b="1">
+                <a:solidFill>
+                  <a:srgbClr val="1677C8"/>
+                </a:solidFill>
+                <a:latin typeface="Microsoft YaHei"/>
+                <a:ea typeface="Microsoft YaHei"/>
+                <a:cs typeface="Microsoft YaHei"/>
+              </a:rPr>
+              <a:t>2029</a:t>
+            </a:r>
+          </a:p>
+        </p:txBody>
+      </p:sp>
+      <p:sp>
+        <p:nvSpPr>
+          <p:cNvPr id="38" name="">
+            <a:extLst xmlns:a="http://schemas.openxmlformats.org/drawingml/2006/main">
+              <a:ext uri="{FF2B5EF4-FFF2-40B4-BE49-F238E27FC236}">
+                <a16:creationId xmlns:a16="http://schemas.microsoft.com/office/drawing/2014/main" id="{F0D994C4-1804-4D9A-93A3-7E83754CB2E7}"/>
+              </a:ext>
+            </a:extLst>
+          </p:cNvPr>
+          <p:cNvSpPr>
+            <a:spLocks xmlns:a="http://schemas.openxmlformats.org/drawingml/2006/main" noGrp="1"/>
+          </p:cNvSpPr>
+          <p:nvPr/>
+        </p:nvSpPr>
+        <p:spPr>
+          <a:xfrm xmlns:a="http://schemas.openxmlformats.org/drawingml/2006/main">
+            <a:off x="9867900" y="2724150"/>
+            <a:ext cx="1600200" cy="247650"/>
+          </a:xfrm>
+          <a:prstGeom xmlns:a="http://schemas.openxmlformats.org/drawingml/2006/main" prst="rect">
+            <a:avLst/>
+          </a:prstGeom>
+          <a:noFill xmlns:a="http://schemas.openxmlformats.org/drawingml/2006/main"/>
+          <a:ln xmlns:a="http://schemas.openxmlformats.org/drawingml/2006/main" w="0">
+            <a:noFill/>
+            <a:prstDash val="solid"/>
+          </a:ln>
+        </p:spPr>
+        <p:txBody>
+          <a:bodyPr xmlns:a="http://schemas.openxmlformats.org/drawingml/2006/main" lIns="0" tIns="0" rIns="0" bIns="0" anchor="ctr">
+            <a:normAutofit fontScale="100000"/>
+          </a:bodyPr>
+          <a:lstStyle xmlns:a="http://schemas.openxmlformats.org/drawingml/2006/main"/>
+          <a:p xmlns:a="http://schemas.openxmlformats.org/drawingml/2006/main">
+            <a:pPr algn="ctr">
+              <a:defRPr sz="1350" b="1">
+                <a:solidFill>
+                  <a:srgbClr val="00A8D8"/>
+                </a:solidFill>
+                <a:latin typeface="Microsoft YaHei"/>
+                <a:ea typeface="Microsoft YaHei"/>
+                <a:cs typeface="Microsoft YaHei"/>
+              </a:defRPr>
+            </a:pPr>
+            <a:r>
+              <a:rPr sz="1350" b="1">
+                <a:solidFill>
+                  <a:srgbClr val="00A8D8"/>
+                </a:solidFill>
+                <a:latin typeface="Microsoft YaHei"/>
+                <a:ea typeface="Microsoft YaHei"/>
+                <a:cs typeface="Microsoft YaHei"/>
+              </a:rPr>
+              <a:t>阶段 06</a:t>
+            </a:r>
+          </a:p>
+        </p:txBody>
+      </p:sp>
+      <p:sp>
+        <p:nvSpPr>
+          <p:cNvPr id="39" name="PPAGENT_QA|parent=timeline-node-5|domains=timeline-connection">
+            <a:extLst xmlns:a="http://schemas.openxmlformats.org/drawingml/2006/main">
+              <a:ext uri="{FF2B5EF4-FFF2-40B4-BE49-F238E27FC236}">
+                <a16:creationId xmlns:a16="http://schemas.microsoft.com/office/drawing/2014/main" id="{0841EB3A-1CB1-4DB7-A842-05C430395A07}"/>
+              </a:ext>
+            </a:extLst>
+          </p:cNvPr>
+          <p:cNvSpPr>
+            <a:spLocks xmlns:a="http://schemas.openxmlformats.org/drawingml/2006/main" noGrp="1"/>
+          </p:cNvSpPr>
+          <p:nvPr/>
+        </p:nvSpPr>
+        <p:spPr>
+          <a:xfrm xmlns:a="http://schemas.openxmlformats.org/drawingml/2006/main">
+            <a:off x="10544175" y="3086100"/>
+            <a:ext cx="247650" cy="247650"/>
+          </a:xfrm>
+          <a:prstGeom xmlns:a="http://schemas.openxmlformats.org/drawingml/2006/main" prst="ellipse">
+            <a:avLst/>
+          </a:prstGeom>
+          <a:solidFill xmlns:a="http://schemas.openxmlformats.org/drawingml/2006/main">
+            <a:srgbClr val="14CBD1"/>
+          </a:solidFill>
+          <a:ln xmlns:a="http://schemas.openxmlformats.org/drawingml/2006/main" w="28575">
+            <a:solidFill>
+              <a:srgbClr val="FFFFFF"/>
+            </a:solidFill>
+            <a:prstDash val="solid"/>
+          </a:ln>
+        </p:spPr>
+        <p:style>
+          <a:lnRef xmlns:a="http://schemas.openxmlformats.org/drawingml/2006/main" idx="0"/>
+          <a:fillRef xmlns:a="http://schemas.openxmlformats.org/drawingml/2006/main" idx="0"/>
+          <a:effectRef xmlns:a="http://schemas.openxmlformats.org/drawingml/2006/main" idx="4"/>
+          <a:fontRef xmlns:a="http://schemas.openxmlformats.org/drawingml/2006/main" idx="major"/>
+        </p:style>
+      </p:sp>
+      <p:sp>
+        <p:nvSpPr>
+          <p:cNvPr id="40" name="PPAGENT_QA|parent=timeline-title-5|domains=timeline-content">
+            <a:extLst xmlns:a="http://schemas.openxmlformats.org/drawingml/2006/main">
+              <a:ext uri="{FF2B5EF4-FFF2-40B4-BE49-F238E27FC236}">
+                <a16:creationId xmlns:a16="http://schemas.microsoft.com/office/drawing/2014/main" id="{D0AEA6FB-03BD-483B-887A-7E93498209E7}"/>
+              </a:ext>
+            </a:extLst>
+          </p:cNvPr>
+          <p:cNvSpPr>
+            <a:spLocks xmlns:a="http://schemas.openxmlformats.org/drawingml/2006/main" noGrp="1"/>
+          </p:cNvSpPr>
+          <p:nvPr/>
+        </p:nvSpPr>
+        <p:spPr>
+          <a:xfrm xmlns:a="http://schemas.openxmlformats.org/drawingml/2006/main">
+            <a:off x="9867900" y="3581400"/>
+            <a:ext cx="1600200" cy="552450"/>
+          </a:xfrm>
+          <a:prstGeom xmlns:a="http://schemas.openxmlformats.org/drawingml/2006/main" prst="rect">
+            <a:avLst/>
+          </a:prstGeom>
+          <a:noFill xmlns:a="http://schemas.openxmlformats.org/drawingml/2006/main"/>
+          <a:ln xmlns:a="http://schemas.openxmlformats.org/drawingml/2006/main" w="0">
+            <a:noFill/>
+            <a:prstDash val="solid"/>
+          </a:ln>
+        </p:spPr>
+        <p:txBody>
+          <a:bodyPr xmlns:a="http://schemas.openxmlformats.org/drawingml/2006/main" lIns="0" tIns="0" rIns="0" bIns="0" anchor="ctr">
+            <a:normAutofit fontScale="100000"/>
+          </a:bodyPr>
+          <a:lstStyle xmlns:a="http://schemas.openxmlformats.org/drawingml/2006/main"/>
+          <a:p xmlns:a="http://schemas.openxmlformats.org/drawingml/2006/main">
+            <a:pPr algn="ctr">
+              <a:defRPr sz="1425" b="1">
+                <a:solidFill>
+                  <a:srgbClr val="1677C8"/>
+                </a:solidFill>
+                <a:latin typeface="Microsoft YaHei"/>
+                <a:ea typeface="Microsoft YaHei"/>
+                <a:cs typeface="Microsoft YaHei"/>
+              </a:defRPr>
+            </a:pPr>
+            <a:r>
+              <a:rPr sz="1425" b="1">
+                <a:solidFill>
+                  <a:srgbClr val="1677C8"/>
+                </a:solidFill>
+                <a:latin typeface="Microsoft YaHei"/>
+                <a:ea typeface="Microsoft YaHei"/>
+                <a:cs typeface="Microsoft YaHei"/>
+              </a:rPr>
+              <a:t>持续演进</a:t>
+            </a:r>
+          </a:p>
+        </p:txBody>
+      </p:sp>
+      <p:sp>
+        <p:nvSpPr>
+          <p:cNvPr id="41" name="PPAGENT_QA|parent=timeline-body-5|domains=timeline-content">
+            <a:extLst xmlns:a="http://schemas.openxmlformats.org/drawingml/2006/main">
+              <a:ext uri="{FF2B5EF4-FFF2-40B4-BE49-F238E27FC236}">
+                <a16:creationId xmlns:a16="http://schemas.microsoft.com/office/drawing/2014/main" id="{5A37BE2F-8F4B-473B-8FF6-2FE7D6692CDD}"/>
+              </a:ext>
+            </a:extLst>
+          </p:cNvPr>
+          <p:cNvSpPr>
+            <a:spLocks xmlns:a="http://schemas.openxmlformats.org/drawingml/2006/main" noGrp="1"/>
+          </p:cNvSpPr>
+          <p:nvPr/>
+        </p:nvSpPr>
+        <p:spPr>
+          <a:xfrm xmlns:a="http://schemas.openxmlformats.org/drawingml/2006/main">
+            <a:off x="9906000" y="4210050"/>
+            <a:ext cx="1524000" cy="990600"/>
+          </a:xfrm>
+          <a:prstGeom xmlns:a="http://schemas.openxmlformats.org/drawingml/2006/main" prst="rect">
+            <a:avLst/>
+          </a:prstGeom>
+          <a:noFill xmlns:a="http://schemas.openxmlformats.org/drawingml/2006/main"/>
+          <a:ln xmlns:a="http://schemas.openxmlformats.org/drawingml/2006/main" w="0">
+            <a:noFill/>
+            <a:prstDash val="solid"/>
+          </a:ln>
+        </p:spPr>
+        <p:txBody>
+          <a:bodyPr xmlns:a="http://schemas.openxmlformats.org/drawingml/2006/main" lIns="0" tIns="0" rIns="0" bIns="0" anchor="t">
+            <a:normAutofit fontScale="100000"/>
+          </a:bodyPr>
+          <a:lstStyle xmlns:a="http://schemas.openxmlformats.org/drawingml/2006/main"/>
+          <a:p xmlns:a="http://schemas.openxmlformats.org/drawingml/2006/main">
+            <a:pPr algn="ctr">
+              <a:defRPr sz="1500" b="0">
+                <a:solidFill>
+                  <a:srgbClr val="475569"/>
+                </a:solidFill>
+                <a:latin typeface="Microsoft YaHei"/>
+                <a:ea typeface="Microsoft YaHei"/>
+                <a:cs typeface="Microsoft YaHei"/>
+              </a:defRPr>
+            </a:pPr>
+            <a:r>
+              <a:rPr sz="1500" b="0">
+                <a:solidFill>
+                  <a:srgbClr val="475569"/>
+                </a:solidFill>
+                <a:latin typeface="Microsoft YaHei"/>
+                <a:ea typeface="Microsoft YaHei"/>
+                <a:cs typeface="Microsoft YaHei"/>
+              </a:rPr>
+              <a:t>用反馈推动能力更新</a:t>
+            </a:r>
+          </a:p>
+        </p:txBody>
+      </p:sp>
+      <p:sp>
+        <p:nvSpPr>
+          <p:cNvPr id="42" name="PPAGENT_QA|parent=timeline-bar-5|domains=timeline-shape">
+            <a:extLst xmlns:a="http://schemas.openxmlformats.org/drawingml/2006/main">
+              <a:ext uri="{FF2B5EF4-FFF2-40B4-BE49-F238E27FC236}">
+                <a16:creationId xmlns:a16="http://schemas.microsoft.com/office/drawing/2014/main" id="{1A34F38C-461B-4E5C-997F-B40455AB3071}"/>
+              </a:ext>
+            </a:extLst>
+          </p:cNvPr>
+          <p:cNvSpPr>
+            <a:spLocks xmlns:a="http://schemas.openxmlformats.org/drawingml/2006/main" noGrp="1"/>
+          </p:cNvSpPr>
+          <p:nvPr/>
+        </p:nvSpPr>
+        <p:spPr>
+          <a:xfrm xmlns:a="http://schemas.openxmlformats.org/drawingml/2006/main">
+            <a:off x="10439400" y="5391150"/>
+            <a:ext cx="457200" cy="47625"/>
+          </a:xfrm>
+          <a:prstGeom xmlns:a="http://schemas.openxmlformats.org/drawingml/2006/main" prst="roundRect">
+            <a:avLst>
+              <a:gd name="adj" fmla="val 50000"/>
+            </a:avLst>
+          </a:prstGeom>
+          <a:solidFill xmlns:a="http://schemas.openxmlformats.org/drawingml/2006/main">
+            <a:srgbClr val="14CBD1"/>
+          </a:solidFill>
+          <a:ln xmlns:a="http://schemas.openxmlformats.org/drawingml/2006/main" w="0">
+            <a:noFill/>
+            <a:prstDash val="solid"/>
+          </a:ln>
+        </p:spPr>
+      </p:sp>
+    </p:spTree>
+    <p:extLst>
+      <p:ext uri="{BB962C8B-B14F-4D97-AF65-F5344CB8AC3E}">
+        <p14:creationId xmlns:p14="http://schemas.microsoft.com/office/powerpoint/2010/main" val="402183848"/>
       </p:ext>
     </p:extLst>
   </p:cSld>
